--- a/docs/design/dist/d06-schedule.pptx
+++ b/docs/design/dist/d06-schedule.pptx
@@ -3104,8 +3104,8 @@
         </p:nvSpPr>
         <p:spPr>
           <a:xfrm>
-            <a:off x="381000" y="289560"/>
-            <a:ext cx="53340" cy="335280"/>
+            <a:off x="381000" y="274320"/>
+            <a:ext cx="53340" cy="548640"/>
           </a:xfrm>
           <a:prstGeom prst="roundRect">
             <a:avLst>
@@ -3113,7 +3113,7 @@
             </a:avLst>
           </a:prstGeom>
           <a:solidFill>
-            <a:srgbClr val="164B8C"/>
+            <a:srgbClr val="1F4E8C"/>
           </a:solidFill>
           <a:ln>
             <a:noFill/>
@@ -3135,8 +3135,8 @@
         </p:nvSpPr>
         <p:spPr>
           <a:xfrm>
-            <a:off x="533400" y="289560"/>
-            <a:ext cx="7620000" cy="304800"/>
+            <a:off x="533400" y="228600"/>
+            <a:ext cx="8001000" cy="365760"/>
           </a:xfrm>
           <a:prstGeom prst="rect">
             <a:avLst/>
@@ -3151,9 +3151,9 @@
           <a:p>
             <a:pPr algn="l"/>
             <a:r>
-              <a:rPr sz="1800" b="1">
-                <a:solidFill>
-                  <a:srgbClr val="0A2342"/>
+              <a:rPr sz="2160" b="1">
+                <a:solidFill>
+                  <a:srgbClr val="0B2545"/>
                 </a:solidFill>
                 <a:latin typeface="Pretendard"/>
                 <a:ea typeface="Pretendard"/>
@@ -3172,8 +3172,8 @@
         </p:nvSpPr>
         <p:spPr>
           <a:xfrm>
-            <a:off x="533400" y="624840"/>
-            <a:ext cx="7620000" cy="167640"/>
+            <a:off x="533400" y="640080"/>
+            <a:ext cx="9144000" cy="182880"/>
           </a:xfrm>
           <a:prstGeom prst="rect">
             <a:avLst/>
@@ -3188,7 +3188,7 @@
           <a:p>
             <a:pPr algn="l"/>
             <a:r>
-              <a:rPr sz="960" b="0">
+              <a:rPr sz="1080" b="0">
                 <a:solidFill>
                   <a:srgbClr val="3F4E61"/>
                 </a:solidFill>
@@ -3196,7 +3196,7 @@
                 <a:ea typeface="Pretendard"/>
                 <a:cs typeface="Pretendard"/>
               </a:rPr>
-              <a:t>단계별 기간(안) · 단계 끝 = Mac 에서 완료 기준을 확인한 날 · 오늘 2026-10-06</a:t>
+              <a:t>0 ~ 5단계는 실제(PR 머지일) · 6단계부터 안(案) · 오늘 2026-10-09</a:t>
             </a:r>
           </a:p>
         </p:txBody>
@@ -3209,8 +3209,8 @@
         </p:nvSpPr>
         <p:spPr>
           <a:xfrm>
-            <a:off x="8763000" y="426720"/>
-            <a:ext cx="3048000" cy="152400"/>
+            <a:off x="8382000" y="411480"/>
+            <a:ext cx="3429000" cy="167640"/>
           </a:xfrm>
           <a:prstGeom prst="rect">
             <a:avLst/>
@@ -3225,7 +3225,7 @@
           <a:p>
             <a:pPr algn="r"/>
             <a:r>
-              <a:rPr sz="840" b="0">
+              <a:rPr sz="1019" b="0">
                 <a:solidFill>
                   <a:srgbClr val="3F4E61"/>
                 </a:solidFill>
@@ -3233,7 +3233,7 @@
                 <a:ea typeface="Pretendard"/>
                 <a:cs typeface="Pretendard"/>
               </a:rPr>
-              <a:t>KDMS-D06 · v0.1 · 2026-10-06</a:t>
+              <a:t>KDMS-D06 · v0.2 · 2026-10-09</a:t>
             </a:r>
           </a:p>
         </p:txBody>
@@ -3255,7 +3255,7 @@
             </a:avLst>
           </a:prstGeom>
           <a:solidFill>
-            <a:srgbClr val="164B8C"/>
+            <a:srgbClr val="1F4E8C"/>
           </a:solidFill>
           <a:ln>
             <a:noFill/>
@@ -3277,8 +3277,8 @@
         </p:nvSpPr>
         <p:spPr>
           <a:xfrm>
-            <a:off x="381000" y="1965960"/>
-            <a:ext cx="11430000" cy="472440"/>
+            <a:off x="381000" y="1981200"/>
+            <a:ext cx="11430000" cy="518160"/>
           </a:xfrm>
           <a:prstGeom prst="roundRect">
             <a:avLst>
@@ -3286,7 +3286,7 @@
             </a:avLst>
           </a:prstGeom>
           <a:solidFill>
-            <a:srgbClr val="F1F6FC"/>
+            <a:srgbClr val="EEF6FD"/>
           </a:solidFill>
           <a:ln>
             <a:noFill/>
@@ -3308,8 +3308,8 @@
         </p:nvSpPr>
         <p:spPr>
           <a:xfrm>
-            <a:off x="381000" y="2910840"/>
-            <a:ext cx="11430000" cy="472440"/>
+            <a:off x="381000" y="3017520"/>
+            <a:ext cx="11430000" cy="518160"/>
           </a:xfrm>
           <a:prstGeom prst="roundRect">
             <a:avLst>
@@ -3317,7 +3317,7 @@
             </a:avLst>
           </a:prstGeom>
           <a:solidFill>
-            <a:srgbClr val="F1F6FC"/>
+            <a:srgbClr val="EEF6FD"/>
           </a:solidFill>
           <a:ln>
             <a:noFill/>
@@ -3339,8 +3339,8 @@
         </p:nvSpPr>
         <p:spPr>
           <a:xfrm>
-            <a:off x="381000" y="3855720"/>
-            <a:ext cx="11430000" cy="472440"/>
+            <a:off x="381000" y="4053840"/>
+            <a:ext cx="11430000" cy="518160"/>
           </a:xfrm>
           <a:prstGeom prst="roundRect">
             <a:avLst>
@@ -3348,7 +3348,7 @@
             </a:avLst>
           </a:prstGeom>
           <a:solidFill>
-            <a:srgbClr val="F1F6FC"/>
+            <a:srgbClr val="EEF6FD"/>
           </a:solidFill>
           <a:ln>
             <a:noFill/>
@@ -3370,8 +3370,8 @@
         </p:nvSpPr>
         <p:spPr>
           <a:xfrm>
-            <a:off x="381000" y="4800600"/>
-            <a:ext cx="11430000" cy="472440"/>
+            <a:off x="381000" y="5090160"/>
+            <a:ext cx="11430000" cy="518160"/>
           </a:xfrm>
           <a:prstGeom prst="roundRect">
             <a:avLst>
@@ -3379,7 +3379,7 @@
             </a:avLst>
           </a:prstGeom>
           <a:solidFill>
-            <a:srgbClr val="F1F6FC"/>
+            <a:srgbClr val="EEF6FD"/>
           </a:solidFill>
           <a:ln>
             <a:noFill/>
@@ -3402,7 +3402,7 @@
         <p:spPr>
           <a:xfrm>
             <a:off x="3577590" y="1447800"/>
-            <a:ext cx="7620" cy="4297680"/>
+            <a:ext cx="7620" cy="4678680"/>
           </a:xfrm>
           <a:prstGeom prst="roundRect">
             <a:avLst>
@@ -3432,8 +3432,8 @@
         </p:nvSpPr>
         <p:spPr>
           <a:xfrm>
-            <a:off x="4210636" y="1447800"/>
-            <a:ext cx="7620" cy="4297680"/>
+            <a:off x="4949190" y="1447800"/>
+            <a:ext cx="7620" cy="4678680"/>
           </a:xfrm>
           <a:prstGeom prst="roundRect">
             <a:avLst>
@@ -3463,8 +3463,8 @@
         </p:nvSpPr>
         <p:spPr>
           <a:xfrm>
-            <a:off x="4843682" y="1447800"/>
-            <a:ext cx="7620" cy="4297680"/>
+            <a:off x="6320790" y="1447800"/>
+            <a:ext cx="7620" cy="4678680"/>
           </a:xfrm>
           <a:prstGeom prst="roundRect">
             <a:avLst>
@@ -3494,8 +3494,8 @@
         </p:nvSpPr>
         <p:spPr>
           <a:xfrm>
-            <a:off x="5476728" y="1447800"/>
-            <a:ext cx="7620" cy="4297680"/>
+            <a:off x="7692390" y="1447800"/>
+            <a:ext cx="7620" cy="4678680"/>
           </a:xfrm>
           <a:prstGeom prst="roundRect">
             <a:avLst>
@@ -3525,8 +3525,8 @@
         </p:nvSpPr>
         <p:spPr>
           <a:xfrm>
-            <a:off x="6109775" y="1447800"/>
-            <a:ext cx="7620" cy="4297680"/>
+            <a:off x="9063990" y="1447800"/>
+            <a:ext cx="7620" cy="4678680"/>
           </a:xfrm>
           <a:prstGeom prst="roundRect">
             <a:avLst>
@@ -3556,8 +3556,8 @@
         </p:nvSpPr>
         <p:spPr>
           <a:xfrm>
-            <a:off x="6742821" y="1447800"/>
-            <a:ext cx="7620" cy="4297680"/>
+            <a:off x="10435590" y="1447800"/>
+            <a:ext cx="7620" cy="4678680"/>
           </a:xfrm>
           <a:prstGeom prst="roundRect">
             <a:avLst>
@@ -3587,8 +3587,8 @@
         </p:nvSpPr>
         <p:spPr>
           <a:xfrm>
-            <a:off x="7375867" y="1447800"/>
-            <a:ext cx="7620" cy="4297680"/>
+            <a:off x="11807190" y="1447800"/>
+            <a:ext cx="7620" cy="4678680"/>
           </a:xfrm>
           <a:prstGeom prst="roundRect">
             <a:avLst>
@@ -3612,14 +3612,14 @@
       </p:sp>
       <p:sp>
         <p:nvSpPr>
-          <p:cNvPr id="18" name="주 격자"/>
+          <p:cNvPr id="18" name="오늘 선"/>
           <p:cNvSpPr/>
           <p:nvPr/>
         </p:nvSpPr>
         <p:spPr>
           <a:xfrm>
-            <a:off x="8008913" y="1447800"/>
-            <a:ext cx="7620" cy="4297680"/>
+            <a:off x="5827123" y="1447800"/>
+            <a:ext cx="15240" cy="4861560"/>
           </a:xfrm>
           <a:prstGeom prst="roundRect">
             <a:avLst>
@@ -3627,7 +3627,7 @@
             </a:avLst>
           </a:prstGeom>
           <a:solidFill>
-            <a:srgbClr val="D6E3F2"/>
+            <a:srgbClr val="0B2545"/>
           </a:solidFill>
           <a:ln>
             <a:noFill/>
@@ -3643,115 +3643,154 @@
       </p:sp>
       <p:sp>
         <p:nvSpPr>
-          <p:cNvPr id="19" name="주 격자"/>
+          <p:cNvPr id="19" name="막대 0. 환경 준비"/>
           <p:cNvSpPr/>
           <p:nvPr/>
         </p:nvSpPr>
         <p:spPr>
           <a:xfrm>
-            <a:off x="8641959" y="1447800"/>
-            <a:ext cx="7620" cy="4297680"/>
+            <a:off x="4169229" y="1584960"/>
+            <a:ext cx="1175657" cy="274320"/>
           </a:xfrm>
           <a:prstGeom prst="roundRect">
             <a:avLst>
-              <a:gd name="adj" fmla="val 0"/>
+              <a:gd name="adj" fmla="val 22222"/>
             </a:avLst>
           </a:prstGeom>
           <a:solidFill>
-            <a:srgbClr val="D6E3F2"/>
+            <a:srgbClr val="1F4E8C"/>
           </a:solidFill>
           <a:ln>
             <a:noFill/>
           </a:ln>
         </p:spPr>
         <p:txBody>
-          <a:bodyPr rtlCol="0" anchor="ctr"/>
+          <a:bodyPr rtlCol="0" anchor="ctr" lIns="0" tIns="0" rIns="0" bIns="0" wrap="none">
+            <a:noAutofit/>
+          </a:bodyPr>
           <a:lstStyle/>
           <a:p>
             <a:pPr algn="ctr"/>
-          </a:p>
-        </p:txBody>
-      </p:sp>
-      <p:sp>
-        <p:nvSpPr>
-          <p:cNvPr id="20" name="주 격자"/>
+            <a:r>
+              <a:rPr sz="1019" b="1">
+                <a:solidFill>
+                  <a:srgbClr val="FFFFFF"/>
+                </a:solidFill>
+                <a:latin typeface="Pretendard"/>
+                <a:ea typeface="Pretendard"/>
+                <a:cs typeface="Pretendard"/>
+              </a:rPr>
+              <a:t>10/1 ~ 10/6</a:t>
+            </a:r>
+          </a:p>
+        </p:txBody>
+      </p:sp>
+      <p:sp>
+        <p:nvSpPr>
+          <p:cNvPr id="20" name="막대 1. 골격"/>
           <p:cNvSpPr/>
           <p:nvPr/>
         </p:nvSpPr>
         <p:spPr>
           <a:xfrm>
-            <a:off x="9275005" y="1447800"/>
-            <a:ext cx="7620" cy="4297680"/>
+            <a:off x="4169229" y="2103120"/>
+            <a:ext cx="1175657" cy="274320"/>
           </a:xfrm>
           <a:prstGeom prst="roundRect">
             <a:avLst>
-              <a:gd name="adj" fmla="val 0"/>
+              <a:gd name="adj" fmla="val 22222"/>
             </a:avLst>
           </a:prstGeom>
           <a:solidFill>
-            <a:srgbClr val="D6E3F2"/>
+            <a:srgbClr val="1F4E8C"/>
           </a:solidFill>
           <a:ln>
             <a:noFill/>
           </a:ln>
         </p:spPr>
         <p:txBody>
-          <a:bodyPr rtlCol="0" anchor="ctr"/>
+          <a:bodyPr rtlCol="0" anchor="ctr" lIns="0" tIns="0" rIns="0" bIns="0" wrap="none">
+            <a:noAutofit/>
+          </a:bodyPr>
           <a:lstStyle/>
           <a:p>
             <a:pPr algn="ctr"/>
-          </a:p>
-        </p:txBody>
-      </p:sp>
-      <p:sp>
-        <p:nvSpPr>
-          <p:cNvPr id="21" name="주 격자"/>
+            <a:r>
+              <a:rPr sz="1019" b="1">
+                <a:solidFill>
+                  <a:srgbClr val="FFFFFF"/>
+                </a:solidFill>
+                <a:latin typeface="Pretendard"/>
+                <a:ea typeface="Pretendard"/>
+                <a:cs typeface="Pretendard"/>
+              </a:rPr>
+              <a:t>10/1 ~ 10/6</a:t>
+            </a:r>
+          </a:p>
+        </p:txBody>
+      </p:sp>
+      <p:sp>
+        <p:nvSpPr>
+          <p:cNvPr id="21" name="막대 2. 스키마 변환"/>
           <p:cNvSpPr/>
           <p:nvPr/>
         </p:nvSpPr>
         <p:spPr>
           <a:xfrm>
-            <a:off x="9908052" y="1447800"/>
-            <a:ext cx="7620" cy="4297680"/>
+            <a:off x="4169229" y="2621280"/>
+            <a:ext cx="1175657" cy="274320"/>
           </a:xfrm>
           <a:prstGeom prst="roundRect">
             <a:avLst>
-              <a:gd name="adj" fmla="val 0"/>
+              <a:gd name="adj" fmla="val 22222"/>
             </a:avLst>
           </a:prstGeom>
           <a:solidFill>
-            <a:srgbClr val="D6E3F2"/>
+            <a:srgbClr val="1F4E8C"/>
           </a:solidFill>
           <a:ln>
             <a:noFill/>
           </a:ln>
         </p:spPr>
         <p:txBody>
-          <a:bodyPr rtlCol="0" anchor="ctr"/>
+          <a:bodyPr rtlCol="0" anchor="ctr" lIns="0" tIns="0" rIns="0" bIns="0" wrap="none">
+            <a:noAutofit/>
+          </a:bodyPr>
           <a:lstStyle/>
           <a:p>
             <a:pPr algn="ctr"/>
-          </a:p>
-        </p:txBody>
-      </p:sp>
-      <p:sp>
-        <p:nvSpPr>
-          <p:cNvPr id="22" name="주 격자"/>
+            <a:r>
+              <a:rPr sz="1019" b="1">
+                <a:solidFill>
+                  <a:srgbClr val="FFFFFF"/>
+                </a:solidFill>
+                <a:latin typeface="Pretendard"/>
+                <a:ea typeface="Pretendard"/>
+                <a:cs typeface="Pretendard"/>
+              </a:rPr>
+              <a:t>10/1 ~ 10/6</a:t>
+            </a:r>
+          </a:p>
+        </p:txBody>
+      </p:sp>
+      <p:sp>
+        <p:nvSpPr>
+          <p:cNvPr id="22" name="막대 3. 전체 적재 + 검증"/>
           <p:cNvSpPr/>
           <p:nvPr/>
         </p:nvSpPr>
         <p:spPr>
           <a:xfrm>
-            <a:off x="10541098" y="1447800"/>
-            <a:ext cx="7620" cy="4297680"/>
+            <a:off x="5344886" y="3139440"/>
+            <a:ext cx="391886" cy="274320"/>
           </a:xfrm>
           <a:prstGeom prst="roundRect">
             <a:avLst>
-              <a:gd name="adj" fmla="val 0"/>
+              <a:gd name="adj" fmla="val 22222"/>
             </a:avLst>
           </a:prstGeom>
           <a:solidFill>
-            <a:srgbClr val="D6E3F2"/>
+            <a:srgbClr val="1F4E8C"/>
           </a:solidFill>
           <a:ln>
             <a:noFill/>
@@ -3767,22 +3806,22 @@
       </p:sp>
       <p:sp>
         <p:nvSpPr>
-          <p:cNvPr id="23" name="주 격자"/>
+          <p:cNvPr id="23" name="막대 4. CDC 수집·반영"/>
           <p:cNvSpPr/>
           <p:nvPr/>
         </p:nvSpPr>
         <p:spPr>
           <a:xfrm>
-            <a:off x="11174144" y="1447800"/>
-            <a:ext cx="7620" cy="4297680"/>
+            <a:off x="5540829" y="3657600"/>
+            <a:ext cx="195943" cy="274320"/>
           </a:xfrm>
           <a:prstGeom prst="roundRect">
             <a:avLst>
-              <a:gd name="adj" fmla="val 0"/>
+              <a:gd name="adj" fmla="val 31111"/>
             </a:avLst>
           </a:prstGeom>
           <a:solidFill>
-            <a:srgbClr val="D6E3F2"/>
+            <a:srgbClr val="1F4E8C"/>
           </a:solidFill>
           <a:ln>
             <a:noFill/>
@@ -3798,22 +3837,22 @@
       </p:sp>
       <p:sp>
         <p:nvSpPr>
-          <p:cNvPr id="24" name="주 격자"/>
+          <p:cNvPr id="24" name="막대 5. 전환 + 화면·CLI"/>
           <p:cNvSpPr/>
           <p:nvPr/>
         </p:nvSpPr>
         <p:spPr>
           <a:xfrm>
-            <a:off x="11807190" y="1447800"/>
-            <a:ext cx="7620" cy="4297680"/>
+            <a:off x="5540829" y="4175760"/>
+            <a:ext cx="195943" cy="274320"/>
           </a:xfrm>
           <a:prstGeom prst="roundRect">
             <a:avLst>
-              <a:gd name="adj" fmla="val 0"/>
+              <a:gd name="adj" fmla="val 31111"/>
             </a:avLst>
           </a:prstGeom>
           <a:solidFill>
-            <a:srgbClr val="D6E3F2"/>
+            <a:srgbClr val="1F4E8C"/>
           </a:solidFill>
           <a:ln>
             <a:noFill/>
@@ -3829,121 +3868,28 @@
       </p:sp>
       <p:sp>
         <p:nvSpPr>
-          <p:cNvPr id="25" name="오늘 선"/>
+          <p:cNvPr id="25" name="막대 6. MVP 리허설"/>
           <p:cNvSpPr/>
           <p:nvPr/>
         </p:nvSpPr>
         <p:spPr>
           <a:xfrm>
-            <a:off x="4342479" y="1447800"/>
-            <a:ext cx="15240" cy="4404360"/>
+            <a:off x="5736771" y="4693920"/>
+            <a:ext cx="1567543" cy="274320"/>
           </a:xfrm>
           <a:prstGeom prst="roundRect">
             <a:avLst>
-              <a:gd name="adj" fmla="val 0"/>
+              <a:gd name="adj" fmla="val 22222"/>
             </a:avLst>
           </a:prstGeom>
           <a:solidFill>
-            <a:srgbClr val="0A2342"/>
+            <a:srgbClr val="2B86C9"/>
           </a:solidFill>
           <a:ln>
             <a:noFill/>
           </a:ln>
         </p:spPr>
         <p:txBody>
-          <a:bodyPr rtlCol="0" anchor="ctr"/>
-          <a:lstStyle/>
-          <a:p>
-            <a:pPr algn="ctr"/>
-          </a:p>
-        </p:txBody>
-      </p:sp>
-      <p:sp>
-        <p:nvSpPr>
-          <p:cNvPr id="26" name="막대 0. 환경 준비"/>
-          <p:cNvSpPr/>
-          <p:nvPr/>
-        </p:nvSpPr>
-        <p:spPr>
-          <a:xfrm>
-            <a:off x="3852705" y="1607820"/>
-            <a:ext cx="542611" cy="243840"/>
-          </a:xfrm>
-          <a:prstGeom prst="roundRect">
-            <a:avLst>
-              <a:gd name="adj" fmla="val 25000"/>
-            </a:avLst>
-          </a:prstGeom>
-          <a:solidFill>
-            <a:srgbClr val="164B8C"/>
-          </a:solidFill>
-          <a:ln>
-            <a:noFill/>
-          </a:ln>
-        </p:spPr>
-        <p:txBody>
-          <a:bodyPr rtlCol="0" anchor="ctr"/>
-          <a:lstStyle/>
-          <a:p>
-            <a:pPr algn="ctr"/>
-          </a:p>
-        </p:txBody>
-      </p:sp>
-      <p:sp>
-        <p:nvSpPr>
-          <p:cNvPr id="27" name="막대 1. 골격"/>
-          <p:cNvSpPr/>
-          <p:nvPr/>
-        </p:nvSpPr>
-        <p:spPr>
-          <a:xfrm>
-            <a:off x="3852705" y="2080260"/>
-            <a:ext cx="542611" cy="243840"/>
-          </a:xfrm>
-          <a:prstGeom prst="roundRect">
-            <a:avLst>
-              <a:gd name="adj" fmla="val 25000"/>
-            </a:avLst>
-          </a:prstGeom>
-          <a:solidFill>
-            <a:srgbClr val="164B8C"/>
-          </a:solidFill>
-          <a:ln>
-            <a:noFill/>
-          </a:ln>
-        </p:spPr>
-        <p:txBody>
-          <a:bodyPr rtlCol="0" anchor="ctr"/>
-          <a:lstStyle/>
-          <a:p>
-            <a:pPr algn="ctr"/>
-          </a:p>
-        </p:txBody>
-      </p:sp>
-      <p:sp>
-        <p:nvSpPr>
-          <p:cNvPr id="28" name="막대 2. 스키마 변환"/>
-          <p:cNvSpPr/>
-          <p:nvPr/>
-        </p:nvSpPr>
-        <p:spPr>
-          <a:xfrm>
-            <a:off x="3852705" y="2552700"/>
-            <a:ext cx="813916" cy="243840"/>
-          </a:xfrm>
-          <a:prstGeom prst="roundRect">
-            <a:avLst>
-              <a:gd name="adj" fmla="val 25000"/>
-            </a:avLst>
-          </a:prstGeom>
-          <a:solidFill>
-            <a:srgbClr val="1F74C4"/>
-          </a:solidFill>
-          <a:ln>
-            <a:noFill/>
-          </a:ln>
-        </p:spPr>
-        <p:txBody>
           <a:bodyPr rtlCol="0" anchor="ctr" lIns="0" tIns="0" rIns="0" bIns="0" wrap="none">
             <a:noAutofit/>
           </a:bodyPr>
@@ -3951,7 +3897,7 @@
           <a:p>
             <a:pPr algn="ctr"/>
             <a:r>
-              <a:rPr sz="780" b="1">
+              <a:rPr sz="1019" b="1">
                 <a:solidFill>
                   <a:srgbClr val="FFFFFF"/>
                 </a:solidFill>
@@ -3959,25 +3905,25 @@
                 <a:ea typeface="Pretendard"/>
                 <a:cs typeface="Pretendard"/>
               </a:rPr>
-              <a:t>10/1 ~ 10/9</a:t>
-            </a:r>
-          </a:p>
-        </p:txBody>
-      </p:sp>
-      <p:sp>
-        <p:nvSpPr>
-          <p:cNvPr id="29" name="막대 3. 전체 적재 + 검증"/>
+              <a:t>10/9 ~ 10/16</a:t>
+            </a:r>
+          </a:p>
+        </p:txBody>
+      </p:sp>
+      <p:sp>
+        <p:nvSpPr>
+          <p:cNvPr id="26" name="막대 7. 설치본"/>
           <p:cNvSpPr/>
           <p:nvPr/>
         </p:nvSpPr>
         <p:spPr>
           <a:xfrm>
-            <a:off x="4847492" y="3025140"/>
-            <a:ext cx="1085222" cy="243840"/>
+            <a:off x="7696200" y="5212080"/>
+            <a:ext cx="979714" cy="274320"/>
           </a:xfrm>
           <a:prstGeom prst="roundRect">
             <a:avLst>
-              <a:gd name="adj" fmla="val 25000"/>
+              <a:gd name="adj" fmla="val 22222"/>
             </a:avLst>
           </a:prstGeom>
           <a:solidFill>
@@ -3985,45 +3931,32 @@
           </a:solidFill>
           <a:ln w="9144">
             <a:solidFill>
-              <a:srgbClr val="164B8C"/>
+              <a:srgbClr val="1F4E8C"/>
             </a:solidFill>
           </a:ln>
         </p:spPr>
         <p:txBody>
-          <a:bodyPr rtlCol="0" anchor="ctr" lIns="0" tIns="0" rIns="0" bIns="0" wrap="none">
-            <a:noAutofit/>
-          </a:bodyPr>
+          <a:bodyPr rtlCol="0" anchor="ctr"/>
           <a:lstStyle/>
           <a:p>
             <a:pPr algn="ctr"/>
-            <a:r>
-              <a:rPr sz="780" b="1">
-                <a:solidFill>
-                  <a:srgbClr val="164B8C"/>
-                </a:solidFill>
-                <a:latin typeface="Pretendard"/>
-                <a:ea typeface="Pretendard"/>
-                <a:cs typeface="Pretendard"/>
-              </a:rPr>
-              <a:t>10/12 ~ 10/23</a:t>
-            </a:r>
-          </a:p>
-        </p:txBody>
-      </p:sp>
-      <p:sp>
-        <p:nvSpPr>
-          <p:cNvPr id="30" name="막대 4. CDC 수집·반영"/>
+          </a:p>
+        </p:txBody>
+      </p:sp>
+      <p:sp>
+        <p:nvSpPr>
+          <p:cNvPr id="27" name="막대 8. 확장"/>
           <p:cNvSpPr/>
           <p:nvPr/>
         </p:nvSpPr>
         <p:spPr>
           <a:xfrm>
-            <a:off x="6113585" y="3497580"/>
-            <a:ext cx="1718268" cy="243840"/>
+            <a:off x="9067800" y="5730240"/>
+            <a:ext cx="979714" cy="274320"/>
           </a:xfrm>
           <a:prstGeom prst="roundRect">
             <a:avLst>
-              <a:gd name="adj" fmla="val 25000"/>
+              <a:gd name="adj" fmla="val 22222"/>
             </a:avLst>
           </a:prstGeom>
           <a:solidFill>
@@ -4031,207 +3964,49 @@
           </a:solidFill>
           <a:ln w="9144">
             <a:solidFill>
-              <a:srgbClr val="164B8C"/>
+              <a:srgbClr val="1F4E8C"/>
             </a:solidFill>
           </a:ln>
         </p:spPr>
         <p:txBody>
-          <a:bodyPr rtlCol="0" anchor="ctr" lIns="0" tIns="0" rIns="0" bIns="0" wrap="none">
-            <a:noAutofit/>
-          </a:bodyPr>
+          <a:bodyPr rtlCol="0" anchor="ctr"/>
           <a:lstStyle/>
           <a:p>
             <a:pPr algn="ctr"/>
-            <a:r>
-              <a:rPr sz="780" b="1">
-                <a:solidFill>
-                  <a:srgbClr val="164B8C"/>
-                </a:solidFill>
-                <a:latin typeface="Pretendard"/>
-                <a:ea typeface="Pretendard"/>
-                <a:cs typeface="Pretendard"/>
-              </a:rPr>
-              <a:t>10/26 ~ 11/13</a:t>
-            </a:r>
-          </a:p>
-        </p:txBody>
-      </p:sp>
-      <p:sp>
-        <p:nvSpPr>
-          <p:cNvPr id="31" name="막대 5. 전환 + 화면·CLI"/>
-          <p:cNvSpPr/>
-          <p:nvPr/>
-        </p:nvSpPr>
-        <p:spPr>
-          <a:xfrm>
-            <a:off x="8012723" y="3970020"/>
-            <a:ext cx="1085222" cy="243840"/>
-          </a:xfrm>
-          <a:prstGeom prst="roundRect">
-            <a:avLst>
-              <a:gd name="adj" fmla="val 25000"/>
-            </a:avLst>
-          </a:prstGeom>
-          <a:solidFill>
-            <a:srgbClr val="D3E5F8"/>
-          </a:solidFill>
-          <a:ln w="9144">
+          </a:p>
+        </p:txBody>
+      </p:sp>
+      <p:cxnSp>
+        <p:nvCxnSpPr>
+          <p:cNvPr id="28" name="선"/>
+          <p:cNvCxnSpPr/>
+          <p:nvPr/>
+        </p:nvCxnSpPr>
+        <p:spPr>
+          <a:xfrm>
+            <a:off x="381000" y="6126480"/>
+            <a:ext cx="11430000" cy="0"/>
+          </a:xfrm>
+          <a:prstGeom prst="line">
+            <a:avLst/>
+          </a:prstGeom>
+          <a:ln w="10668">
             <a:solidFill>
-              <a:srgbClr val="164B8C"/>
+              <a:srgbClr val="8EC3EC"/>
             </a:solidFill>
           </a:ln>
         </p:spPr>
-        <p:txBody>
-          <a:bodyPr rtlCol="0" anchor="ctr" lIns="0" tIns="0" rIns="0" bIns="0" wrap="none">
-            <a:noAutofit/>
-          </a:bodyPr>
-          <a:lstStyle/>
-          <a:p>
-            <a:pPr algn="ctr"/>
-            <a:r>
-              <a:rPr sz="780" b="1">
-                <a:solidFill>
-                  <a:srgbClr val="164B8C"/>
-                </a:solidFill>
-                <a:latin typeface="Pretendard"/>
-                <a:ea typeface="Pretendard"/>
-                <a:cs typeface="Pretendard"/>
-              </a:rPr>
-              <a:t>11/16 ~ 11/27</a:t>
-            </a:r>
-          </a:p>
-        </p:txBody>
-      </p:sp>
-      <p:sp>
-        <p:nvSpPr>
-          <p:cNvPr id="32" name="막대 6. MVP 리허설"/>
-          <p:cNvSpPr/>
-          <p:nvPr/>
-        </p:nvSpPr>
-        <p:spPr>
-          <a:xfrm>
-            <a:off x="9278815" y="4442460"/>
-            <a:ext cx="452176" cy="243840"/>
-          </a:xfrm>
-          <a:prstGeom prst="roundRect">
-            <a:avLst>
-              <a:gd name="adj" fmla="val 25000"/>
-            </a:avLst>
-          </a:prstGeom>
-          <a:solidFill>
-            <a:srgbClr val="D3E5F8"/>
-          </a:solidFill>
-          <a:ln w="9144">
-            <a:solidFill>
-              <a:srgbClr val="164B8C"/>
-            </a:solidFill>
-          </a:ln>
-        </p:spPr>
-        <p:txBody>
-          <a:bodyPr rtlCol="0" anchor="ctr"/>
-          <a:lstStyle/>
-          <a:p>
-            <a:pPr algn="ctr"/>
-          </a:p>
-        </p:txBody>
-      </p:sp>
-      <p:sp>
-        <p:nvSpPr>
-          <p:cNvPr id="33" name="막대 7. 설치본"/>
-          <p:cNvSpPr/>
-          <p:nvPr/>
-        </p:nvSpPr>
-        <p:spPr>
-          <a:xfrm>
-            <a:off x="9911862" y="4914900"/>
-            <a:ext cx="452176" cy="243840"/>
-          </a:xfrm>
-          <a:prstGeom prst="roundRect">
-            <a:avLst>
-              <a:gd name="adj" fmla="val 25000"/>
-            </a:avLst>
-          </a:prstGeom>
-          <a:solidFill>
-            <a:srgbClr val="D3E5F8"/>
-          </a:solidFill>
-          <a:ln w="9144">
-            <a:solidFill>
-              <a:srgbClr val="164B8C"/>
-            </a:solidFill>
-          </a:ln>
-        </p:spPr>
-        <p:txBody>
-          <a:bodyPr rtlCol="0" anchor="ctr"/>
-          <a:lstStyle/>
-          <a:p>
-            <a:pPr algn="ctr"/>
-          </a:p>
-        </p:txBody>
-      </p:sp>
-      <p:sp>
-        <p:nvSpPr>
-          <p:cNvPr id="34" name="막대 8. 확장"/>
-          <p:cNvSpPr/>
-          <p:nvPr/>
-        </p:nvSpPr>
-        <p:spPr>
-          <a:xfrm>
-            <a:off x="10544908" y="5387340"/>
-            <a:ext cx="452176" cy="243840"/>
-          </a:xfrm>
-          <a:prstGeom prst="roundRect">
-            <a:avLst>
-              <a:gd name="adj" fmla="val 25000"/>
-            </a:avLst>
-          </a:prstGeom>
-          <a:solidFill>
-            <a:srgbClr val="D3E5F8"/>
-          </a:solidFill>
-          <a:ln w="9144">
-            <a:solidFill>
-              <a:srgbClr val="164B8C"/>
-            </a:solidFill>
-          </a:ln>
-        </p:spPr>
-        <p:txBody>
-          <a:bodyPr rtlCol="0" anchor="ctr"/>
-          <a:lstStyle/>
-          <a:p>
-            <a:pPr algn="ctr"/>
-          </a:p>
-        </p:txBody>
-      </p:sp>
-      <p:cxnSp>
-        <p:nvCxnSpPr>
-          <p:cNvPr id="35" name="선"/>
-          <p:cNvCxnSpPr/>
-          <p:nvPr/>
-        </p:nvCxnSpPr>
-        <p:spPr>
-          <a:xfrm>
-            <a:off x="381000" y="5745480"/>
-            <a:ext cx="11430000" cy="0"/>
-          </a:xfrm>
-          <a:prstGeom prst="line">
-            <a:avLst/>
-          </a:prstGeom>
-          <a:ln w="10668">
-            <a:solidFill>
-              <a:srgbClr val="A9C3E2"/>
-            </a:solidFill>
-          </a:ln>
-        </p:spPr>
       </p:cxnSp>
       <p:sp>
         <p:nvSpPr>
-          <p:cNvPr id="36" name="글"/>
+          <p:cNvPr id="29" name="글"/>
           <p:cNvSpPr txBox="1"/>
           <p:nvPr/>
         </p:nvSpPr>
         <p:spPr>
           <a:xfrm>
-            <a:off x="533400" y="1120140"/>
-            <a:ext cx="441960" cy="190500"/>
+            <a:off x="533400" y="1097280"/>
+            <a:ext cx="487680" cy="213360"/>
           </a:xfrm>
           <a:prstGeom prst="rect">
             <a:avLst/>
@@ -4246,7 +4021,7 @@
           <a:p>
             <a:pPr algn="l"/>
             <a:r>
-              <a:rPr sz="1019" b="1">
+              <a:rPr sz="1200" b="1">
                 <a:solidFill>
                   <a:srgbClr val="FFFFFF"/>
                 </a:solidFill>
@@ -4261,14 +4036,14 @@
       </p:sp>
       <p:sp>
         <p:nvSpPr>
-          <p:cNvPr id="37" name="글"/>
+          <p:cNvPr id="30" name="글"/>
           <p:cNvSpPr txBox="1"/>
           <p:nvPr/>
         </p:nvSpPr>
         <p:spPr>
           <a:xfrm>
-            <a:off x="4989777" y="1021080"/>
-            <a:ext cx="438912" cy="182880"/>
+            <a:off x="3677575" y="1005840"/>
+            <a:ext cx="395478" cy="198120"/>
           </a:xfrm>
           <a:prstGeom prst="rect">
             <a:avLst/>
@@ -4283,7 +4058,44 @@
           <a:p>
             <a:pPr algn="ctr"/>
             <a:r>
-              <a:rPr sz="960" b="1">
+              <a:rPr sz="1080" b="1">
+                <a:solidFill>
+                  <a:srgbClr val="FFFFFF"/>
+                </a:solidFill>
+                <a:latin typeface="Pretendard"/>
+                <a:ea typeface="Pretendard"/>
+                <a:cs typeface="Pretendard"/>
+              </a:rPr>
+              <a:t>9월</a:t>
+            </a:r>
+          </a:p>
+        </p:txBody>
+      </p:sp>
+      <p:sp>
+        <p:nvSpPr>
+          <p:cNvPr id="31" name="글"/>
+          <p:cNvSpPr txBox="1"/>
+          <p:nvPr/>
+        </p:nvSpPr>
+        <p:spPr>
+          <a:xfrm>
+            <a:off x="6970885" y="1005840"/>
+            <a:ext cx="470916" cy="198120"/>
+          </a:xfrm>
+          <a:prstGeom prst="rect">
+            <a:avLst/>
+          </a:prstGeom>
+          <a:noFill/>
+        </p:spPr>
+        <p:txBody>
+          <a:bodyPr wrap="square" lIns="0" tIns="0" rIns="0" bIns="0" anchor="ctr">
+            <a:noAutofit/>
+          </a:bodyPr>
+          <a:lstStyle/>
+          <a:p>
+            <a:pPr algn="ctr"/>
+            <a:r>
+              <a:rPr sz="1080" b="1">
                 <a:solidFill>
                   <a:srgbClr val="FFFFFF"/>
                 </a:solidFill>
@@ -4298,14 +4110,14 @@
       </p:sp>
       <p:sp>
         <p:nvSpPr>
-          <p:cNvPr id="38" name="글"/>
+          <p:cNvPr id="32" name="글"/>
           <p:cNvSpPr txBox="1"/>
           <p:nvPr/>
         </p:nvSpPr>
         <p:spPr>
           <a:xfrm>
-            <a:off x="7748049" y="1021080"/>
-            <a:ext cx="438912" cy="182880"/>
+            <a:off x="10791771" y="1005840"/>
+            <a:ext cx="470916" cy="198120"/>
           </a:xfrm>
           <a:prstGeom prst="rect">
             <a:avLst/>
@@ -4320,7 +4132,7 @@
           <a:p>
             <a:pPr algn="ctr"/>
             <a:r>
-              <a:rPr sz="960" b="1">
+              <a:rPr sz="1080" b="1">
                 <a:solidFill>
                   <a:srgbClr val="FFFFFF"/>
                 </a:solidFill>
@@ -4335,14 +4147,14 @@
       </p:sp>
       <p:sp>
         <p:nvSpPr>
-          <p:cNvPr id="39" name="글"/>
+          <p:cNvPr id="33" name="글"/>
           <p:cNvSpPr txBox="1"/>
           <p:nvPr/>
         </p:nvSpPr>
         <p:spPr>
           <a:xfrm>
-            <a:off x="10325452" y="1021080"/>
-            <a:ext cx="438912" cy="182880"/>
+            <a:off x="4033266" y="1211580"/>
+            <a:ext cx="467868" cy="190500"/>
           </a:xfrm>
           <a:prstGeom prst="rect">
             <a:avLst/>
@@ -4357,46 +4169,9 @@
           <a:p>
             <a:pPr algn="ctr"/>
             <a:r>
-              <a:rPr sz="960" b="1">
+              <a:rPr sz="1019" b="0">
                 <a:solidFill>
                   <a:srgbClr val="FFFFFF"/>
-                </a:solidFill>
-                <a:latin typeface="Pretendard"/>
-                <a:ea typeface="Pretendard"/>
-                <a:cs typeface="Pretendard"/>
-              </a:rPr>
-              <a:t>12월</a:t>
-            </a:r>
-          </a:p>
-        </p:txBody>
-      </p:sp>
-      <p:sp>
-        <p:nvSpPr>
-          <p:cNvPr id="40" name="글"/>
-          <p:cNvSpPr txBox="1"/>
-          <p:nvPr/>
-        </p:nvSpPr>
-        <p:spPr>
-          <a:xfrm>
-            <a:off x="3697517" y="1242060"/>
-            <a:ext cx="400812" cy="160020"/>
-          </a:xfrm>
-          <a:prstGeom prst="rect">
-            <a:avLst/>
-          </a:prstGeom>
-          <a:noFill/>
-        </p:spPr>
-        <p:txBody>
-          <a:bodyPr wrap="square" lIns="0" tIns="0" rIns="0" bIns="0" anchor="ctr">
-            <a:noAutofit/>
-          </a:bodyPr>
-          <a:lstStyle/>
-          <a:p>
-            <a:pPr algn="ctr"/>
-            <a:r>
-              <a:rPr sz="780" b="0">
-                <a:solidFill>
-                  <a:srgbClr val="D3E5F8"/>
                 </a:solidFill>
                 <a:latin typeface="Pretendard"/>
                 <a:ea typeface="Pretendard"/>
@@ -4409,14 +4184,14 @@
       </p:sp>
       <p:sp>
         <p:nvSpPr>
-          <p:cNvPr id="41" name="글"/>
+          <p:cNvPr id="34" name="글"/>
           <p:cNvSpPr txBox="1"/>
           <p:nvPr/>
         </p:nvSpPr>
         <p:spPr>
           <a:xfrm>
-            <a:off x="4330563" y="1242060"/>
-            <a:ext cx="400812" cy="160020"/>
+            <a:off x="5404866" y="1211580"/>
+            <a:ext cx="467868" cy="190500"/>
           </a:xfrm>
           <a:prstGeom prst="rect">
             <a:avLst/>
@@ -4431,9 +4206,9 @@
           <a:p>
             <a:pPr algn="ctr"/>
             <a:r>
-              <a:rPr sz="780" b="0">
-                <a:solidFill>
-                  <a:srgbClr val="D3E5F8"/>
+              <a:rPr sz="1019" b="0">
+                <a:solidFill>
+                  <a:srgbClr val="FFFFFF"/>
                 </a:solidFill>
                 <a:latin typeface="Pretendard"/>
                 <a:ea typeface="Pretendard"/>
@@ -4446,14 +4221,14 @@
       </p:sp>
       <p:sp>
         <p:nvSpPr>
-          <p:cNvPr id="42" name="글"/>
+          <p:cNvPr id="35" name="글"/>
           <p:cNvSpPr txBox="1"/>
           <p:nvPr/>
         </p:nvSpPr>
         <p:spPr>
           <a:xfrm>
-            <a:off x="4936368" y="1242060"/>
-            <a:ext cx="455295" cy="160020"/>
+            <a:off x="6740842" y="1211580"/>
+            <a:ext cx="539115" cy="190500"/>
           </a:xfrm>
           <a:prstGeom prst="rect">
             <a:avLst/>
@@ -4468,9 +4243,9 @@
           <a:p>
             <a:pPr algn="ctr"/>
             <a:r>
-              <a:rPr sz="780" b="0">
-                <a:solidFill>
-                  <a:srgbClr val="D3E5F8"/>
+              <a:rPr sz="1019" b="0">
+                <a:solidFill>
+                  <a:srgbClr val="FFFFFF"/>
                 </a:solidFill>
                 <a:latin typeface="Pretendard"/>
                 <a:ea typeface="Pretendard"/>
@@ -4483,14 +4258,14 @@
       </p:sp>
       <p:sp>
         <p:nvSpPr>
-          <p:cNvPr id="43" name="글"/>
+          <p:cNvPr id="36" name="글"/>
           <p:cNvSpPr txBox="1"/>
           <p:nvPr/>
         </p:nvSpPr>
         <p:spPr>
           <a:xfrm>
-            <a:off x="5569414" y="1242060"/>
-            <a:ext cx="455295" cy="160020"/>
+            <a:off x="8112442" y="1211580"/>
+            <a:ext cx="539115" cy="190500"/>
           </a:xfrm>
           <a:prstGeom prst="rect">
             <a:avLst/>
@@ -4505,9 +4280,9 @@
           <a:p>
             <a:pPr algn="ctr"/>
             <a:r>
-              <a:rPr sz="780" b="0">
-                <a:solidFill>
-                  <a:srgbClr val="D3E5F8"/>
+              <a:rPr sz="1019" b="0">
+                <a:solidFill>
+                  <a:srgbClr val="FFFFFF"/>
                 </a:solidFill>
                 <a:latin typeface="Pretendard"/>
                 <a:ea typeface="Pretendard"/>
@@ -4520,14 +4295,14 @@
       </p:sp>
       <p:sp>
         <p:nvSpPr>
-          <p:cNvPr id="44" name="글"/>
+          <p:cNvPr id="37" name="글"/>
           <p:cNvSpPr txBox="1"/>
           <p:nvPr/>
         </p:nvSpPr>
         <p:spPr>
           <a:xfrm>
-            <a:off x="6202460" y="1242060"/>
-            <a:ext cx="455295" cy="160020"/>
+            <a:off x="9484042" y="1211580"/>
+            <a:ext cx="539115" cy="190500"/>
           </a:xfrm>
           <a:prstGeom prst="rect">
             <a:avLst/>
@@ -4542,9 +4317,9 @@
           <a:p>
             <a:pPr algn="ctr"/>
             <a:r>
-              <a:rPr sz="780" b="0">
-                <a:solidFill>
-                  <a:srgbClr val="D3E5F8"/>
+              <a:rPr sz="1019" b="0">
+                <a:solidFill>
+                  <a:srgbClr val="FFFFFF"/>
                 </a:solidFill>
                 <a:latin typeface="Pretendard"/>
                 <a:ea typeface="Pretendard"/>
@@ -4557,14 +4332,14 @@
       </p:sp>
       <p:sp>
         <p:nvSpPr>
-          <p:cNvPr id="45" name="글"/>
+          <p:cNvPr id="38" name="글"/>
           <p:cNvSpPr txBox="1"/>
           <p:nvPr/>
         </p:nvSpPr>
         <p:spPr>
           <a:xfrm>
-            <a:off x="6862748" y="1242060"/>
-            <a:ext cx="400812" cy="160020"/>
+            <a:off x="10891266" y="1211580"/>
+            <a:ext cx="467868" cy="190500"/>
           </a:xfrm>
           <a:prstGeom prst="rect">
             <a:avLst/>
@@ -4579,9 +4354,9 @@
           <a:p>
             <a:pPr algn="ctr"/>
             <a:r>
-              <a:rPr sz="780" b="0">
-                <a:solidFill>
-                  <a:srgbClr val="D3E5F8"/>
+              <a:rPr sz="1019" b="0">
+                <a:solidFill>
+                  <a:srgbClr val="FFFFFF"/>
                 </a:solidFill>
                 <a:latin typeface="Pretendard"/>
                 <a:ea typeface="Pretendard"/>
@@ -4594,14 +4369,14 @@
       </p:sp>
       <p:sp>
         <p:nvSpPr>
-          <p:cNvPr id="46" name="글"/>
+          <p:cNvPr id="39" name="글"/>
           <p:cNvSpPr txBox="1"/>
           <p:nvPr/>
         </p:nvSpPr>
         <p:spPr>
           <a:xfrm>
-            <a:off x="7495794" y="1242060"/>
-            <a:ext cx="400812" cy="160020"/>
+            <a:off x="5895703" y="6164580"/>
+            <a:ext cx="798195" cy="190500"/>
           </a:xfrm>
           <a:prstGeom prst="rect">
             <a:avLst/>
@@ -4614,31 +4389,31 @@
           </a:bodyPr>
           <a:lstStyle/>
           <a:p>
-            <a:pPr algn="ctr"/>
-            <a:r>
-              <a:rPr sz="780" b="0">
-                <a:solidFill>
-                  <a:srgbClr val="D3E5F8"/>
+            <a:pPr algn="l"/>
+            <a:r>
+              <a:rPr sz="1019" b="1">
+                <a:solidFill>
+                  <a:srgbClr val="0B2545"/>
                 </a:solidFill>
                 <a:latin typeface="Pretendard"/>
                 <a:ea typeface="Pretendard"/>
                 <a:cs typeface="Pretendard"/>
               </a:rPr>
-              <a:t>11/9</a:t>
-            </a:r>
-          </a:p>
-        </p:txBody>
-      </p:sp>
-      <p:sp>
-        <p:nvSpPr>
-          <p:cNvPr id="47" name="글"/>
+              <a:t>오늘 10/9</a:t>
+            </a:r>
+          </a:p>
+        </p:txBody>
+      </p:sp>
+      <p:sp>
+        <p:nvSpPr>
+          <p:cNvPr id="40" name="글"/>
           <p:cNvSpPr txBox="1"/>
           <p:nvPr/>
         </p:nvSpPr>
         <p:spPr>
           <a:xfrm>
-            <a:off x="8101599" y="1242060"/>
-            <a:ext cx="455295" cy="160020"/>
+            <a:off x="533400" y="1516380"/>
+            <a:ext cx="1127760" cy="213360"/>
           </a:xfrm>
           <a:prstGeom prst="rect">
             <a:avLst/>
@@ -4651,270 +4426,11 @@
           </a:bodyPr>
           <a:lstStyle/>
           <a:p>
-            <a:pPr algn="ctr"/>
-            <a:r>
-              <a:rPr sz="780" b="0">
-                <a:solidFill>
-                  <a:srgbClr val="D3E5F8"/>
-                </a:solidFill>
-                <a:latin typeface="Pretendard"/>
-                <a:ea typeface="Pretendard"/>
-                <a:cs typeface="Pretendard"/>
-              </a:rPr>
-              <a:t>11/16</a:t>
-            </a:r>
-          </a:p>
-        </p:txBody>
-      </p:sp>
-      <p:sp>
-        <p:nvSpPr>
-          <p:cNvPr id="48" name="글"/>
-          <p:cNvSpPr txBox="1"/>
-          <p:nvPr/>
-        </p:nvSpPr>
-        <p:spPr>
-          <a:xfrm>
-            <a:off x="8734645" y="1242060"/>
-            <a:ext cx="455295" cy="160020"/>
-          </a:xfrm>
-          <a:prstGeom prst="rect">
-            <a:avLst/>
-          </a:prstGeom>
-          <a:noFill/>
-        </p:spPr>
-        <p:txBody>
-          <a:bodyPr wrap="square" lIns="0" tIns="0" rIns="0" bIns="0" anchor="ctr">
-            <a:noAutofit/>
-          </a:bodyPr>
-          <a:lstStyle/>
-          <a:p>
-            <a:pPr algn="ctr"/>
-            <a:r>
-              <a:rPr sz="780" b="0">
-                <a:solidFill>
-                  <a:srgbClr val="D3E5F8"/>
-                </a:solidFill>
-                <a:latin typeface="Pretendard"/>
-                <a:ea typeface="Pretendard"/>
-                <a:cs typeface="Pretendard"/>
-              </a:rPr>
-              <a:t>11/23</a:t>
-            </a:r>
-          </a:p>
-        </p:txBody>
-      </p:sp>
-      <p:sp>
-        <p:nvSpPr>
-          <p:cNvPr id="49" name="글"/>
-          <p:cNvSpPr txBox="1"/>
-          <p:nvPr/>
-        </p:nvSpPr>
-        <p:spPr>
-          <a:xfrm>
-            <a:off x="9367691" y="1242060"/>
-            <a:ext cx="455295" cy="160020"/>
-          </a:xfrm>
-          <a:prstGeom prst="rect">
-            <a:avLst/>
-          </a:prstGeom>
-          <a:noFill/>
-        </p:spPr>
-        <p:txBody>
-          <a:bodyPr wrap="square" lIns="0" tIns="0" rIns="0" bIns="0" anchor="ctr">
-            <a:noAutofit/>
-          </a:bodyPr>
-          <a:lstStyle/>
-          <a:p>
-            <a:pPr algn="ctr"/>
-            <a:r>
-              <a:rPr sz="780" b="0">
-                <a:solidFill>
-                  <a:srgbClr val="D3E5F8"/>
-                </a:solidFill>
-                <a:latin typeface="Pretendard"/>
-                <a:ea typeface="Pretendard"/>
-                <a:cs typeface="Pretendard"/>
-              </a:rPr>
-              <a:t>11/30</a:t>
-            </a:r>
-          </a:p>
-        </p:txBody>
-      </p:sp>
-      <p:sp>
-        <p:nvSpPr>
-          <p:cNvPr id="50" name="글"/>
-          <p:cNvSpPr txBox="1"/>
-          <p:nvPr/>
-        </p:nvSpPr>
-        <p:spPr>
-          <a:xfrm>
-            <a:off x="10027979" y="1242060"/>
-            <a:ext cx="400812" cy="160020"/>
-          </a:xfrm>
-          <a:prstGeom prst="rect">
-            <a:avLst/>
-          </a:prstGeom>
-          <a:noFill/>
-        </p:spPr>
-        <p:txBody>
-          <a:bodyPr wrap="square" lIns="0" tIns="0" rIns="0" bIns="0" anchor="ctr">
-            <a:noAutofit/>
-          </a:bodyPr>
-          <a:lstStyle/>
-          <a:p>
-            <a:pPr algn="ctr"/>
-            <a:r>
-              <a:rPr sz="780" b="0">
-                <a:solidFill>
-                  <a:srgbClr val="D3E5F8"/>
-                </a:solidFill>
-                <a:latin typeface="Pretendard"/>
-                <a:ea typeface="Pretendard"/>
-                <a:cs typeface="Pretendard"/>
-              </a:rPr>
-              <a:t>12/7</a:t>
-            </a:r>
-          </a:p>
-        </p:txBody>
-      </p:sp>
-      <p:sp>
-        <p:nvSpPr>
-          <p:cNvPr id="51" name="글"/>
-          <p:cNvSpPr txBox="1"/>
-          <p:nvPr/>
-        </p:nvSpPr>
-        <p:spPr>
-          <a:xfrm>
-            <a:off x="10633783" y="1242060"/>
-            <a:ext cx="455295" cy="160020"/>
-          </a:xfrm>
-          <a:prstGeom prst="rect">
-            <a:avLst/>
-          </a:prstGeom>
-          <a:noFill/>
-        </p:spPr>
-        <p:txBody>
-          <a:bodyPr wrap="square" lIns="0" tIns="0" rIns="0" bIns="0" anchor="ctr">
-            <a:noAutofit/>
-          </a:bodyPr>
-          <a:lstStyle/>
-          <a:p>
-            <a:pPr algn="ctr"/>
-            <a:r>
-              <a:rPr sz="780" b="0">
-                <a:solidFill>
-                  <a:srgbClr val="D3E5F8"/>
-                </a:solidFill>
-                <a:latin typeface="Pretendard"/>
-                <a:ea typeface="Pretendard"/>
-                <a:cs typeface="Pretendard"/>
-              </a:rPr>
-              <a:t>12/14</a:t>
-            </a:r>
-          </a:p>
-        </p:txBody>
-      </p:sp>
-      <p:sp>
-        <p:nvSpPr>
-          <p:cNvPr id="52" name="글"/>
-          <p:cNvSpPr txBox="1"/>
-          <p:nvPr/>
-        </p:nvSpPr>
-        <p:spPr>
-          <a:xfrm>
-            <a:off x="11266829" y="1242060"/>
-            <a:ext cx="455295" cy="160020"/>
-          </a:xfrm>
-          <a:prstGeom prst="rect">
-            <a:avLst/>
-          </a:prstGeom>
-          <a:noFill/>
-        </p:spPr>
-        <p:txBody>
-          <a:bodyPr wrap="square" lIns="0" tIns="0" rIns="0" bIns="0" anchor="ctr">
-            <a:noAutofit/>
-          </a:bodyPr>
-          <a:lstStyle/>
-          <a:p>
-            <a:pPr algn="ctr"/>
-            <a:r>
-              <a:rPr sz="780" b="0">
-                <a:solidFill>
-                  <a:srgbClr val="D3E5F8"/>
-                </a:solidFill>
-                <a:latin typeface="Pretendard"/>
-                <a:ea typeface="Pretendard"/>
-                <a:cs typeface="Pretendard"/>
-              </a:rPr>
-              <a:t>12/21</a:t>
-            </a:r>
-          </a:p>
-        </p:txBody>
-      </p:sp>
-      <p:sp>
-        <p:nvSpPr>
-          <p:cNvPr id="53" name="글"/>
-          <p:cNvSpPr txBox="1"/>
-          <p:nvPr/>
-        </p:nvSpPr>
-        <p:spPr>
-          <a:xfrm>
-            <a:off x="4005294" y="5882640"/>
-            <a:ext cx="689610" cy="167640"/>
-          </a:xfrm>
-          <a:prstGeom prst="rect">
-            <a:avLst/>
-          </a:prstGeom>
-          <a:noFill/>
-        </p:spPr>
-        <p:txBody>
-          <a:bodyPr wrap="square" lIns="0" tIns="0" rIns="0" bIns="0" anchor="ctr">
-            <a:noAutofit/>
-          </a:bodyPr>
-          <a:lstStyle/>
-          <a:p>
-            <a:pPr algn="ctr"/>
-            <a:r>
-              <a:rPr sz="840" b="1">
-                <a:solidFill>
-                  <a:srgbClr val="0A2342"/>
-                </a:solidFill>
-                <a:latin typeface="Pretendard"/>
-                <a:ea typeface="Pretendard"/>
-                <a:cs typeface="Pretendard"/>
-              </a:rPr>
-              <a:t>오늘 10/6</a:t>
-            </a:r>
-          </a:p>
-        </p:txBody>
-      </p:sp>
-      <p:sp>
-        <p:nvSpPr>
-          <p:cNvPr id="54" name="글"/>
-          <p:cNvSpPr txBox="1"/>
-          <p:nvPr/>
-        </p:nvSpPr>
-        <p:spPr>
-          <a:xfrm>
-            <a:off x="533400" y="1562100"/>
-            <a:ext cx="986028" cy="190500"/>
-          </a:xfrm>
-          <a:prstGeom prst="rect">
-            <a:avLst/>
-          </a:prstGeom>
-          <a:noFill/>
-        </p:spPr>
-        <p:txBody>
-          <a:bodyPr wrap="square" lIns="0" tIns="0" rIns="0" bIns="0" anchor="ctr">
-            <a:noAutofit/>
-          </a:bodyPr>
-          <a:lstStyle/>
-          <a:p>
             <a:pPr algn="l"/>
             <a:r>
-              <a:rPr sz="1019" b="1">
-                <a:solidFill>
-                  <a:srgbClr val="0A2342"/>
+              <a:rPr sz="1200" b="1">
+                <a:solidFill>
+                  <a:srgbClr val="0B2545"/>
                 </a:solidFill>
                 <a:latin typeface="Pretendard"/>
                 <a:ea typeface="Pretendard"/>
@@ -4927,14 +4443,14 @@
       </p:sp>
       <p:sp>
         <p:nvSpPr>
-          <p:cNvPr id="55" name="글"/>
+          <p:cNvPr id="41" name="글"/>
           <p:cNvSpPr txBox="1"/>
           <p:nvPr/>
         </p:nvSpPr>
         <p:spPr>
           <a:xfrm>
-            <a:off x="533400" y="1748790"/>
-            <a:ext cx="1900809" cy="163830"/>
+            <a:off x="533400" y="1729740"/>
+            <a:ext cx="2346198" cy="190500"/>
           </a:xfrm>
           <a:prstGeom prst="rect">
             <a:avLst/>
@@ -4949,7 +4465,7 @@
           <a:p>
             <a:pPr algn="l"/>
             <a:r>
-              <a:rPr sz="810" b="0">
+              <a:rPr sz="1019" b="0">
                 <a:solidFill>
                   <a:srgbClr val="3F4E61"/>
                 </a:solidFill>
@@ -4964,14 +4480,14 @@
       </p:sp>
       <p:sp>
         <p:nvSpPr>
-          <p:cNvPr id="56" name="글"/>
+          <p:cNvPr id="42" name="글"/>
           <p:cNvSpPr txBox="1"/>
           <p:nvPr/>
         </p:nvSpPr>
         <p:spPr>
           <a:xfrm>
-            <a:off x="4471516" y="1653540"/>
-            <a:ext cx="782193" cy="160020"/>
+            <a:off x="533400" y="2034540"/>
+            <a:ext cx="739140" cy="213360"/>
           </a:xfrm>
           <a:prstGeom prst="rect">
             <a:avLst/>
@@ -4986,46 +4502,9 @@
           <a:p>
             <a:pPr algn="l"/>
             <a:r>
-              <a:rPr sz="780" b="1">
-                <a:solidFill>
-                  <a:srgbClr val="0A2342"/>
-                </a:solidFill>
-                <a:latin typeface="Pretendard"/>
-                <a:ea typeface="Pretendard"/>
-                <a:cs typeface="Pretendard"/>
-              </a:rPr>
-              <a:t>10/1 ~ 10/6</a:t>
-            </a:r>
-          </a:p>
-        </p:txBody>
-      </p:sp>
-      <p:sp>
-        <p:nvSpPr>
-          <p:cNvPr id="57" name="글"/>
-          <p:cNvSpPr txBox="1"/>
-          <p:nvPr/>
-        </p:nvSpPr>
-        <p:spPr>
-          <a:xfrm>
-            <a:off x="533400" y="2034540"/>
-            <a:ext cx="655701" cy="190500"/>
-          </a:xfrm>
-          <a:prstGeom prst="rect">
-            <a:avLst/>
-          </a:prstGeom>
-          <a:noFill/>
-        </p:spPr>
-        <p:txBody>
-          <a:bodyPr wrap="square" lIns="0" tIns="0" rIns="0" bIns="0" anchor="ctr">
-            <a:noAutofit/>
-          </a:bodyPr>
-          <a:lstStyle/>
-          <a:p>
-            <a:pPr algn="l"/>
-            <a:r>
-              <a:rPr sz="1019" b="1">
-                <a:solidFill>
-                  <a:srgbClr val="0A2342"/>
+              <a:rPr sz="1200" b="1">
+                <a:solidFill>
+                  <a:srgbClr val="0B2545"/>
                 </a:solidFill>
                 <a:latin typeface="Pretendard"/>
                 <a:ea typeface="Pretendard"/>
@@ -5038,14 +4517,14 @@
       </p:sp>
       <p:sp>
         <p:nvSpPr>
-          <p:cNvPr id="58" name="글"/>
+          <p:cNvPr id="43" name="글"/>
           <p:cNvSpPr txBox="1"/>
           <p:nvPr/>
         </p:nvSpPr>
         <p:spPr>
           <a:xfrm>
-            <a:off x="533400" y="2221230"/>
-            <a:ext cx="1818513" cy="163830"/>
+            <a:off x="533400" y="2247900"/>
+            <a:ext cx="2242566" cy="190500"/>
           </a:xfrm>
           <a:prstGeom prst="rect">
             <a:avLst/>
@@ -5060,7 +4539,7 @@
           <a:p>
             <a:pPr algn="l"/>
             <a:r>
-              <a:rPr sz="810" b="0">
+              <a:rPr sz="1019" b="0">
                 <a:solidFill>
                   <a:srgbClr val="3F4E61"/>
                 </a:solidFill>
@@ -5075,14 +4554,14 @@
       </p:sp>
       <p:sp>
         <p:nvSpPr>
-          <p:cNvPr id="59" name="글"/>
+          <p:cNvPr id="44" name="글"/>
           <p:cNvSpPr txBox="1"/>
           <p:nvPr/>
         </p:nvSpPr>
         <p:spPr>
           <a:xfrm>
-            <a:off x="4471516" y="2125980"/>
-            <a:ext cx="782193" cy="160020"/>
+            <a:off x="5926183" y="2141220"/>
+            <a:ext cx="1251585" cy="190500"/>
           </a:xfrm>
           <a:prstGeom prst="rect">
             <a:avLst/>
@@ -5097,46 +4576,9 @@
           <a:p>
             <a:pPr algn="l"/>
             <a:r>
-              <a:rPr sz="780" b="1">
-                <a:solidFill>
-                  <a:srgbClr val="0A2342"/>
-                </a:solidFill>
-                <a:latin typeface="Pretendard"/>
-                <a:ea typeface="Pretendard"/>
-                <a:cs typeface="Pretendard"/>
-              </a:rPr>
-              <a:t>10/1 ~ 10/6</a:t>
-            </a:r>
-          </a:p>
-        </p:txBody>
-      </p:sp>
-      <p:sp>
-        <p:nvSpPr>
-          <p:cNvPr id="60" name="글"/>
-          <p:cNvSpPr txBox="1"/>
-          <p:nvPr/>
-        </p:nvSpPr>
-        <p:spPr>
-          <a:xfrm>
-            <a:off x="5177509" y="2122170"/>
-            <a:ext cx="1031558" cy="163830"/>
-          </a:xfrm>
-          <a:prstGeom prst="rect">
-            <a:avLst/>
-          </a:prstGeom>
-          <a:noFill/>
-        </p:spPr>
-        <p:txBody>
-          <a:bodyPr wrap="square" lIns="0" tIns="0" rIns="0" bIns="0" anchor="ctr">
-            <a:noAutofit/>
-          </a:bodyPr>
-          <a:lstStyle/>
-          <a:p>
-            <a:pPr algn="l"/>
-            <a:r>
-              <a:rPr sz="810" b="1">
-                <a:solidFill>
-                  <a:srgbClr val="164B8C"/>
+              <a:rPr sz="1019" b="1">
+                <a:solidFill>
+                  <a:srgbClr val="1F4E8C"/>
                 </a:solidFill>
                 <a:latin typeface="Pretendard"/>
                 <a:ea typeface="Pretendard"/>
@@ -5149,14 +4591,14 @@
       </p:sp>
       <p:sp>
         <p:nvSpPr>
-          <p:cNvPr id="61" name="글"/>
+          <p:cNvPr id="45" name="글"/>
           <p:cNvSpPr txBox="1"/>
           <p:nvPr/>
         </p:nvSpPr>
         <p:spPr>
           <a:xfrm>
-            <a:off x="533400" y="2506980"/>
-            <a:ext cx="1115568" cy="190500"/>
+            <a:off x="533400" y="2552700"/>
+            <a:ext cx="1280160" cy="213360"/>
           </a:xfrm>
           <a:prstGeom prst="rect">
             <a:avLst/>
@@ -5171,9 +4613,9 @@
           <a:p>
             <a:pPr algn="l"/>
             <a:r>
-              <a:rPr sz="1019" b="1">
-                <a:solidFill>
-                  <a:srgbClr val="0A2342"/>
+              <a:rPr sz="1200" b="1">
+                <a:solidFill>
+                  <a:srgbClr val="0B2545"/>
                 </a:solidFill>
                 <a:latin typeface="Pretendard"/>
                 <a:ea typeface="Pretendard"/>
@@ -5186,14 +4628,14 @@
       </p:sp>
       <p:sp>
         <p:nvSpPr>
-          <p:cNvPr id="62" name="글"/>
+          <p:cNvPr id="46" name="글"/>
           <p:cNvSpPr txBox="1"/>
           <p:nvPr/>
         </p:nvSpPr>
         <p:spPr>
           <a:xfrm>
-            <a:off x="533400" y="2693670"/>
-            <a:ext cx="1895666" cy="163830"/>
+            <a:off x="533400" y="2766060"/>
+            <a:ext cx="1782699" cy="190500"/>
           </a:xfrm>
           <a:prstGeom prst="rect">
             <a:avLst/>
@@ -5208,7 +4650,7 @@
           <a:p>
             <a:pPr algn="l"/>
             <a:r>
-              <a:rPr sz="810" b="0">
+              <a:rPr sz="1019" b="0">
                 <a:solidFill>
                   <a:srgbClr val="3F4E61"/>
                 </a:solidFill>
@@ -5216,21 +4658,21 @@
                 <a:ea typeface="Pretendard"/>
                 <a:cs typeface="Pretendard"/>
               </a:rPr>
-              <a:t>kdms plan · DDL (Mac 확인 대기)</a:t>
-            </a:r>
-          </a:p>
-        </p:txBody>
-      </p:sp>
-      <p:sp>
-        <p:nvSpPr>
-          <p:cNvPr id="63" name="글"/>
+              <a:t>kdms plan · 세 단계 DDL</a:t>
+            </a:r>
+          </a:p>
+        </p:txBody>
+      </p:sp>
+      <p:sp>
+        <p:nvSpPr>
+          <p:cNvPr id="47" name="글"/>
           <p:cNvSpPr txBox="1"/>
           <p:nvPr/>
         </p:nvSpPr>
         <p:spPr>
           <a:xfrm>
-            <a:off x="4742822" y="2594610"/>
-            <a:ext cx="352616" cy="163830"/>
+            <a:off x="5421086" y="2659380"/>
+            <a:ext cx="396621" cy="190500"/>
           </a:xfrm>
           <a:prstGeom prst="rect">
             <a:avLst/>
@@ -5245,9 +4687,9 @@
           <a:p>
             <a:pPr algn="l"/>
             <a:r>
-              <a:rPr sz="810" b="1">
-                <a:solidFill>
-                  <a:srgbClr val="164B8C"/>
+              <a:rPr sz="1019" b="1">
+                <a:solidFill>
+                  <a:srgbClr val="1F4E8C"/>
                 </a:solidFill>
                 <a:latin typeface="Pretendard"/>
                 <a:ea typeface="Pretendard"/>
@@ -5260,14 +4702,14 @@
       </p:sp>
       <p:sp>
         <p:nvSpPr>
-          <p:cNvPr id="64" name="글"/>
+          <p:cNvPr id="48" name="글"/>
           <p:cNvSpPr txBox="1"/>
           <p:nvPr/>
         </p:nvSpPr>
         <p:spPr>
           <a:xfrm>
-            <a:off x="533400" y="2979420"/>
-            <a:ext cx="1458849" cy="190500"/>
+            <a:off x="533400" y="3070860"/>
+            <a:ext cx="1684020" cy="213360"/>
           </a:xfrm>
           <a:prstGeom prst="rect">
             <a:avLst/>
@@ -5282,9 +4724,9 @@
           <a:p>
             <a:pPr algn="l"/>
             <a:r>
-              <a:rPr sz="1019" b="1">
-                <a:solidFill>
-                  <a:srgbClr val="0A2342"/>
+              <a:rPr sz="1200" b="1">
+                <a:solidFill>
+                  <a:srgbClr val="0B2545"/>
                 </a:solidFill>
                 <a:latin typeface="Pretendard"/>
                 <a:ea typeface="Pretendard"/>
@@ -5297,14 +4739,14 @@
       </p:sp>
       <p:sp>
         <p:nvSpPr>
-          <p:cNvPr id="65" name="글"/>
+          <p:cNvPr id="49" name="글"/>
           <p:cNvSpPr txBox="1"/>
           <p:nvPr/>
         </p:nvSpPr>
         <p:spPr>
           <a:xfrm>
-            <a:off x="533400" y="3166110"/>
-            <a:ext cx="1787652" cy="163830"/>
+            <a:off x="533400" y="3284220"/>
+            <a:ext cx="2203704" cy="190500"/>
           </a:xfrm>
           <a:prstGeom prst="rect">
             <a:avLst/>
@@ -5319,7 +4761,7 @@
           <a:p>
             <a:pPr algn="l"/>
             <a:r>
-              <a:rPr sz="810" b="0">
+              <a:rPr sz="1019" b="0">
                 <a:solidFill>
                   <a:srgbClr val="3F4E61"/>
                 </a:solidFill>
@@ -5334,14 +4776,14 @@
       </p:sp>
       <p:sp>
         <p:nvSpPr>
-          <p:cNvPr id="66" name="글"/>
+          <p:cNvPr id="50" name="글"/>
           <p:cNvSpPr txBox="1"/>
           <p:nvPr/>
         </p:nvSpPr>
         <p:spPr>
           <a:xfrm>
-            <a:off x="6008914" y="3067050"/>
-            <a:ext cx="578930" cy="163830"/>
+            <a:off x="5926183" y="3177540"/>
+            <a:ext cx="966597" cy="190500"/>
           </a:xfrm>
           <a:prstGeom prst="rect">
             <a:avLst/>
@@ -5356,9 +4798,46 @@
           <a:p>
             <a:pPr algn="l"/>
             <a:r>
-              <a:rPr sz="810" b="1">
-                <a:solidFill>
-                  <a:srgbClr val="164B8C"/>
+              <a:rPr sz="1019" b="1">
+                <a:solidFill>
+                  <a:srgbClr val="0B2545"/>
+                </a:solidFill>
+                <a:latin typeface="Pretendard"/>
+                <a:ea typeface="Pretendard"/>
+                <a:cs typeface="Pretendard"/>
+              </a:rPr>
+              <a:t>10/7 ~ 10/8</a:t>
+            </a:r>
+          </a:p>
+        </p:txBody>
+      </p:sp>
+      <p:sp>
+        <p:nvSpPr>
+          <p:cNvPr id="51" name="글"/>
+          <p:cNvSpPr txBox="1"/>
+          <p:nvPr/>
+        </p:nvSpPr>
+        <p:spPr>
+          <a:xfrm>
+            <a:off x="6816580" y="3177540"/>
+            <a:ext cx="681609" cy="190500"/>
+          </a:xfrm>
+          <a:prstGeom prst="rect">
+            <a:avLst/>
+          </a:prstGeom>
+          <a:noFill/>
+        </p:spPr>
+        <p:txBody>
+          <a:bodyPr wrap="square" lIns="0" tIns="0" rIns="0" bIns="0" anchor="ctr">
+            <a:noAutofit/>
+          </a:bodyPr>
+          <a:lstStyle/>
+          <a:p>
+            <a:pPr algn="l"/>
+            <a:r>
+              <a:rPr sz="1019" b="1">
+                <a:solidFill>
+                  <a:srgbClr val="1F4E8C"/>
                 </a:solidFill>
                 <a:latin typeface="Pretendard"/>
                 <a:ea typeface="Pretendard"/>
@@ -5371,14 +4850,14 @@
       </p:sp>
       <p:sp>
         <p:nvSpPr>
-          <p:cNvPr id="67" name="글"/>
+          <p:cNvPr id="52" name="글"/>
           <p:cNvSpPr txBox="1"/>
           <p:nvPr/>
         </p:nvSpPr>
         <p:spPr>
           <a:xfrm>
-            <a:off x="533400" y="3451860"/>
-            <a:ext cx="1271016" cy="190500"/>
+            <a:off x="533400" y="3589020"/>
+            <a:ext cx="1463040" cy="213360"/>
           </a:xfrm>
           <a:prstGeom prst="rect">
             <a:avLst/>
@@ -5393,9 +4872,9 @@
           <a:p>
             <a:pPr algn="l"/>
             <a:r>
-              <a:rPr sz="1019" b="1">
-                <a:solidFill>
-                  <a:srgbClr val="0A2342"/>
+              <a:rPr sz="1200" b="1">
+                <a:solidFill>
+                  <a:srgbClr val="0B2545"/>
                 </a:solidFill>
                 <a:latin typeface="Pretendard"/>
                 <a:ea typeface="Pretendard"/>
@@ -5408,14 +4887,14 @@
       </p:sp>
       <p:sp>
         <p:nvSpPr>
-          <p:cNvPr id="68" name="글"/>
+          <p:cNvPr id="53" name="글"/>
           <p:cNvSpPr txBox="1"/>
           <p:nvPr/>
         </p:nvSpPr>
         <p:spPr>
           <a:xfrm>
-            <a:off x="533400" y="3638550"/>
-            <a:ext cx="1849374" cy="163830"/>
+            <a:off x="533400" y="3802380"/>
+            <a:ext cx="2281428" cy="190500"/>
           </a:xfrm>
           <a:prstGeom prst="rect">
             <a:avLst/>
@@ -5430,7 +4909,7 @@
           <a:p>
             <a:pPr algn="l"/>
             <a:r>
-              <a:rPr sz="810" b="0">
+              <a:rPr sz="1019" b="0">
                 <a:solidFill>
                   <a:srgbClr val="3F4E61"/>
                 </a:solidFill>
@@ -5445,14 +4924,14 @@
       </p:sp>
       <p:sp>
         <p:nvSpPr>
-          <p:cNvPr id="69" name="글"/>
+          <p:cNvPr id="54" name="글"/>
           <p:cNvSpPr txBox="1"/>
           <p:nvPr/>
         </p:nvSpPr>
         <p:spPr>
           <a:xfrm>
-            <a:off x="7908053" y="3539490"/>
-            <a:ext cx="352616" cy="163830"/>
+            <a:off x="5926183" y="3695700"/>
+            <a:ext cx="467868" cy="190500"/>
           </a:xfrm>
           <a:prstGeom prst="rect">
             <a:avLst/>
@@ -5467,9 +4946,46 @@
           <a:p>
             <a:pPr algn="l"/>
             <a:r>
-              <a:rPr sz="810" b="1">
-                <a:solidFill>
-                  <a:srgbClr val="164B8C"/>
+              <a:rPr sz="1019" b="1">
+                <a:solidFill>
+                  <a:srgbClr val="0B2545"/>
+                </a:solidFill>
+                <a:latin typeface="Pretendard"/>
+                <a:ea typeface="Pretendard"/>
+                <a:cs typeface="Pretendard"/>
+              </a:rPr>
+              <a:t>10/8</a:t>
+            </a:r>
+          </a:p>
+        </p:txBody>
+      </p:sp>
+      <p:sp>
+        <p:nvSpPr>
+          <p:cNvPr id="55" name="글"/>
+          <p:cNvSpPr txBox="1"/>
+          <p:nvPr/>
+        </p:nvSpPr>
+        <p:spPr>
+          <a:xfrm>
+            <a:off x="6317851" y="3695700"/>
+            <a:ext cx="396621" cy="190500"/>
+          </a:xfrm>
+          <a:prstGeom prst="rect">
+            <a:avLst/>
+          </a:prstGeom>
+          <a:noFill/>
+        </p:spPr>
+        <p:txBody>
+          <a:bodyPr wrap="square" lIns="0" tIns="0" rIns="0" bIns="0" anchor="ctr">
+            <a:noAutofit/>
+          </a:bodyPr>
+          <a:lstStyle/>
+          <a:p>
+            <a:pPr algn="l"/>
+            <a:r>
+              <a:rPr sz="1019" b="1">
+                <a:solidFill>
+                  <a:srgbClr val="1F4E8C"/>
                 </a:solidFill>
                 <a:latin typeface="Pretendard"/>
                 <a:ea typeface="Pretendard"/>
@@ -5482,14 +4998,14 @@
       </p:sp>
       <p:sp>
         <p:nvSpPr>
-          <p:cNvPr id="70" name="글"/>
+          <p:cNvPr id="56" name="글"/>
           <p:cNvSpPr txBox="1"/>
           <p:nvPr/>
         </p:nvSpPr>
         <p:spPr>
           <a:xfrm>
-            <a:off x="533400" y="3924300"/>
-            <a:ext cx="1413510" cy="190500"/>
+            <a:off x="533400" y="4107180"/>
+            <a:ext cx="1630680" cy="213360"/>
           </a:xfrm>
           <a:prstGeom prst="rect">
             <a:avLst/>
@@ -5504,9 +5020,9 @@
           <a:p>
             <a:pPr algn="l"/>
             <a:r>
-              <a:rPr sz="1019" b="1">
-                <a:solidFill>
-                  <a:srgbClr val="0A2342"/>
+              <a:rPr sz="1200" b="1">
+                <a:solidFill>
+                  <a:srgbClr val="0B2545"/>
                 </a:solidFill>
                 <a:latin typeface="Pretendard"/>
                 <a:ea typeface="Pretendard"/>
@@ -5519,14 +5035,14 @@
       </p:sp>
       <p:sp>
         <p:nvSpPr>
-          <p:cNvPr id="71" name="글"/>
+          <p:cNvPr id="57" name="글"/>
           <p:cNvSpPr txBox="1"/>
           <p:nvPr/>
         </p:nvSpPr>
         <p:spPr>
           <a:xfrm>
-            <a:off x="533400" y="4110990"/>
-            <a:ext cx="1900809" cy="163830"/>
+            <a:off x="533400" y="4320540"/>
+            <a:ext cx="1886331" cy="190500"/>
           </a:xfrm>
           <a:prstGeom prst="rect">
             <a:avLst/>
@@ -5541,7 +5057,7 @@
           <a:p>
             <a:pPr algn="l"/>
             <a:r>
-              <a:rPr sz="810" b="0">
+              <a:rPr sz="1019" b="0">
                 <a:solidFill>
                   <a:srgbClr val="3F4E61"/>
                 </a:solidFill>
@@ -5549,21 +5065,21 @@
                 <a:ea typeface="Pretendard"/>
                 <a:cs typeface="Pretendard"/>
               </a:rPr>
-              <a:t>상태 기계 · setval · 화면 마무리</a:t>
-            </a:r>
-          </a:p>
-        </p:txBody>
-      </p:sp>
-      <p:sp>
-        <p:nvSpPr>
-          <p:cNvPr id="72" name="글"/>
+              <a:t>상태 기계 · setval · 화면</a:t>
+            </a:r>
+          </a:p>
+        </p:txBody>
+      </p:sp>
+      <p:sp>
+        <p:nvSpPr>
+          <p:cNvPr id="58" name="글"/>
           <p:cNvSpPr txBox="1"/>
           <p:nvPr/>
         </p:nvSpPr>
         <p:spPr>
           <a:xfrm>
-            <a:off x="9174145" y="4011930"/>
-            <a:ext cx="352616" cy="163830"/>
+            <a:off x="5926183" y="4213860"/>
+            <a:ext cx="467868" cy="190500"/>
           </a:xfrm>
           <a:prstGeom prst="rect">
             <a:avLst/>
@@ -5578,9 +5094,46 @@
           <a:p>
             <a:pPr algn="l"/>
             <a:r>
-              <a:rPr sz="810" b="1">
-                <a:solidFill>
-                  <a:srgbClr val="164B8C"/>
+              <a:rPr sz="1019" b="1">
+                <a:solidFill>
+                  <a:srgbClr val="0B2545"/>
+                </a:solidFill>
+                <a:latin typeface="Pretendard"/>
+                <a:ea typeface="Pretendard"/>
+                <a:cs typeface="Pretendard"/>
+              </a:rPr>
+              <a:t>10/8</a:t>
+            </a:r>
+          </a:p>
+        </p:txBody>
+      </p:sp>
+      <p:sp>
+        <p:nvSpPr>
+          <p:cNvPr id="59" name="글"/>
+          <p:cNvSpPr txBox="1"/>
+          <p:nvPr/>
+        </p:nvSpPr>
+        <p:spPr>
+          <a:xfrm>
+            <a:off x="6317851" y="4213860"/>
+            <a:ext cx="396621" cy="190500"/>
+          </a:xfrm>
+          <a:prstGeom prst="rect">
+            <a:avLst/>
+          </a:prstGeom>
+          <a:noFill/>
+        </p:spPr>
+        <p:txBody>
+          <a:bodyPr wrap="square" lIns="0" tIns="0" rIns="0" bIns="0" anchor="ctr">
+            <a:noAutofit/>
+          </a:bodyPr>
+          <a:lstStyle/>
+          <a:p>
+            <a:pPr algn="l"/>
+            <a:r>
+              <a:rPr sz="1019" b="1">
+                <a:solidFill>
+                  <a:srgbClr val="1F4E8C"/>
                 </a:solidFill>
                 <a:latin typeface="Pretendard"/>
                 <a:ea typeface="Pretendard"/>
@@ -5593,14 +5146,14 @@
       </p:sp>
       <p:sp>
         <p:nvSpPr>
-          <p:cNvPr id="73" name="글"/>
+          <p:cNvPr id="60" name="글"/>
           <p:cNvSpPr txBox="1"/>
           <p:nvPr/>
         </p:nvSpPr>
         <p:spPr>
           <a:xfrm>
-            <a:off x="533400" y="4396740"/>
-            <a:ext cx="1070229" cy="190500"/>
+            <a:off x="533400" y="4625340"/>
+            <a:ext cx="1226820" cy="213360"/>
           </a:xfrm>
           <a:prstGeom prst="rect">
             <a:avLst/>
@@ -5615,9 +5168,9 @@
           <a:p>
             <a:pPr algn="l"/>
             <a:r>
-              <a:rPr sz="1019" b="1">
-                <a:solidFill>
-                  <a:srgbClr val="0A2342"/>
+              <a:rPr sz="1200" b="1">
+                <a:solidFill>
+                  <a:srgbClr val="0B2545"/>
                 </a:solidFill>
                 <a:latin typeface="Pretendard"/>
                 <a:ea typeface="Pretendard"/>
@@ -5630,14 +5183,14 @@
       </p:sp>
       <p:sp>
         <p:nvSpPr>
-          <p:cNvPr id="74" name="글"/>
+          <p:cNvPr id="61" name="글"/>
           <p:cNvSpPr txBox="1"/>
           <p:nvPr/>
         </p:nvSpPr>
         <p:spPr>
           <a:xfrm>
-            <a:off x="533400" y="4583430"/>
-            <a:ext cx="1551051" cy="163830"/>
+            <a:off x="533400" y="4838700"/>
+            <a:ext cx="1905762" cy="190500"/>
           </a:xfrm>
           <a:prstGeom prst="rect">
             <a:avLst/>
@@ -5652,7 +5205,7 @@
           <a:p>
             <a:pPr algn="l"/>
             <a:r>
-              <a:rPr sz="810" b="0">
+              <a:rPr sz="1019" b="0">
                 <a:solidFill>
                   <a:srgbClr val="3F4E61"/>
                 </a:solidFill>
@@ -5667,14 +5220,14 @@
       </p:sp>
       <p:sp>
         <p:nvSpPr>
-          <p:cNvPr id="75" name="글"/>
+          <p:cNvPr id="62" name="글"/>
           <p:cNvSpPr txBox="1"/>
           <p:nvPr/>
         </p:nvSpPr>
         <p:spPr>
           <a:xfrm>
-            <a:off x="9807191" y="4488180"/>
-            <a:ext cx="836676" cy="160020"/>
+            <a:off x="7380514" y="4732020"/>
+            <a:ext cx="681609" cy="190500"/>
           </a:xfrm>
           <a:prstGeom prst="rect">
             <a:avLst/>
@@ -5689,46 +5242,9 @@
           <a:p>
             <a:pPr algn="l"/>
             <a:r>
-              <a:rPr sz="780" b="1">
-                <a:solidFill>
-                  <a:srgbClr val="0A2342"/>
-                </a:solidFill>
-                <a:latin typeface="Pretendard"/>
-                <a:ea typeface="Pretendard"/>
-                <a:cs typeface="Pretendard"/>
-              </a:rPr>
-              <a:t>11/30 ~ 12/4</a:t>
-            </a:r>
-          </a:p>
-        </p:txBody>
-      </p:sp>
-      <p:sp>
-        <p:nvSpPr>
-          <p:cNvPr id="76" name="글"/>
-          <p:cNvSpPr txBox="1"/>
-          <p:nvPr/>
-        </p:nvSpPr>
-        <p:spPr>
-          <a:xfrm>
-            <a:off x="10567667" y="4484370"/>
-            <a:ext cx="578930" cy="163830"/>
-          </a:xfrm>
-          <a:prstGeom prst="rect">
-            <a:avLst/>
-          </a:prstGeom>
-          <a:noFill/>
-        </p:spPr>
-        <p:txBody>
-          <a:bodyPr wrap="square" lIns="0" tIns="0" rIns="0" bIns="0" anchor="ctr">
-            <a:noAutofit/>
-          </a:bodyPr>
-          <a:lstStyle/>
-          <a:p>
-            <a:pPr algn="l"/>
-            <a:r>
-              <a:rPr sz="810" b="1">
-                <a:solidFill>
-                  <a:srgbClr val="164B8C"/>
+              <a:rPr sz="1019" b="1">
+                <a:solidFill>
+                  <a:srgbClr val="1F4E8C"/>
                 </a:solidFill>
                 <a:latin typeface="Pretendard"/>
                 <a:ea typeface="Pretendard"/>
@@ -5741,14 +5257,14 @@
       </p:sp>
       <p:sp>
         <p:nvSpPr>
-          <p:cNvPr id="77" name="글"/>
+          <p:cNvPr id="63" name="글"/>
           <p:cNvSpPr txBox="1"/>
           <p:nvPr/>
         </p:nvSpPr>
         <p:spPr>
           <a:xfrm>
-            <a:off x="533400" y="4869180"/>
-            <a:ext cx="785241" cy="190500"/>
+            <a:off x="533400" y="5143500"/>
+            <a:ext cx="891540" cy="213360"/>
           </a:xfrm>
           <a:prstGeom prst="rect">
             <a:avLst/>
@@ -5763,9 +5279,9 @@
           <a:p>
             <a:pPr algn="l"/>
             <a:r>
-              <a:rPr sz="1019" b="1">
-                <a:solidFill>
-                  <a:srgbClr val="0A2342"/>
+              <a:rPr sz="1200" b="1">
+                <a:solidFill>
+                  <a:srgbClr val="0B2545"/>
                 </a:solidFill>
                 <a:latin typeface="Pretendard"/>
                 <a:ea typeface="Pretendard"/>
@@ -5778,14 +5294,14 @@
       </p:sp>
       <p:sp>
         <p:nvSpPr>
-          <p:cNvPr id="78" name="글"/>
+          <p:cNvPr id="64" name="글"/>
           <p:cNvSpPr txBox="1"/>
           <p:nvPr/>
         </p:nvSpPr>
         <p:spPr>
           <a:xfrm>
-            <a:off x="533400" y="5055870"/>
-            <a:ext cx="1479042" cy="163830"/>
+            <a:off x="533400" y="5356860"/>
+            <a:ext cx="1815084" cy="190500"/>
           </a:xfrm>
           <a:prstGeom prst="rect">
             <a:avLst/>
@@ -5800,7 +5316,7 @@
           <a:p>
             <a:pPr algn="l"/>
             <a:r>
-              <a:rPr sz="810" b="0">
+              <a:rPr sz="1019" b="0">
                 <a:solidFill>
                   <a:srgbClr val="3F4E61"/>
                 </a:solidFill>
@@ -5815,14 +5331,14 @@
       </p:sp>
       <p:sp>
         <p:nvSpPr>
-          <p:cNvPr id="79" name="글"/>
+          <p:cNvPr id="65" name="글"/>
           <p:cNvSpPr txBox="1"/>
           <p:nvPr/>
         </p:nvSpPr>
         <p:spPr>
           <a:xfrm>
-            <a:off x="10440237" y="4960620"/>
-            <a:ext cx="836676" cy="160020"/>
+            <a:off x="8752114" y="5250180"/>
+            <a:ext cx="1109091" cy="190500"/>
           </a:xfrm>
           <a:prstGeom prst="rect">
             <a:avLst/>
@@ -5837,29 +5353,29 @@
           <a:p>
             <a:pPr algn="l"/>
             <a:r>
-              <a:rPr sz="780" b="1">
-                <a:solidFill>
-                  <a:srgbClr val="0A2342"/>
+              <a:rPr sz="1019" b="1">
+                <a:solidFill>
+                  <a:srgbClr val="0B2545"/>
                 </a:solidFill>
                 <a:latin typeface="Pretendard"/>
                 <a:ea typeface="Pretendard"/>
                 <a:cs typeface="Pretendard"/>
               </a:rPr>
-              <a:t>12/7 ~ 12/11</a:t>
-            </a:r>
-          </a:p>
-        </p:txBody>
-      </p:sp>
-      <p:sp>
-        <p:nvSpPr>
-          <p:cNvPr id="80" name="글"/>
+              <a:t>10/19 ~ 10/23</a:t>
+            </a:r>
+          </a:p>
+        </p:txBody>
+      </p:sp>
+      <p:sp>
+        <p:nvSpPr>
+          <p:cNvPr id="66" name="글"/>
           <p:cNvSpPr txBox="1"/>
           <p:nvPr/>
         </p:nvSpPr>
         <p:spPr>
           <a:xfrm>
-            <a:off x="533400" y="5341620"/>
-            <a:ext cx="655701" cy="190500"/>
+            <a:off x="533400" y="5661660"/>
+            <a:ext cx="739140" cy="213360"/>
           </a:xfrm>
           <a:prstGeom prst="rect">
             <a:avLst/>
@@ -5874,9 +5390,9 @@
           <a:p>
             <a:pPr algn="l"/>
             <a:r>
-              <a:rPr sz="1019" b="1">
-                <a:solidFill>
-                  <a:srgbClr val="0A2342"/>
+              <a:rPr sz="1200" b="1">
+                <a:solidFill>
+                  <a:srgbClr val="0B2545"/>
                 </a:solidFill>
                 <a:latin typeface="Pretendard"/>
                 <a:ea typeface="Pretendard"/>
@@ -5889,14 +5405,14 @@
       </p:sp>
       <p:sp>
         <p:nvSpPr>
-          <p:cNvPr id="81" name="글"/>
+          <p:cNvPr id="67" name="글"/>
           <p:cNvSpPr txBox="1"/>
           <p:nvPr/>
         </p:nvSpPr>
         <p:spPr>
           <a:xfrm>
-            <a:off x="533400" y="5528310"/>
-            <a:ext cx="1720787" cy="163830"/>
+            <a:off x="533400" y="5875020"/>
+            <a:ext cx="2119503" cy="190500"/>
           </a:xfrm>
           <a:prstGeom prst="rect">
             <a:avLst/>
@@ -5911,7 +5427,7 @@
           <a:p>
             <a:pPr algn="l"/>
             <a:r>
-              <a:rPr sz="810" b="0">
+              <a:rPr sz="1019" b="0">
                 <a:solidFill>
                   <a:srgbClr val="3F4E61"/>
                 </a:solidFill>
@@ -5926,14 +5442,14 @@
       </p:sp>
       <p:sp>
         <p:nvSpPr>
-          <p:cNvPr id="82" name="글"/>
+          <p:cNvPr id="68" name="글"/>
           <p:cNvSpPr txBox="1"/>
           <p:nvPr/>
         </p:nvSpPr>
         <p:spPr>
           <a:xfrm>
-            <a:off x="11073284" y="5433060"/>
-            <a:ext cx="891159" cy="160020"/>
+            <a:off x="10123714" y="5768340"/>
+            <a:ext cx="1109091" cy="190500"/>
           </a:xfrm>
           <a:prstGeom prst="rect">
             <a:avLst/>
@@ -5948,29 +5464,29 @@
           <a:p>
             <a:pPr algn="l"/>
             <a:r>
-              <a:rPr sz="780" b="1">
-                <a:solidFill>
-                  <a:srgbClr val="0A2342"/>
+              <a:rPr sz="1019" b="1">
+                <a:solidFill>
+                  <a:srgbClr val="0B2545"/>
                 </a:solidFill>
                 <a:latin typeface="Pretendard"/>
                 <a:ea typeface="Pretendard"/>
                 <a:cs typeface="Pretendard"/>
               </a:rPr>
-              <a:t>12/14 ~ 12/18</a:t>
-            </a:r>
-          </a:p>
-        </p:txBody>
-      </p:sp>
-      <p:sp>
-        <p:nvSpPr>
-          <p:cNvPr id="83" name="범례"/>
+              <a:t>10/26 ~ 10/30</a:t>
+            </a:r>
+          </a:p>
+        </p:txBody>
+      </p:sp>
+      <p:sp>
+        <p:nvSpPr>
+          <p:cNvPr id="69" name="범례"/>
           <p:cNvSpPr/>
           <p:nvPr/>
         </p:nvSpPr>
         <p:spPr>
           <a:xfrm>
             <a:off x="381000" y="6309360"/>
-            <a:ext cx="2783205" cy="396240"/>
+            <a:ext cx="2898267" cy="396240"/>
           </a:xfrm>
           <a:prstGeom prst="roundRect">
             <a:avLst>
@@ -5982,7 +5498,7 @@
           </a:solidFill>
           <a:ln w="10668">
             <a:solidFill>
-              <a:srgbClr val="A9C3E2"/>
+              <a:srgbClr val="8EC3EC"/>
             </a:solidFill>
           </a:ln>
         </p:spPr>
@@ -5996,7 +5512,7 @@
       </p:sp>
       <p:sp>
         <p:nvSpPr>
-          <p:cNvPr id="84" name="범례 제목"/>
+          <p:cNvPr id="70" name="범례 제목"/>
           <p:cNvSpPr txBox="1"/>
           <p:nvPr/>
         </p:nvSpPr>
@@ -6018,9 +5534,9 @@
           <a:p>
             <a:pPr algn="l"/>
             <a:r>
-              <a:rPr sz="900" b="1">
-                <a:solidFill>
-                  <a:srgbClr val="0A2342"/>
+              <a:rPr sz="1019" b="1">
+                <a:solidFill>
+                  <a:srgbClr val="0B2545"/>
                 </a:solidFill>
                 <a:latin typeface="Pretendard"/>
                 <a:ea typeface="Pretendard"/>
@@ -6033,7 +5549,7 @@
       </p:sp>
       <p:sp>
         <p:nvSpPr>
-          <p:cNvPr id="85" name="범례 완료"/>
+          <p:cNvPr id="71" name="범례 완료"/>
           <p:cNvSpPr/>
           <p:nvPr/>
         </p:nvSpPr>
@@ -6048,11 +5564,11 @@
             </a:avLst>
           </a:prstGeom>
           <a:solidFill>
-            <a:srgbClr val="164B8C"/>
+            <a:srgbClr val="1F4E8C"/>
           </a:solidFill>
           <a:ln w="7620">
             <a:solidFill>
-              <a:srgbClr val="6F9BD1"/>
+              <a:srgbClr val="8EC3EC"/>
             </a:solidFill>
           </a:ln>
         </p:spPr>
@@ -6066,14 +5582,14 @@
       </p:sp>
       <p:sp>
         <p:nvSpPr>
-          <p:cNvPr id="86" name="범례 글 완료"/>
+          <p:cNvPr id="72" name="범례 글 완료"/>
           <p:cNvSpPr txBox="1"/>
           <p:nvPr/>
         </p:nvSpPr>
         <p:spPr>
           <a:xfrm>
             <a:off x="1173480" y="6309360"/>
-            <a:ext cx="381000" cy="396240"/>
+            <a:ext cx="411480" cy="396240"/>
           </a:xfrm>
           <a:prstGeom prst="rect">
             <a:avLst/>
@@ -6088,7 +5604,7 @@
           <a:p>
             <a:pPr algn="l"/>
             <a:r>
-              <a:rPr sz="900" b="1">
+              <a:rPr sz="1019" b="1">
                 <a:solidFill>
                   <a:srgbClr val="16202C"/>
                 </a:solidFill>
@@ -6103,13 +5619,13 @@
       </p:sp>
       <p:sp>
         <p:nvSpPr>
-          <p:cNvPr id="87" name="범례 진행 중"/>
+          <p:cNvPr id="73" name="범례 진행 중"/>
           <p:cNvSpPr/>
           <p:nvPr/>
         </p:nvSpPr>
         <p:spPr>
           <a:xfrm>
-            <a:off x="1630680" y="6438900"/>
+            <a:off x="1661160" y="6438900"/>
             <a:ext cx="182880" cy="137160"/>
           </a:xfrm>
           <a:prstGeom prst="roundRect">
@@ -6118,11 +5634,11 @@
             </a:avLst>
           </a:prstGeom>
           <a:solidFill>
-            <a:srgbClr val="1F74C4"/>
+            <a:srgbClr val="2B86C9"/>
           </a:solidFill>
           <a:ln w="7620">
             <a:solidFill>
-              <a:srgbClr val="6F9BD1"/>
+              <a:srgbClr val="8EC3EC"/>
             </a:solidFill>
           </a:ln>
         </p:spPr>
@@ -6136,14 +5652,14 @@
       </p:sp>
       <p:sp>
         <p:nvSpPr>
-          <p:cNvPr id="88" name="범례 글 진행 중"/>
+          <p:cNvPr id="74" name="범례 글 진행 중"/>
           <p:cNvSpPr txBox="1"/>
           <p:nvPr/>
         </p:nvSpPr>
         <p:spPr>
           <a:xfrm>
-            <a:off x="1889760" y="6309360"/>
-            <a:ext cx="558165" cy="396240"/>
+            <a:off x="1920240" y="6309360"/>
+            <a:ext cx="612267" cy="396240"/>
           </a:xfrm>
           <a:prstGeom prst="rect">
             <a:avLst/>
@@ -6158,7 +5674,7 @@
           <a:p>
             <a:pPr algn="l"/>
             <a:r>
-              <a:rPr sz="900" b="1">
+              <a:rPr sz="1019" b="1">
                 <a:solidFill>
                   <a:srgbClr val="16202C"/>
                 </a:solidFill>
@@ -6173,13 +5689,13 @@
       </p:sp>
       <p:sp>
         <p:nvSpPr>
-          <p:cNvPr id="89" name="범례 예정"/>
+          <p:cNvPr id="75" name="범례 예정"/>
           <p:cNvSpPr/>
           <p:nvPr/>
         </p:nvSpPr>
         <p:spPr>
           <a:xfrm>
-            <a:off x="2524125" y="6438900"/>
+            <a:off x="2608707" y="6438900"/>
             <a:ext cx="182880" cy="137160"/>
           </a:xfrm>
           <a:prstGeom prst="roundRect">
@@ -6192,7 +5708,7 @@
           </a:solidFill>
           <a:ln w="7620">
             <a:solidFill>
-              <a:srgbClr val="6F9BD1"/>
+              <a:srgbClr val="8EC3EC"/>
             </a:solidFill>
           </a:ln>
         </p:spPr>
@@ -6206,14 +5722,14 @@
       </p:sp>
       <p:sp>
         <p:nvSpPr>
-          <p:cNvPr id="90" name="범례 글 예정"/>
+          <p:cNvPr id="76" name="범례 글 예정"/>
           <p:cNvSpPr txBox="1"/>
           <p:nvPr/>
         </p:nvSpPr>
         <p:spPr>
           <a:xfrm>
-            <a:off x="2783205" y="6309360"/>
-            <a:ext cx="381000" cy="396240"/>
+            <a:off x="2867787" y="6309360"/>
+            <a:ext cx="411480" cy="396240"/>
           </a:xfrm>
           <a:prstGeom prst="rect">
             <a:avLst/>
@@ -6228,7 +5744,7 @@
           <a:p>
             <a:pPr algn="l"/>
             <a:r>
-              <a:rPr sz="900" b="1">
+              <a:rPr sz="1019" b="1">
                 <a:solidFill>
                   <a:srgbClr val="16202C"/>
                 </a:solidFill>
@@ -6243,14 +5759,14 @@
       </p:sp>
       <p:sp>
         <p:nvSpPr>
-          <p:cNvPr id="91" name="설명"/>
+          <p:cNvPr id="77" name="설명"/>
           <p:cNvSpPr txBox="1"/>
           <p:nvPr/>
         </p:nvSpPr>
         <p:spPr>
           <a:xfrm>
-            <a:off x="5510784" y="6385560"/>
-            <a:ext cx="6300216" cy="167640"/>
+            <a:off x="6395847" y="6347460"/>
+            <a:ext cx="5415153" cy="190500"/>
           </a:xfrm>
           <a:prstGeom prst="rect">
             <a:avLst/>
@@ -6265,7 +5781,7 @@
           <a:p>
             <a:pPr algn="r"/>
             <a:r>
-              <a:rPr sz="840" b="0">
+              <a:rPr sz="1019" b="0">
                 <a:solidFill>
                   <a:srgbClr val="3F4E61"/>
                 </a:solidFill>
@@ -6273,21 +5789,21 @@
                 <a:ea typeface="Pretendard"/>
                 <a:cs typeface="Pretendard"/>
               </a:rPr>
-              <a:t>막대 오른쪽 D 번호: 그 단계에서 함께 만드는 설계 문서 · 3단계 이후 날짜는 안(案)으로 단계가 끝날 때마다 고친다</a:t>
-            </a:r>
-          </a:p>
-        </p:txBody>
-      </p:sp>
-      <p:sp>
-        <p:nvSpPr>
-          <p:cNvPr id="92" name="설명"/>
+              <a:t>막대 오른쪽 D 번호: 그 단계에 맞춰 만드는 설계 문서 · 6단계부터 날짜는 안(案)</a:t>
+            </a:r>
+          </a:p>
+        </p:txBody>
+      </p:sp>
+      <p:sp>
+        <p:nvSpPr>
+          <p:cNvPr id="78" name="설명"/>
           <p:cNvSpPr txBox="1"/>
           <p:nvPr/>
         </p:nvSpPr>
         <p:spPr>
           <a:xfrm>
-            <a:off x="7729728" y="6553200"/>
-            <a:ext cx="4081272" cy="167640"/>
+            <a:off x="6564249" y="6537960"/>
+            <a:ext cx="5246751" cy="190500"/>
           </a:xfrm>
           <a:prstGeom prst="rect">
             <a:avLst/>
@@ -6302,7 +5818,7 @@
           <a:p>
             <a:pPr algn="r"/>
             <a:r>
-              <a:rPr sz="840" b="0">
+              <a:rPr sz="1019" b="0">
                 <a:solidFill>
                   <a:srgbClr val="3F4E61"/>
                 </a:solidFill>
@@ -6310,7 +5826,7 @@
                 <a:ea typeface="Pretendard"/>
                 <a:cs typeface="Pretendard"/>
               </a:rPr>
-              <a:t>단계마다 브랜치 하나 + draft PR 하나 · 머지는 사용자가 한다(plan §6)</a:t>
+              <a:t>단계마다 브랜치 하나 + draft PR 하나 · 머지는 사용자가 한다(CLAUDE.md §4)</a:t>
             </a:r>
           </a:p>
         </p:txBody>

--- a/docs/design/dist/d06-schedule.pptx
+++ b/docs/design/dist/d06-schedule.pptx
@@ -3113,7 +3113,7 @@
             </a:avLst>
           </a:prstGeom>
           <a:solidFill>
-            <a:srgbClr val="1F4E8C"/>
+            <a:srgbClr val="1E6B4F"/>
           </a:solidFill>
           <a:ln>
             <a:noFill/>
@@ -3153,7 +3153,7 @@
             <a:r>
               <a:rPr sz="2160" b="1">
                 <a:solidFill>
-                  <a:srgbClr val="0B2545"/>
+                  <a:srgbClr val="0B3D2E"/>
                 </a:solidFill>
                 <a:latin typeface="Pretendard"/>
                 <a:ea typeface="Pretendard"/>
@@ -3255,7 +3255,7 @@
             </a:avLst>
           </a:prstGeom>
           <a:solidFill>
-            <a:srgbClr val="1F4E8C"/>
+            <a:srgbClr val="1E6B4F"/>
           </a:solidFill>
           <a:ln>
             <a:noFill/>
@@ -3286,7 +3286,7 @@
             </a:avLst>
           </a:prstGeom>
           <a:solidFill>
-            <a:srgbClr val="EEF6FD"/>
+            <a:srgbClr val="EEF8F3"/>
           </a:solidFill>
           <a:ln>
             <a:noFill/>
@@ -3317,7 +3317,7 @@
             </a:avLst>
           </a:prstGeom>
           <a:solidFill>
-            <a:srgbClr val="EEF6FD"/>
+            <a:srgbClr val="EEF8F3"/>
           </a:solidFill>
           <a:ln>
             <a:noFill/>
@@ -3348,7 +3348,7 @@
             </a:avLst>
           </a:prstGeom>
           <a:solidFill>
-            <a:srgbClr val="EEF6FD"/>
+            <a:srgbClr val="EEF8F3"/>
           </a:solidFill>
           <a:ln>
             <a:noFill/>
@@ -3379,7 +3379,7 @@
             </a:avLst>
           </a:prstGeom>
           <a:solidFill>
-            <a:srgbClr val="EEF6FD"/>
+            <a:srgbClr val="EEF8F3"/>
           </a:solidFill>
           <a:ln>
             <a:noFill/>
@@ -3410,7 +3410,7 @@
             </a:avLst>
           </a:prstGeom>
           <a:solidFill>
-            <a:srgbClr val="D6E3F2"/>
+            <a:srgbClr val="D7EDE2"/>
           </a:solidFill>
           <a:ln>
             <a:noFill/>
@@ -3441,7 +3441,7 @@
             </a:avLst>
           </a:prstGeom>
           <a:solidFill>
-            <a:srgbClr val="D6E3F2"/>
+            <a:srgbClr val="D7EDE2"/>
           </a:solidFill>
           <a:ln>
             <a:noFill/>
@@ -3472,7 +3472,7 @@
             </a:avLst>
           </a:prstGeom>
           <a:solidFill>
-            <a:srgbClr val="D6E3F2"/>
+            <a:srgbClr val="D7EDE2"/>
           </a:solidFill>
           <a:ln>
             <a:noFill/>
@@ -3503,7 +3503,7 @@
             </a:avLst>
           </a:prstGeom>
           <a:solidFill>
-            <a:srgbClr val="D6E3F2"/>
+            <a:srgbClr val="D7EDE2"/>
           </a:solidFill>
           <a:ln>
             <a:noFill/>
@@ -3534,7 +3534,7 @@
             </a:avLst>
           </a:prstGeom>
           <a:solidFill>
-            <a:srgbClr val="D6E3F2"/>
+            <a:srgbClr val="D7EDE2"/>
           </a:solidFill>
           <a:ln>
             <a:noFill/>
@@ -3565,7 +3565,7 @@
             </a:avLst>
           </a:prstGeom>
           <a:solidFill>
-            <a:srgbClr val="D6E3F2"/>
+            <a:srgbClr val="D7EDE2"/>
           </a:solidFill>
           <a:ln>
             <a:noFill/>
@@ -3596,7 +3596,7 @@
             </a:avLst>
           </a:prstGeom>
           <a:solidFill>
-            <a:srgbClr val="D6E3F2"/>
+            <a:srgbClr val="D7EDE2"/>
           </a:solidFill>
           <a:ln>
             <a:noFill/>
@@ -3627,7 +3627,7 @@
             </a:avLst>
           </a:prstGeom>
           <a:solidFill>
-            <a:srgbClr val="0B2545"/>
+            <a:srgbClr val="0B3D2E"/>
           </a:solidFill>
           <a:ln>
             <a:noFill/>
@@ -3658,7 +3658,7 @@
             </a:avLst>
           </a:prstGeom>
           <a:solidFill>
-            <a:srgbClr val="1F4E8C"/>
+            <a:srgbClr val="1E6B4F"/>
           </a:solidFill>
           <a:ln>
             <a:noFill/>
@@ -3702,7 +3702,7 @@
             </a:avLst>
           </a:prstGeom>
           <a:solidFill>
-            <a:srgbClr val="1F4E8C"/>
+            <a:srgbClr val="1E6B4F"/>
           </a:solidFill>
           <a:ln>
             <a:noFill/>
@@ -3746,7 +3746,7 @@
             </a:avLst>
           </a:prstGeom>
           <a:solidFill>
-            <a:srgbClr val="1F4E8C"/>
+            <a:srgbClr val="1E6B4F"/>
           </a:solidFill>
           <a:ln>
             <a:noFill/>
@@ -3790,7 +3790,7 @@
             </a:avLst>
           </a:prstGeom>
           <a:solidFill>
-            <a:srgbClr val="1F4E8C"/>
+            <a:srgbClr val="1E6B4F"/>
           </a:solidFill>
           <a:ln>
             <a:noFill/>
@@ -3821,7 +3821,7 @@
             </a:avLst>
           </a:prstGeom>
           <a:solidFill>
-            <a:srgbClr val="1F4E8C"/>
+            <a:srgbClr val="1E6B4F"/>
           </a:solidFill>
           <a:ln>
             <a:noFill/>
@@ -3852,7 +3852,7 @@
             </a:avLst>
           </a:prstGeom>
           <a:solidFill>
-            <a:srgbClr val="1F4E8C"/>
+            <a:srgbClr val="1E6B4F"/>
           </a:solidFill>
           <a:ln>
             <a:noFill/>
@@ -3883,7 +3883,7 @@
             </a:avLst>
           </a:prstGeom>
           <a:solidFill>
-            <a:srgbClr val="2B86C9"/>
+            <a:srgbClr val="2E9E6E"/>
           </a:solidFill>
           <a:ln>
             <a:noFill/>
@@ -3927,11 +3927,11 @@
             </a:avLst>
           </a:prstGeom>
           <a:solidFill>
-            <a:srgbClr val="D3E5F8"/>
+            <a:srgbClr val="D5EFE2"/>
           </a:solidFill>
           <a:ln w="9144">
             <a:solidFill>
-              <a:srgbClr val="1F4E8C"/>
+              <a:srgbClr val="1E6B4F"/>
             </a:solidFill>
           </a:ln>
         </p:spPr>
@@ -3960,11 +3960,11 @@
             </a:avLst>
           </a:prstGeom>
           <a:solidFill>
-            <a:srgbClr val="D3E5F8"/>
+            <a:srgbClr val="D5EFE2"/>
           </a:solidFill>
           <a:ln w="9144">
             <a:solidFill>
-              <a:srgbClr val="1F4E8C"/>
+              <a:srgbClr val="1E6B4F"/>
             </a:solidFill>
           </a:ln>
         </p:spPr>
@@ -3992,7 +3992,7 @@
           </a:prstGeom>
           <a:ln w="10668">
             <a:solidFill>
-              <a:srgbClr val="8EC3EC"/>
+              <a:srgbClr val="9DD3B8"/>
             </a:solidFill>
           </a:ln>
         </p:spPr>
@@ -4393,7 +4393,7 @@
             <a:r>
               <a:rPr sz="1019" b="1">
                 <a:solidFill>
-                  <a:srgbClr val="0B2545"/>
+                  <a:srgbClr val="0B3D2E"/>
                 </a:solidFill>
                 <a:latin typeface="Pretendard"/>
                 <a:ea typeface="Pretendard"/>
@@ -4430,7 +4430,7 @@
             <a:r>
               <a:rPr sz="1200" b="1">
                 <a:solidFill>
-                  <a:srgbClr val="0B2545"/>
+                  <a:srgbClr val="0B3D2E"/>
                 </a:solidFill>
                 <a:latin typeface="Pretendard"/>
                 <a:ea typeface="Pretendard"/>
@@ -4504,7 +4504,7 @@
             <a:r>
               <a:rPr sz="1200" b="1">
                 <a:solidFill>
-                  <a:srgbClr val="0B2545"/>
+                  <a:srgbClr val="0B3D2E"/>
                 </a:solidFill>
                 <a:latin typeface="Pretendard"/>
                 <a:ea typeface="Pretendard"/>
@@ -4578,7 +4578,7 @@
             <a:r>
               <a:rPr sz="1019" b="1">
                 <a:solidFill>
-                  <a:srgbClr val="1F4E8C"/>
+                  <a:srgbClr val="1E6B4F"/>
                 </a:solidFill>
                 <a:latin typeface="Pretendard"/>
                 <a:ea typeface="Pretendard"/>
@@ -4615,7 +4615,7 @@
             <a:r>
               <a:rPr sz="1200" b="1">
                 <a:solidFill>
-                  <a:srgbClr val="0B2545"/>
+                  <a:srgbClr val="0B3D2E"/>
                 </a:solidFill>
                 <a:latin typeface="Pretendard"/>
                 <a:ea typeface="Pretendard"/>
@@ -4689,7 +4689,7 @@
             <a:r>
               <a:rPr sz="1019" b="1">
                 <a:solidFill>
-                  <a:srgbClr val="1F4E8C"/>
+                  <a:srgbClr val="1E6B4F"/>
                 </a:solidFill>
                 <a:latin typeface="Pretendard"/>
                 <a:ea typeface="Pretendard"/>
@@ -4726,7 +4726,7 @@
             <a:r>
               <a:rPr sz="1200" b="1">
                 <a:solidFill>
-                  <a:srgbClr val="0B2545"/>
+                  <a:srgbClr val="0B3D2E"/>
                 </a:solidFill>
                 <a:latin typeface="Pretendard"/>
                 <a:ea typeface="Pretendard"/>
@@ -4800,7 +4800,7 @@
             <a:r>
               <a:rPr sz="1019" b="1">
                 <a:solidFill>
-                  <a:srgbClr val="0B2545"/>
+                  <a:srgbClr val="0B3D2E"/>
                 </a:solidFill>
                 <a:latin typeface="Pretendard"/>
                 <a:ea typeface="Pretendard"/>
@@ -4837,7 +4837,7 @@
             <a:r>
               <a:rPr sz="1019" b="1">
                 <a:solidFill>
-                  <a:srgbClr val="1F4E8C"/>
+                  <a:srgbClr val="1E6B4F"/>
                 </a:solidFill>
                 <a:latin typeface="Pretendard"/>
                 <a:ea typeface="Pretendard"/>
@@ -4874,7 +4874,7 @@
             <a:r>
               <a:rPr sz="1200" b="1">
                 <a:solidFill>
-                  <a:srgbClr val="0B2545"/>
+                  <a:srgbClr val="0B3D2E"/>
                 </a:solidFill>
                 <a:latin typeface="Pretendard"/>
                 <a:ea typeface="Pretendard"/>
@@ -4948,7 +4948,7 @@
             <a:r>
               <a:rPr sz="1019" b="1">
                 <a:solidFill>
-                  <a:srgbClr val="0B2545"/>
+                  <a:srgbClr val="0B3D2E"/>
                 </a:solidFill>
                 <a:latin typeface="Pretendard"/>
                 <a:ea typeface="Pretendard"/>
@@ -4985,7 +4985,7 @@
             <a:r>
               <a:rPr sz="1019" b="1">
                 <a:solidFill>
-                  <a:srgbClr val="1F4E8C"/>
+                  <a:srgbClr val="1E6B4F"/>
                 </a:solidFill>
                 <a:latin typeface="Pretendard"/>
                 <a:ea typeface="Pretendard"/>
@@ -5022,7 +5022,7 @@
             <a:r>
               <a:rPr sz="1200" b="1">
                 <a:solidFill>
-                  <a:srgbClr val="0B2545"/>
+                  <a:srgbClr val="0B3D2E"/>
                 </a:solidFill>
                 <a:latin typeface="Pretendard"/>
                 <a:ea typeface="Pretendard"/>
@@ -5096,7 +5096,7 @@
             <a:r>
               <a:rPr sz="1019" b="1">
                 <a:solidFill>
-                  <a:srgbClr val="0B2545"/>
+                  <a:srgbClr val="0B3D2E"/>
                 </a:solidFill>
                 <a:latin typeface="Pretendard"/>
                 <a:ea typeface="Pretendard"/>
@@ -5133,7 +5133,7 @@
             <a:r>
               <a:rPr sz="1019" b="1">
                 <a:solidFill>
-                  <a:srgbClr val="1F4E8C"/>
+                  <a:srgbClr val="1E6B4F"/>
                 </a:solidFill>
                 <a:latin typeface="Pretendard"/>
                 <a:ea typeface="Pretendard"/>
@@ -5170,7 +5170,7 @@
             <a:r>
               <a:rPr sz="1200" b="1">
                 <a:solidFill>
-                  <a:srgbClr val="0B2545"/>
+                  <a:srgbClr val="0B3D2E"/>
                 </a:solidFill>
                 <a:latin typeface="Pretendard"/>
                 <a:ea typeface="Pretendard"/>
@@ -5244,7 +5244,7 @@
             <a:r>
               <a:rPr sz="1019" b="1">
                 <a:solidFill>
-                  <a:srgbClr val="1F4E8C"/>
+                  <a:srgbClr val="1E6B4F"/>
                 </a:solidFill>
                 <a:latin typeface="Pretendard"/>
                 <a:ea typeface="Pretendard"/>
@@ -5281,7 +5281,7 @@
             <a:r>
               <a:rPr sz="1200" b="1">
                 <a:solidFill>
-                  <a:srgbClr val="0B2545"/>
+                  <a:srgbClr val="0B3D2E"/>
                 </a:solidFill>
                 <a:latin typeface="Pretendard"/>
                 <a:ea typeface="Pretendard"/>
@@ -5355,7 +5355,7 @@
             <a:r>
               <a:rPr sz="1019" b="1">
                 <a:solidFill>
-                  <a:srgbClr val="0B2545"/>
+                  <a:srgbClr val="0B3D2E"/>
                 </a:solidFill>
                 <a:latin typeface="Pretendard"/>
                 <a:ea typeface="Pretendard"/>
@@ -5392,7 +5392,7 @@
             <a:r>
               <a:rPr sz="1200" b="1">
                 <a:solidFill>
-                  <a:srgbClr val="0B2545"/>
+                  <a:srgbClr val="0B3D2E"/>
                 </a:solidFill>
                 <a:latin typeface="Pretendard"/>
                 <a:ea typeface="Pretendard"/>
@@ -5466,7 +5466,7 @@
             <a:r>
               <a:rPr sz="1019" b="1">
                 <a:solidFill>
-                  <a:srgbClr val="0B2545"/>
+                  <a:srgbClr val="0B3D2E"/>
                 </a:solidFill>
                 <a:latin typeface="Pretendard"/>
                 <a:ea typeface="Pretendard"/>
@@ -5498,7 +5498,7 @@
           </a:solidFill>
           <a:ln w="10668">
             <a:solidFill>
-              <a:srgbClr val="8EC3EC"/>
+              <a:srgbClr val="9DD3B8"/>
             </a:solidFill>
           </a:ln>
         </p:spPr>
@@ -5536,7 +5536,7 @@
             <a:r>
               <a:rPr sz="1019" b="1">
                 <a:solidFill>
-                  <a:srgbClr val="0B2545"/>
+                  <a:srgbClr val="0B3D2E"/>
                 </a:solidFill>
                 <a:latin typeface="Pretendard"/>
                 <a:ea typeface="Pretendard"/>
@@ -5564,11 +5564,11 @@
             </a:avLst>
           </a:prstGeom>
           <a:solidFill>
-            <a:srgbClr val="1F4E8C"/>
+            <a:srgbClr val="1E6B4F"/>
           </a:solidFill>
           <a:ln w="7620">
             <a:solidFill>
-              <a:srgbClr val="8EC3EC"/>
+              <a:srgbClr val="9DD3B8"/>
             </a:solidFill>
           </a:ln>
         </p:spPr>
@@ -5634,11 +5634,11 @@
             </a:avLst>
           </a:prstGeom>
           <a:solidFill>
-            <a:srgbClr val="2B86C9"/>
+            <a:srgbClr val="2E9E6E"/>
           </a:solidFill>
           <a:ln w="7620">
             <a:solidFill>
-              <a:srgbClr val="8EC3EC"/>
+              <a:srgbClr val="9DD3B8"/>
             </a:solidFill>
           </a:ln>
         </p:spPr>
@@ -5704,11 +5704,11 @@
             </a:avLst>
           </a:prstGeom>
           <a:solidFill>
-            <a:srgbClr val="D3E5F8"/>
+            <a:srgbClr val="D5EFE2"/>
           </a:solidFill>
           <a:ln w="7620">
             <a:solidFill>
-              <a:srgbClr val="8EC3EC"/>
+              <a:srgbClr val="9DD3B8"/>
             </a:solidFill>
           </a:ln>
         </p:spPr>

--- a/docs/design/dist/d06-schedule.pptx
+++ b/docs/design/dist/d06-schedule.pptx
@@ -3104,8 +3104,8 @@
         </p:nvSpPr>
         <p:spPr>
           <a:xfrm>
-            <a:off x="381000" y="289560"/>
-            <a:ext cx="53340" cy="335280"/>
+            <a:off x="381000" y="274320"/>
+            <a:ext cx="53340" cy="548640"/>
           </a:xfrm>
           <a:prstGeom prst="roundRect">
             <a:avLst>
@@ -3113,7 +3113,7 @@
             </a:avLst>
           </a:prstGeom>
           <a:solidFill>
-            <a:srgbClr val="164B8C"/>
+            <a:srgbClr val="1E6B4F"/>
           </a:solidFill>
           <a:ln>
             <a:noFill/>
@@ -3135,8 +3135,8 @@
         </p:nvSpPr>
         <p:spPr>
           <a:xfrm>
-            <a:off x="533400" y="289560"/>
-            <a:ext cx="7620000" cy="304800"/>
+            <a:off x="533400" y="228600"/>
+            <a:ext cx="8001000" cy="365760"/>
           </a:xfrm>
           <a:prstGeom prst="rect">
             <a:avLst/>
@@ -3151,9 +3151,9 @@
           <a:p>
             <a:pPr algn="l"/>
             <a:r>
-              <a:rPr sz="1800" b="1">
-                <a:solidFill>
-                  <a:srgbClr val="0A2342"/>
+              <a:rPr sz="2160" b="1">
+                <a:solidFill>
+                  <a:srgbClr val="0B3D2E"/>
                 </a:solidFill>
                 <a:latin typeface="Pretendard"/>
                 <a:ea typeface="Pretendard"/>
@@ -3172,8 +3172,8 @@
         </p:nvSpPr>
         <p:spPr>
           <a:xfrm>
-            <a:off x="533400" y="624840"/>
-            <a:ext cx="7620000" cy="167640"/>
+            <a:off x="533400" y="640080"/>
+            <a:ext cx="9144000" cy="182880"/>
           </a:xfrm>
           <a:prstGeom prst="rect">
             <a:avLst/>
@@ -3188,7 +3188,7 @@
           <a:p>
             <a:pPr algn="l"/>
             <a:r>
-              <a:rPr sz="960" b="0">
+              <a:rPr sz="1080" b="0">
                 <a:solidFill>
                   <a:srgbClr val="3F4E61"/>
                 </a:solidFill>
@@ -3196,7 +3196,7 @@
                 <a:ea typeface="Pretendard"/>
                 <a:cs typeface="Pretendard"/>
               </a:rPr>
-              <a:t>단계별 기간(안) · 단계 끝 = Mac 에서 완료 기준을 확인한 날 · 오늘 2026-10-06</a:t>
+              <a:t>0 ~ 5단계는 실제(PR 머지일) · 6단계부터 안(案) · 오늘 2026-10-09</a:t>
             </a:r>
           </a:p>
         </p:txBody>
@@ -3209,8 +3209,8 @@
         </p:nvSpPr>
         <p:spPr>
           <a:xfrm>
-            <a:off x="8763000" y="426720"/>
-            <a:ext cx="3048000" cy="152400"/>
+            <a:off x="8382000" y="411480"/>
+            <a:ext cx="3429000" cy="167640"/>
           </a:xfrm>
           <a:prstGeom prst="rect">
             <a:avLst/>
@@ -3225,7 +3225,7 @@
           <a:p>
             <a:pPr algn="r"/>
             <a:r>
-              <a:rPr sz="840" b="0">
+              <a:rPr sz="1019" b="0">
                 <a:solidFill>
                   <a:srgbClr val="3F4E61"/>
                 </a:solidFill>
@@ -3233,7 +3233,7 @@
                 <a:ea typeface="Pretendard"/>
                 <a:cs typeface="Pretendard"/>
               </a:rPr>
-              <a:t>KDMS-D06 · v0.1 · 2026-10-06</a:t>
+              <a:t>KDMS-D06 · v0.2 · 2026-10-09</a:t>
             </a:r>
           </a:p>
         </p:txBody>
@@ -3255,7 +3255,7 @@
             </a:avLst>
           </a:prstGeom>
           <a:solidFill>
-            <a:srgbClr val="164B8C"/>
+            <a:srgbClr val="1E6B4F"/>
           </a:solidFill>
           <a:ln>
             <a:noFill/>
@@ -3277,8 +3277,8 @@
         </p:nvSpPr>
         <p:spPr>
           <a:xfrm>
-            <a:off x="381000" y="1965960"/>
-            <a:ext cx="11430000" cy="472440"/>
+            <a:off x="381000" y="1981200"/>
+            <a:ext cx="11430000" cy="518160"/>
           </a:xfrm>
           <a:prstGeom prst="roundRect">
             <a:avLst>
@@ -3286,7 +3286,7 @@
             </a:avLst>
           </a:prstGeom>
           <a:solidFill>
-            <a:srgbClr val="F1F6FC"/>
+            <a:srgbClr val="EEF8F3"/>
           </a:solidFill>
           <a:ln>
             <a:noFill/>
@@ -3308,8 +3308,8 @@
         </p:nvSpPr>
         <p:spPr>
           <a:xfrm>
-            <a:off x="381000" y="2910840"/>
-            <a:ext cx="11430000" cy="472440"/>
+            <a:off x="381000" y="3017520"/>
+            <a:ext cx="11430000" cy="518160"/>
           </a:xfrm>
           <a:prstGeom prst="roundRect">
             <a:avLst>
@@ -3317,7 +3317,7 @@
             </a:avLst>
           </a:prstGeom>
           <a:solidFill>
-            <a:srgbClr val="F1F6FC"/>
+            <a:srgbClr val="EEF8F3"/>
           </a:solidFill>
           <a:ln>
             <a:noFill/>
@@ -3339,8 +3339,8 @@
         </p:nvSpPr>
         <p:spPr>
           <a:xfrm>
-            <a:off x="381000" y="3855720"/>
-            <a:ext cx="11430000" cy="472440"/>
+            <a:off x="381000" y="4053840"/>
+            <a:ext cx="11430000" cy="518160"/>
           </a:xfrm>
           <a:prstGeom prst="roundRect">
             <a:avLst>
@@ -3348,7 +3348,7 @@
             </a:avLst>
           </a:prstGeom>
           <a:solidFill>
-            <a:srgbClr val="F1F6FC"/>
+            <a:srgbClr val="EEF8F3"/>
           </a:solidFill>
           <a:ln>
             <a:noFill/>
@@ -3370,8 +3370,8 @@
         </p:nvSpPr>
         <p:spPr>
           <a:xfrm>
-            <a:off x="381000" y="4800600"/>
-            <a:ext cx="11430000" cy="472440"/>
+            <a:off x="381000" y="5090160"/>
+            <a:ext cx="11430000" cy="518160"/>
           </a:xfrm>
           <a:prstGeom prst="roundRect">
             <a:avLst>
@@ -3379,7 +3379,7 @@
             </a:avLst>
           </a:prstGeom>
           <a:solidFill>
-            <a:srgbClr val="F1F6FC"/>
+            <a:srgbClr val="EEF8F3"/>
           </a:solidFill>
           <a:ln>
             <a:noFill/>
@@ -3402,7 +3402,7 @@
         <p:spPr>
           <a:xfrm>
             <a:off x="3577590" y="1447800"/>
-            <a:ext cx="7620" cy="4297680"/>
+            <a:ext cx="7620" cy="4678680"/>
           </a:xfrm>
           <a:prstGeom prst="roundRect">
             <a:avLst>
@@ -3410,7 +3410,7 @@
             </a:avLst>
           </a:prstGeom>
           <a:solidFill>
-            <a:srgbClr val="D6E3F2"/>
+            <a:srgbClr val="D7EDE2"/>
           </a:solidFill>
           <a:ln>
             <a:noFill/>
@@ -3432,8 +3432,8 @@
         </p:nvSpPr>
         <p:spPr>
           <a:xfrm>
-            <a:off x="4210636" y="1447800"/>
-            <a:ext cx="7620" cy="4297680"/>
+            <a:off x="4949190" y="1447800"/>
+            <a:ext cx="7620" cy="4678680"/>
           </a:xfrm>
           <a:prstGeom prst="roundRect">
             <a:avLst>
@@ -3441,7 +3441,7 @@
             </a:avLst>
           </a:prstGeom>
           <a:solidFill>
-            <a:srgbClr val="D6E3F2"/>
+            <a:srgbClr val="D7EDE2"/>
           </a:solidFill>
           <a:ln>
             <a:noFill/>
@@ -3463,8 +3463,8 @@
         </p:nvSpPr>
         <p:spPr>
           <a:xfrm>
-            <a:off x="4843682" y="1447800"/>
-            <a:ext cx="7620" cy="4297680"/>
+            <a:off x="6320790" y="1447800"/>
+            <a:ext cx="7620" cy="4678680"/>
           </a:xfrm>
           <a:prstGeom prst="roundRect">
             <a:avLst>
@@ -3472,7 +3472,7 @@
             </a:avLst>
           </a:prstGeom>
           <a:solidFill>
-            <a:srgbClr val="D6E3F2"/>
+            <a:srgbClr val="D7EDE2"/>
           </a:solidFill>
           <a:ln>
             <a:noFill/>
@@ -3494,8 +3494,8 @@
         </p:nvSpPr>
         <p:spPr>
           <a:xfrm>
-            <a:off x="5476728" y="1447800"/>
-            <a:ext cx="7620" cy="4297680"/>
+            <a:off x="7692390" y="1447800"/>
+            <a:ext cx="7620" cy="4678680"/>
           </a:xfrm>
           <a:prstGeom prst="roundRect">
             <a:avLst>
@@ -3503,7 +3503,7 @@
             </a:avLst>
           </a:prstGeom>
           <a:solidFill>
-            <a:srgbClr val="D6E3F2"/>
+            <a:srgbClr val="D7EDE2"/>
           </a:solidFill>
           <a:ln>
             <a:noFill/>
@@ -3525,8 +3525,8 @@
         </p:nvSpPr>
         <p:spPr>
           <a:xfrm>
-            <a:off x="6109775" y="1447800"/>
-            <a:ext cx="7620" cy="4297680"/>
+            <a:off x="9063990" y="1447800"/>
+            <a:ext cx="7620" cy="4678680"/>
           </a:xfrm>
           <a:prstGeom prst="roundRect">
             <a:avLst>
@@ -3534,7 +3534,7 @@
             </a:avLst>
           </a:prstGeom>
           <a:solidFill>
-            <a:srgbClr val="D6E3F2"/>
+            <a:srgbClr val="D7EDE2"/>
           </a:solidFill>
           <a:ln>
             <a:noFill/>
@@ -3556,8 +3556,8 @@
         </p:nvSpPr>
         <p:spPr>
           <a:xfrm>
-            <a:off x="6742821" y="1447800"/>
-            <a:ext cx="7620" cy="4297680"/>
+            <a:off x="10435590" y="1447800"/>
+            <a:ext cx="7620" cy="4678680"/>
           </a:xfrm>
           <a:prstGeom prst="roundRect">
             <a:avLst>
@@ -3565,7 +3565,7 @@
             </a:avLst>
           </a:prstGeom>
           <a:solidFill>
-            <a:srgbClr val="D6E3F2"/>
+            <a:srgbClr val="D7EDE2"/>
           </a:solidFill>
           <a:ln>
             <a:noFill/>
@@ -3587,8 +3587,8 @@
         </p:nvSpPr>
         <p:spPr>
           <a:xfrm>
-            <a:off x="7375867" y="1447800"/>
-            <a:ext cx="7620" cy="4297680"/>
+            <a:off x="11807190" y="1447800"/>
+            <a:ext cx="7620" cy="4678680"/>
           </a:xfrm>
           <a:prstGeom prst="roundRect">
             <a:avLst>
@@ -3596,7 +3596,7 @@
             </a:avLst>
           </a:prstGeom>
           <a:solidFill>
-            <a:srgbClr val="D6E3F2"/>
+            <a:srgbClr val="D7EDE2"/>
           </a:solidFill>
           <a:ln>
             <a:noFill/>
@@ -3612,14 +3612,14 @@
       </p:sp>
       <p:sp>
         <p:nvSpPr>
-          <p:cNvPr id="18" name="주 격자"/>
+          <p:cNvPr id="18" name="오늘 선"/>
           <p:cNvSpPr/>
           <p:nvPr/>
         </p:nvSpPr>
         <p:spPr>
           <a:xfrm>
-            <a:off x="8008913" y="1447800"/>
-            <a:ext cx="7620" cy="4297680"/>
+            <a:off x="5827123" y="1447800"/>
+            <a:ext cx="15240" cy="4861560"/>
           </a:xfrm>
           <a:prstGeom prst="roundRect">
             <a:avLst>
@@ -3627,7 +3627,7 @@
             </a:avLst>
           </a:prstGeom>
           <a:solidFill>
-            <a:srgbClr val="D6E3F2"/>
+            <a:srgbClr val="0B3D2E"/>
           </a:solidFill>
           <a:ln>
             <a:noFill/>
@@ -3643,115 +3643,154 @@
       </p:sp>
       <p:sp>
         <p:nvSpPr>
-          <p:cNvPr id="19" name="주 격자"/>
+          <p:cNvPr id="19" name="막대 0. 환경 준비"/>
           <p:cNvSpPr/>
           <p:nvPr/>
         </p:nvSpPr>
         <p:spPr>
           <a:xfrm>
-            <a:off x="8641959" y="1447800"/>
-            <a:ext cx="7620" cy="4297680"/>
+            <a:off x="4169229" y="1584960"/>
+            <a:ext cx="1175657" cy="274320"/>
           </a:xfrm>
           <a:prstGeom prst="roundRect">
             <a:avLst>
-              <a:gd name="adj" fmla="val 0"/>
+              <a:gd name="adj" fmla="val 22222"/>
             </a:avLst>
           </a:prstGeom>
           <a:solidFill>
-            <a:srgbClr val="D6E3F2"/>
+            <a:srgbClr val="1E6B4F"/>
           </a:solidFill>
           <a:ln>
             <a:noFill/>
           </a:ln>
         </p:spPr>
         <p:txBody>
-          <a:bodyPr rtlCol="0" anchor="ctr"/>
+          <a:bodyPr rtlCol="0" anchor="ctr" lIns="0" tIns="0" rIns="0" bIns="0" wrap="none">
+            <a:noAutofit/>
+          </a:bodyPr>
           <a:lstStyle/>
           <a:p>
             <a:pPr algn="ctr"/>
-          </a:p>
-        </p:txBody>
-      </p:sp>
-      <p:sp>
-        <p:nvSpPr>
-          <p:cNvPr id="20" name="주 격자"/>
+            <a:r>
+              <a:rPr sz="1019" b="1">
+                <a:solidFill>
+                  <a:srgbClr val="FFFFFF"/>
+                </a:solidFill>
+                <a:latin typeface="Pretendard"/>
+                <a:ea typeface="Pretendard"/>
+                <a:cs typeface="Pretendard"/>
+              </a:rPr>
+              <a:t>10/1 ~ 10/6</a:t>
+            </a:r>
+          </a:p>
+        </p:txBody>
+      </p:sp>
+      <p:sp>
+        <p:nvSpPr>
+          <p:cNvPr id="20" name="막대 1. 골격"/>
           <p:cNvSpPr/>
           <p:nvPr/>
         </p:nvSpPr>
         <p:spPr>
           <a:xfrm>
-            <a:off x="9275005" y="1447800"/>
-            <a:ext cx="7620" cy="4297680"/>
+            <a:off x="4169229" y="2103120"/>
+            <a:ext cx="1175657" cy="274320"/>
           </a:xfrm>
           <a:prstGeom prst="roundRect">
             <a:avLst>
-              <a:gd name="adj" fmla="val 0"/>
+              <a:gd name="adj" fmla="val 22222"/>
             </a:avLst>
           </a:prstGeom>
           <a:solidFill>
-            <a:srgbClr val="D6E3F2"/>
+            <a:srgbClr val="1E6B4F"/>
           </a:solidFill>
           <a:ln>
             <a:noFill/>
           </a:ln>
         </p:spPr>
         <p:txBody>
-          <a:bodyPr rtlCol="0" anchor="ctr"/>
+          <a:bodyPr rtlCol="0" anchor="ctr" lIns="0" tIns="0" rIns="0" bIns="0" wrap="none">
+            <a:noAutofit/>
+          </a:bodyPr>
           <a:lstStyle/>
           <a:p>
             <a:pPr algn="ctr"/>
-          </a:p>
-        </p:txBody>
-      </p:sp>
-      <p:sp>
-        <p:nvSpPr>
-          <p:cNvPr id="21" name="주 격자"/>
+            <a:r>
+              <a:rPr sz="1019" b="1">
+                <a:solidFill>
+                  <a:srgbClr val="FFFFFF"/>
+                </a:solidFill>
+                <a:latin typeface="Pretendard"/>
+                <a:ea typeface="Pretendard"/>
+                <a:cs typeface="Pretendard"/>
+              </a:rPr>
+              <a:t>10/1 ~ 10/6</a:t>
+            </a:r>
+          </a:p>
+        </p:txBody>
+      </p:sp>
+      <p:sp>
+        <p:nvSpPr>
+          <p:cNvPr id="21" name="막대 2. 스키마 변환"/>
           <p:cNvSpPr/>
           <p:nvPr/>
         </p:nvSpPr>
         <p:spPr>
           <a:xfrm>
-            <a:off x="9908052" y="1447800"/>
-            <a:ext cx="7620" cy="4297680"/>
+            <a:off x="4169229" y="2621280"/>
+            <a:ext cx="1175657" cy="274320"/>
           </a:xfrm>
           <a:prstGeom prst="roundRect">
             <a:avLst>
-              <a:gd name="adj" fmla="val 0"/>
+              <a:gd name="adj" fmla="val 22222"/>
             </a:avLst>
           </a:prstGeom>
           <a:solidFill>
-            <a:srgbClr val="D6E3F2"/>
+            <a:srgbClr val="1E6B4F"/>
           </a:solidFill>
           <a:ln>
             <a:noFill/>
           </a:ln>
         </p:spPr>
         <p:txBody>
-          <a:bodyPr rtlCol="0" anchor="ctr"/>
+          <a:bodyPr rtlCol="0" anchor="ctr" lIns="0" tIns="0" rIns="0" bIns="0" wrap="none">
+            <a:noAutofit/>
+          </a:bodyPr>
           <a:lstStyle/>
           <a:p>
             <a:pPr algn="ctr"/>
-          </a:p>
-        </p:txBody>
-      </p:sp>
-      <p:sp>
-        <p:nvSpPr>
-          <p:cNvPr id="22" name="주 격자"/>
+            <a:r>
+              <a:rPr sz="1019" b="1">
+                <a:solidFill>
+                  <a:srgbClr val="FFFFFF"/>
+                </a:solidFill>
+                <a:latin typeface="Pretendard"/>
+                <a:ea typeface="Pretendard"/>
+                <a:cs typeface="Pretendard"/>
+              </a:rPr>
+              <a:t>10/1 ~ 10/6</a:t>
+            </a:r>
+          </a:p>
+        </p:txBody>
+      </p:sp>
+      <p:sp>
+        <p:nvSpPr>
+          <p:cNvPr id="22" name="막대 3. 전체 적재 + 검증"/>
           <p:cNvSpPr/>
           <p:nvPr/>
         </p:nvSpPr>
         <p:spPr>
           <a:xfrm>
-            <a:off x="10541098" y="1447800"/>
-            <a:ext cx="7620" cy="4297680"/>
+            <a:off x="5344886" y="3139440"/>
+            <a:ext cx="391886" cy="274320"/>
           </a:xfrm>
           <a:prstGeom prst="roundRect">
             <a:avLst>
-              <a:gd name="adj" fmla="val 0"/>
+              <a:gd name="adj" fmla="val 22222"/>
             </a:avLst>
           </a:prstGeom>
           <a:solidFill>
-            <a:srgbClr val="D6E3F2"/>
+            <a:srgbClr val="1E6B4F"/>
           </a:solidFill>
           <a:ln>
             <a:noFill/>
@@ -3767,22 +3806,22 @@
       </p:sp>
       <p:sp>
         <p:nvSpPr>
-          <p:cNvPr id="23" name="주 격자"/>
+          <p:cNvPr id="23" name="막대 4. CDC 수집·반영"/>
           <p:cNvSpPr/>
           <p:nvPr/>
         </p:nvSpPr>
         <p:spPr>
           <a:xfrm>
-            <a:off x="11174144" y="1447800"/>
-            <a:ext cx="7620" cy="4297680"/>
+            <a:off x="5540829" y="3657600"/>
+            <a:ext cx="195943" cy="274320"/>
           </a:xfrm>
           <a:prstGeom prst="roundRect">
             <a:avLst>
-              <a:gd name="adj" fmla="val 0"/>
+              <a:gd name="adj" fmla="val 31111"/>
             </a:avLst>
           </a:prstGeom>
           <a:solidFill>
-            <a:srgbClr val="D6E3F2"/>
+            <a:srgbClr val="1E6B4F"/>
           </a:solidFill>
           <a:ln>
             <a:noFill/>
@@ -3798,22 +3837,22 @@
       </p:sp>
       <p:sp>
         <p:nvSpPr>
-          <p:cNvPr id="24" name="주 격자"/>
+          <p:cNvPr id="24" name="막대 5. 전환 + 화면·CLI"/>
           <p:cNvSpPr/>
           <p:nvPr/>
         </p:nvSpPr>
         <p:spPr>
           <a:xfrm>
-            <a:off x="11807190" y="1447800"/>
-            <a:ext cx="7620" cy="4297680"/>
+            <a:off x="5540829" y="4175760"/>
+            <a:ext cx="195943" cy="274320"/>
           </a:xfrm>
           <a:prstGeom prst="roundRect">
             <a:avLst>
-              <a:gd name="adj" fmla="val 0"/>
+              <a:gd name="adj" fmla="val 31111"/>
             </a:avLst>
           </a:prstGeom>
           <a:solidFill>
-            <a:srgbClr val="D6E3F2"/>
+            <a:srgbClr val="1E6B4F"/>
           </a:solidFill>
           <a:ln>
             <a:noFill/>
@@ -3829,121 +3868,28 @@
       </p:sp>
       <p:sp>
         <p:nvSpPr>
-          <p:cNvPr id="25" name="오늘 선"/>
+          <p:cNvPr id="25" name="막대 6. MVP 리허설"/>
           <p:cNvSpPr/>
           <p:nvPr/>
         </p:nvSpPr>
         <p:spPr>
           <a:xfrm>
-            <a:off x="4342479" y="1447800"/>
-            <a:ext cx="15240" cy="4404360"/>
+            <a:off x="5736771" y="4693920"/>
+            <a:ext cx="1567543" cy="274320"/>
           </a:xfrm>
           <a:prstGeom prst="roundRect">
             <a:avLst>
-              <a:gd name="adj" fmla="val 0"/>
+              <a:gd name="adj" fmla="val 22222"/>
             </a:avLst>
           </a:prstGeom>
           <a:solidFill>
-            <a:srgbClr val="0A2342"/>
+            <a:srgbClr val="2E9E6E"/>
           </a:solidFill>
           <a:ln>
             <a:noFill/>
           </a:ln>
         </p:spPr>
         <p:txBody>
-          <a:bodyPr rtlCol="0" anchor="ctr"/>
-          <a:lstStyle/>
-          <a:p>
-            <a:pPr algn="ctr"/>
-          </a:p>
-        </p:txBody>
-      </p:sp>
-      <p:sp>
-        <p:nvSpPr>
-          <p:cNvPr id="26" name="막대 0. 환경 준비"/>
-          <p:cNvSpPr/>
-          <p:nvPr/>
-        </p:nvSpPr>
-        <p:spPr>
-          <a:xfrm>
-            <a:off x="3852705" y="1607820"/>
-            <a:ext cx="542611" cy="243840"/>
-          </a:xfrm>
-          <a:prstGeom prst="roundRect">
-            <a:avLst>
-              <a:gd name="adj" fmla="val 25000"/>
-            </a:avLst>
-          </a:prstGeom>
-          <a:solidFill>
-            <a:srgbClr val="164B8C"/>
-          </a:solidFill>
-          <a:ln>
-            <a:noFill/>
-          </a:ln>
-        </p:spPr>
-        <p:txBody>
-          <a:bodyPr rtlCol="0" anchor="ctr"/>
-          <a:lstStyle/>
-          <a:p>
-            <a:pPr algn="ctr"/>
-          </a:p>
-        </p:txBody>
-      </p:sp>
-      <p:sp>
-        <p:nvSpPr>
-          <p:cNvPr id="27" name="막대 1. 골격"/>
-          <p:cNvSpPr/>
-          <p:nvPr/>
-        </p:nvSpPr>
-        <p:spPr>
-          <a:xfrm>
-            <a:off x="3852705" y="2080260"/>
-            <a:ext cx="542611" cy="243840"/>
-          </a:xfrm>
-          <a:prstGeom prst="roundRect">
-            <a:avLst>
-              <a:gd name="adj" fmla="val 25000"/>
-            </a:avLst>
-          </a:prstGeom>
-          <a:solidFill>
-            <a:srgbClr val="164B8C"/>
-          </a:solidFill>
-          <a:ln>
-            <a:noFill/>
-          </a:ln>
-        </p:spPr>
-        <p:txBody>
-          <a:bodyPr rtlCol="0" anchor="ctr"/>
-          <a:lstStyle/>
-          <a:p>
-            <a:pPr algn="ctr"/>
-          </a:p>
-        </p:txBody>
-      </p:sp>
-      <p:sp>
-        <p:nvSpPr>
-          <p:cNvPr id="28" name="막대 2. 스키마 변환"/>
-          <p:cNvSpPr/>
-          <p:nvPr/>
-        </p:nvSpPr>
-        <p:spPr>
-          <a:xfrm>
-            <a:off x="3852705" y="2552700"/>
-            <a:ext cx="813916" cy="243840"/>
-          </a:xfrm>
-          <a:prstGeom prst="roundRect">
-            <a:avLst>
-              <a:gd name="adj" fmla="val 25000"/>
-            </a:avLst>
-          </a:prstGeom>
-          <a:solidFill>
-            <a:srgbClr val="1F74C4"/>
-          </a:solidFill>
-          <a:ln>
-            <a:noFill/>
-          </a:ln>
-        </p:spPr>
-        <p:txBody>
           <a:bodyPr rtlCol="0" anchor="ctr" lIns="0" tIns="0" rIns="0" bIns="0" wrap="none">
             <a:noAutofit/>
           </a:bodyPr>
@@ -3951,7 +3897,7 @@
           <a:p>
             <a:pPr algn="ctr"/>
             <a:r>
-              <a:rPr sz="780" b="1">
+              <a:rPr sz="1019" b="1">
                 <a:solidFill>
                   <a:srgbClr val="FFFFFF"/>
                 </a:solidFill>
@@ -3959,279 +3905,108 @@
                 <a:ea typeface="Pretendard"/>
                 <a:cs typeface="Pretendard"/>
               </a:rPr>
-              <a:t>10/1 ~ 10/9</a:t>
-            </a:r>
-          </a:p>
-        </p:txBody>
-      </p:sp>
-      <p:sp>
-        <p:nvSpPr>
-          <p:cNvPr id="29" name="막대 3. 전체 적재 + 검증"/>
+              <a:t>10/9 ~ 10/16</a:t>
+            </a:r>
+          </a:p>
+        </p:txBody>
+      </p:sp>
+      <p:sp>
+        <p:nvSpPr>
+          <p:cNvPr id="26" name="막대 7. 설치본"/>
           <p:cNvSpPr/>
           <p:nvPr/>
         </p:nvSpPr>
         <p:spPr>
           <a:xfrm>
-            <a:off x="4847492" y="3025140"/>
-            <a:ext cx="1085222" cy="243840"/>
+            <a:off x="7696200" y="5212080"/>
+            <a:ext cx="979714" cy="274320"/>
           </a:xfrm>
           <a:prstGeom prst="roundRect">
             <a:avLst>
-              <a:gd name="adj" fmla="val 25000"/>
+              <a:gd name="adj" fmla="val 22222"/>
             </a:avLst>
           </a:prstGeom>
           <a:solidFill>
-            <a:srgbClr val="D3E5F8"/>
+            <a:srgbClr val="D5EFE2"/>
           </a:solidFill>
           <a:ln w="9144">
             <a:solidFill>
-              <a:srgbClr val="164B8C"/>
+              <a:srgbClr val="1E6B4F"/>
             </a:solidFill>
           </a:ln>
         </p:spPr>
         <p:txBody>
-          <a:bodyPr rtlCol="0" anchor="ctr" lIns="0" tIns="0" rIns="0" bIns="0" wrap="none">
-            <a:noAutofit/>
-          </a:bodyPr>
+          <a:bodyPr rtlCol="0" anchor="ctr"/>
           <a:lstStyle/>
           <a:p>
             <a:pPr algn="ctr"/>
-            <a:r>
-              <a:rPr sz="780" b="1">
-                <a:solidFill>
-                  <a:srgbClr val="164B8C"/>
-                </a:solidFill>
-                <a:latin typeface="Pretendard"/>
-                <a:ea typeface="Pretendard"/>
-                <a:cs typeface="Pretendard"/>
-              </a:rPr>
-              <a:t>10/12 ~ 10/23</a:t>
-            </a:r>
-          </a:p>
-        </p:txBody>
-      </p:sp>
-      <p:sp>
-        <p:nvSpPr>
-          <p:cNvPr id="30" name="막대 4. CDC 수집·반영"/>
+          </a:p>
+        </p:txBody>
+      </p:sp>
+      <p:sp>
+        <p:nvSpPr>
+          <p:cNvPr id="27" name="막대 8. 확장"/>
           <p:cNvSpPr/>
           <p:nvPr/>
         </p:nvSpPr>
         <p:spPr>
           <a:xfrm>
-            <a:off x="6113585" y="3497580"/>
-            <a:ext cx="1718268" cy="243840"/>
+            <a:off x="9067800" y="5730240"/>
+            <a:ext cx="979714" cy="274320"/>
           </a:xfrm>
           <a:prstGeom prst="roundRect">
             <a:avLst>
-              <a:gd name="adj" fmla="val 25000"/>
+              <a:gd name="adj" fmla="val 22222"/>
             </a:avLst>
           </a:prstGeom>
           <a:solidFill>
-            <a:srgbClr val="D3E5F8"/>
+            <a:srgbClr val="D5EFE2"/>
           </a:solidFill>
           <a:ln w="9144">
             <a:solidFill>
-              <a:srgbClr val="164B8C"/>
+              <a:srgbClr val="1E6B4F"/>
             </a:solidFill>
           </a:ln>
         </p:spPr>
         <p:txBody>
-          <a:bodyPr rtlCol="0" anchor="ctr" lIns="0" tIns="0" rIns="0" bIns="0" wrap="none">
-            <a:noAutofit/>
-          </a:bodyPr>
+          <a:bodyPr rtlCol="0" anchor="ctr"/>
           <a:lstStyle/>
           <a:p>
             <a:pPr algn="ctr"/>
-            <a:r>
-              <a:rPr sz="780" b="1">
-                <a:solidFill>
-                  <a:srgbClr val="164B8C"/>
-                </a:solidFill>
-                <a:latin typeface="Pretendard"/>
-                <a:ea typeface="Pretendard"/>
-                <a:cs typeface="Pretendard"/>
-              </a:rPr>
-              <a:t>10/26 ~ 11/13</a:t>
-            </a:r>
-          </a:p>
-        </p:txBody>
-      </p:sp>
-      <p:sp>
-        <p:nvSpPr>
-          <p:cNvPr id="31" name="막대 5. 전환 + 화면·CLI"/>
-          <p:cNvSpPr/>
-          <p:nvPr/>
-        </p:nvSpPr>
-        <p:spPr>
-          <a:xfrm>
-            <a:off x="8012723" y="3970020"/>
-            <a:ext cx="1085222" cy="243840"/>
-          </a:xfrm>
-          <a:prstGeom prst="roundRect">
-            <a:avLst>
-              <a:gd name="adj" fmla="val 25000"/>
-            </a:avLst>
-          </a:prstGeom>
-          <a:solidFill>
-            <a:srgbClr val="D3E5F8"/>
-          </a:solidFill>
-          <a:ln w="9144">
+          </a:p>
+        </p:txBody>
+      </p:sp>
+      <p:cxnSp>
+        <p:nvCxnSpPr>
+          <p:cNvPr id="28" name="선"/>
+          <p:cNvCxnSpPr/>
+          <p:nvPr/>
+        </p:nvCxnSpPr>
+        <p:spPr>
+          <a:xfrm>
+            <a:off x="381000" y="6126480"/>
+            <a:ext cx="11430000" cy="0"/>
+          </a:xfrm>
+          <a:prstGeom prst="line">
+            <a:avLst/>
+          </a:prstGeom>
+          <a:ln w="10668">
             <a:solidFill>
-              <a:srgbClr val="164B8C"/>
+              <a:srgbClr val="9DD3B8"/>
             </a:solidFill>
           </a:ln>
         </p:spPr>
-        <p:txBody>
-          <a:bodyPr rtlCol="0" anchor="ctr" lIns="0" tIns="0" rIns="0" bIns="0" wrap="none">
-            <a:noAutofit/>
-          </a:bodyPr>
-          <a:lstStyle/>
-          <a:p>
-            <a:pPr algn="ctr"/>
-            <a:r>
-              <a:rPr sz="780" b="1">
-                <a:solidFill>
-                  <a:srgbClr val="164B8C"/>
-                </a:solidFill>
-                <a:latin typeface="Pretendard"/>
-                <a:ea typeface="Pretendard"/>
-                <a:cs typeface="Pretendard"/>
-              </a:rPr>
-              <a:t>11/16 ~ 11/27</a:t>
-            </a:r>
-          </a:p>
-        </p:txBody>
-      </p:sp>
-      <p:sp>
-        <p:nvSpPr>
-          <p:cNvPr id="32" name="막대 6. MVP 리허설"/>
-          <p:cNvSpPr/>
-          <p:nvPr/>
-        </p:nvSpPr>
-        <p:spPr>
-          <a:xfrm>
-            <a:off x="9278815" y="4442460"/>
-            <a:ext cx="452176" cy="243840"/>
-          </a:xfrm>
-          <a:prstGeom prst="roundRect">
-            <a:avLst>
-              <a:gd name="adj" fmla="val 25000"/>
-            </a:avLst>
-          </a:prstGeom>
-          <a:solidFill>
-            <a:srgbClr val="D3E5F8"/>
-          </a:solidFill>
-          <a:ln w="9144">
-            <a:solidFill>
-              <a:srgbClr val="164B8C"/>
-            </a:solidFill>
-          </a:ln>
-        </p:spPr>
-        <p:txBody>
-          <a:bodyPr rtlCol="0" anchor="ctr"/>
-          <a:lstStyle/>
-          <a:p>
-            <a:pPr algn="ctr"/>
-          </a:p>
-        </p:txBody>
-      </p:sp>
-      <p:sp>
-        <p:nvSpPr>
-          <p:cNvPr id="33" name="막대 7. 설치본"/>
-          <p:cNvSpPr/>
-          <p:nvPr/>
-        </p:nvSpPr>
-        <p:spPr>
-          <a:xfrm>
-            <a:off x="9911862" y="4914900"/>
-            <a:ext cx="452176" cy="243840"/>
-          </a:xfrm>
-          <a:prstGeom prst="roundRect">
-            <a:avLst>
-              <a:gd name="adj" fmla="val 25000"/>
-            </a:avLst>
-          </a:prstGeom>
-          <a:solidFill>
-            <a:srgbClr val="D3E5F8"/>
-          </a:solidFill>
-          <a:ln w="9144">
-            <a:solidFill>
-              <a:srgbClr val="164B8C"/>
-            </a:solidFill>
-          </a:ln>
-        </p:spPr>
-        <p:txBody>
-          <a:bodyPr rtlCol="0" anchor="ctr"/>
-          <a:lstStyle/>
-          <a:p>
-            <a:pPr algn="ctr"/>
-          </a:p>
-        </p:txBody>
-      </p:sp>
-      <p:sp>
-        <p:nvSpPr>
-          <p:cNvPr id="34" name="막대 8. 확장"/>
-          <p:cNvSpPr/>
-          <p:nvPr/>
-        </p:nvSpPr>
-        <p:spPr>
-          <a:xfrm>
-            <a:off x="10544908" y="5387340"/>
-            <a:ext cx="452176" cy="243840"/>
-          </a:xfrm>
-          <a:prstGeom prst="roundRect">
-            <a:avLst>
-              <a:gd name="adj" fmla="val 25000"/>
-            </a:avLst>
-          </a:prstGeom>
-          <a:solidFill>
-            <a:srgbClr val="D3E5F8"/>
-          </a:solidFill>
-          <a:ln w="9144">
-            <a:solidFill>
-              <a:srgbClr val="164B8C"/>
-            </a:solidFill>
-          </a:ln>
-        </p:spPr>
-        <p:txBody>
-          <a:bodyPr rtlCol="0" anchor="ctr"/>
-          <a:lstStyle/>
-          <a:p>
-            <a:pPr algn="ctr"/>
-          </a:p>
-        </p:txBody>
-      </p:sp>
-      <p:cxnSp>
-        <p:nvCxnSpPr>
-          <p:cNvPr id="35" name="선"/>
-          <p:cNvCxnSpPr/>
-          <p:nvPr/>
-        </p:nvCxnSpPr>
-        <p:spPr>
-          <a:xfrm>
-            <a:off x="381000" y="5745480"/>
-            <a:ext cx="11430000" cy="0"/>
-          </a:xfrm>
-          <a:prstGeom prst="line">
-            <a:avLst/>
-          </a:prstGeom>
-          <a:ln w="10668">
-            <a:solidFill>
-              <a:srgbClr val="A9C3E2"/>
-            </a:solidFill>
-          </a:ln>
-        </p:spPr>
       </p:cxnSp>
       <p:sp>
         <p:nvSpPr>
-          <p:cNvPr id="36" name="글"/>
+          <p:cNvPr id="29" name="글"/>
           <p:cNvSpPr txBox="1"/>
           <p:nvPr/>
         </p:nvSpPr>
         <p:spPr>
           <a:xfrm>
-            <a:off x="533400" y="1120140"/>
-            <a:ext cx="441960" cy="190500"/>
+            <a:off x="533400" y="1097280"/>
+            <a:ext cx="487680" cy="213360"/>
           </a:xfrm>
           <a:prstGeom prst="rect">
             <a:avLst/>
@@ -4246,7 +4021,7 @@
           <a:p>
             <a:pPr algn="l"/>
             <a:r>
-              <a:rPr sz="1019" b="1">
+              <a:rPr sz="1200" b="1">
                 <a:solidFill>
                   <a:srgbClr val="FFFFFF"/>
                 </a:solidFill>
@@ -4261,14 +4036,14 @@
       </p:sp>
       <p:sp>
         <p:nvSpPr>
-          <p:cNvPr id="37" name="글"/>
+          <p:cNvPr id="30" name="글"/>
           <p:cNvSpPr txBox="1"/>
           <p:nvPr/>
         </p:nvSpPr>
         <p:spPr>
           <a:xfrm>
-            <a:off x="4989777" y="1021080"/>
-            <a:ext cx="438912" cy="182880"/>
+            <a:off x="3677575" y="1005840"/>
+            <a:ext cx="395478" cy="198120"/>
           </a:xfrm>
           <a:prstGeom prst="rect">
             <a:avLst/>
@@ -4283,7 +4058,44 @@
           <a:p>
             <a:pPr algn="ctr"/>
             <a:r>
-              <a:rPr sz="960" b="1">
+              <a:rPr sz="1080" b="1">
+                <a:solidFill>
+                  <a:srgbClr val="FFFFFF"/>
+                </a:solidFill>
+                <a:latin typeface="Pretendard"/>
+                <a:ea typeface="Pretendard"/>
+                <a:cs typeface="Pretendard"/>
+              </a:rPr>
+              <a:t>9월</a:t>
+            </a:r>
+          </a:p>
+        </p:txBody>
+      </p:sp>
+      <p:sp>
+        <p:nvSpPr>
+          <p:cNvPr id="31" name="글"/>
+          <p:cNvSpPr txBox="1"/>
+          <p:nvPr/>
+        </p:nvSpPr>
+        <p:spPr>
+          <a:xfrm>
+            <a:off x="6970885" y="1005840"/>
+            <a:ext cx="470916" cy="198120"/>
+          </a:xfrm>
+          <a:prstGeom prst="rect">
+            <a:avLst/>
+          </a:prstGeom>
+          <a:noFill/>
+        </p:spPr>
+        <p:txBody>
+          <a:bodyPr wrap="square" lIns="0" tIns="0" rIns="0" bIns="0" anchor="ctr">
+            <a:noAutofit/>
+          </a:bodyPr>
+          <a:lstStyle/>
+          <a:p>
+            <a:pPr algn="ctr"/>
+            <a:r>
+              <a:rPr sz="1080" b="1">
                 <a:solidFill>
                   <a:srgbClr val="FFFFFF"/>
                 </a:solidFill>
@@ -4298,14 +4110,14 @@
       </p:sp>
       <p:sp>
         <p:nvSpPr>
-          <p:cNvPr id="38" name="글"/>
+          <p:cNvPr id="32" name="글"/>
           <p:cNvSpPr txBox="1"/>
           <p:nvPr/>
         </p:nvSpPr>
         <p:spPr>
           <a:xfrm>
-            <a:off x="7748049" y="1021080"/>
-            <a:ext cx="438912" cy="182880"/>
+            <a:off x="10791771" y="1005840"/>
+            <a:ext cx="470916" cy="198120"/>
           </a:xfrm>
           <a:prstGeom prst="rect">
             <a:avLst/>
@@ -4320,7 +4132,7 @@
           <a:p>
             <a:pPr algn="ctr"/>
             <a:r>
-              <a:rPr sz="960" b="1">
+              <a:rPr sz="1080" b="1">
                 <a:solidFill>
                   <a:srgbClr val="FFFFFF"/>
                 </a:solidFill>
@@ -4335,14 +4147,14 @@
       </p:sp>
       <p:sp>
         <p:nvSpPr>
-          <p:cNvPr id="39" name="글"/>
+          <p:cNvPr id="33" name="글"/>
           <p:cNvSpPr txBox="1"/>
           <p:nvPr/>
         </p:nvSpPr>
         <p:spPr>
           <a:xfrm>
-            <a:off x="10325452" y="1021080"/>
-            <a:ext cx="438912" cy="182880"/>
+            <a:off x="4033266" y="1211580"/>
+            <a:ext cx="467868" cy="190500"/>
           </a:xfrm>
           <a:prstGeom prst="rect">
             <a:avLst/>
@@ -4357,46 +4169,9 @@
           <a:p>
             <a:pPr algn="ctr"/>
             <a:r>
-              <a:rPr sz="960" b="1">
+              <a:rPr sz="1019" b="0">
                 <a:solidFill>
                   <a:srgbClr val="FFFFFF"/>
-                </a:solidFill>
-                <a:latin typeface="Pretendard"/>
-                <a:ea typeface="Pretendard"/>
-                <a:cs typeface="Pretendard"/>
-              </a:rPr>
-              <a:t>12월</a:t>
-            </a:r>
-          </a:p>
-        </p:txBody>
-      </p:sp>
-      <p:sp>
-        <p:nvSpPr>
-          <p:cNvPr id="40" name="글"/>
-          <p:cNvSpPr txBox="1"/>
-          <p:nvPr/>
-        </p:nvSpPr>
-        <p:spPr>
-          <a:xfrm>
-            <a:off x="3697517" y="1242060"/>
-            <a:ext cx="400812" cy="160020"/>
-          </a:xfrm>
-          <a:prstGeom prst="rect">
-            <a:avLst/>
-          </a:prstGeom>
-          <a:noFill/>
-        </p:spPr>
-        <p:txBody>
-          <a:bodyPr wrap="square" lIns="0" tIns="0" rIns="0" bIns="0" anchor="ctr">
-            <a:noAutofit/>
-          </a:bodyPr>
-          <a:lstStyle/>
-          <a:p>
-            <a:pPr algn="ctr"/>
-            <a:r>
-              <a:rPr sz="780" b="0">
-                <a:solidFill>
-                  <a:srgbClr val="D3E5F8"/>
                 </a:solidFill>
                 <a:latin typeface="Pretendard"/>
                 <a:ea typeface="Pretendard"/>
@@ -4409,14 +4184,14 @@
       </p:sp>
       <p:sp>
         <p:nvSpPr>
-          <p:cNvPr id="41" name="글"/>
+          <p:cNvPr id="34" name="글"/>
           <p:cNvSpPr txBox="1"/>
           <p:nvPr/>
         </p:nvSpPr>
         <p:spPr>
           <a:xfrm>
-            <a:off x="4330563" y="1242060"/>
-            <a:ext cx="400812" cy="160020"/>
+            <a:off x="5404866" y="1211580"/>
+            <a:ext cx="467868" cy="190500"/>
           </a:xfrm>
           <a:prstGeom prst="rect">
             <a:avLst/>
@@ -4431,9 +4206,9 @@
           <a:p>
             <a:pPr algn="ctr"/>
             <a:r>
-              <a:rPr sz="780" b="0">
-                <a:solidFill>
-                  <a:srgbClr val="D3E5F8"/>
+              <a:rPr sz="1019" b="0">
+                <a:solidFill>
+                  <a:srgbClr val="FFFFFF"/>
                 </a:solidFill>
                 <a:latin typeface="Pretendard"/>
                 <a:ea typeface="Pretendard"/>
@@ -4446,14 +4221,14 @@
       </p:sp>
       <p:sp>
         <p:nvSpPr>
-          <p:cNvPr id="42" name="글"/>
+          <p:cNvPr id="35" name="글"/>
           <p:cNvSpPr txBox="1"/>
           <p:nvPr/>
         </p:nvSpPr>
         <p:spPr>
           <a:xfrm>
-            <a:off x="4936368" y="1242060"/>
-            <a:ext cx="455295" cy="160020"/>
+            <a:off x="6740842" y="1211580"/>
+            <a:ext cx="539115" cy="190500"/>
           </a:xfrm>
           <a:prstGeom prst="rect">
             <a:avLst/>
@@ -4468,9 +4243,9 @@
           <a:p>
             <a:pPr algn="ctr"/>
             <a:r>
-              <a:rPr sz="780" b="0">
-                <a:solidFill>
-                  <a:srgbClr val="D3E5F8"/>
+              <a:rPr sz="1019" b="0">
+                <a:solidFill>
+                  <a:srgbClr val="FFFFFF"/>
                 </a:solidFill>
                 <a:latin typeface="Pretendard"/>
                 <a:ea typeface="Pretendard"/>
@@ -4483,14 +4258,14 @@
       </p:sp>
       <p:sp>
         <p:nvSpPr>
-          <p:cNvPr id="43" name="글"/>
+          <p:cNvPr id="36" name="글"/>
           <p:cNvSpPr txBox="1"/>
           <p:nvPr/>
         </p:nvSpPr>
         <p:spPr>
           <a:xfrm>
-            <a:off x="5569414" y="1242060"/>
-            <a:ext cx="455295" cy="160020"/>
+            <a:off x="8112442" y="1211580"/>
+            <a:ext cx="539115" cy="190500"/>
           </a:xfrm>
           <a:prstGeom prst="rect">
             <a:avLst/>
@@ -4505,9 +4280,9 @@
           <a:p>
             <a:pPr algn="ctr"/>
             <a:r>
-              <a:rPr sz="780" b="0">
-                <a:solidFill>
-                  <a:srgbClr val="D3E5F8"/>
+              <a:rPr sz="1019" b="0">
+                <a:solidFill>
+                  <a:srgbClr val="FFFFFF"/>
                 </a:solidFill>
                 <a:latin typeface="Pretendard"/>
                 <a:ea typeface="Pretendard"/>
@@ -4520,14 +4295,14 @@
       </p:sp>
       <p:sp>
         <p:nvSpPr>
-          <p:cNvPr id="44" name="글"/>
+          <p:cNvPr id="37" name="글"/>
           <p:cNvSpPr txBox="1"/>
           <p:nvPr/>
         </p:nvSpPr>
         <p:spPr>
           <a:xfrm>
-            <a:off x="6202460" y="1242060"/>
-            <a:ext cx="455295" cy="160020"/>
+            <a:off x="9484042" y="1211580"/>
+            <a:ext cx="539115" cy="190500"/>
           </a:xfrm>
           <a:prstGeom prst="rect">
             <a:avLst/>
@@ -4542,9 +4317,9 @@
           <a:p>
             <a:pPr algn="ctr"/>
             <a:r>
-              <a:rPr sz="780" b="0">
-                <a:solidFill>
-                  <a:srgbClr val="D3E5F8"/>
+              <a:rPr sz="1019" b="0">
+                <a:solidFill>
+                  <a:srgbClr val="FFFFFF"/>
                 </a:solidFill>
                 <a:latin typeface="Pretendard"/>
                 <a:ea typeface="Pretendard"/>
@@ -4557,14 +4332,14 @@
       </p:sp>
       <p:sp>
         <p:nvSpPr>
-          <p:cNvPr id="45" name="글"/>
+          <p:cNvPr id="38" name="글"/>
           <p:cNvSpPr txBox="1"/>
           <p:nvPr/>
         </p:nvSpPr>
         <p:spPr>
           <a:xfrm>
-            <a:off x="6862748" y="1242060"/>
-            <a:ext cx="400812" cy="160020"/>
+            <a:off x="10891266" y="1211580"/>
+            <a:ext cx="467868" cy="190500"/>
           </a:xfrm>
           <a:prstGeom prst="rect">
             <a:avLst/>
@@ -4579,9 +4354,9 @@
           <a:p>
             <a:pPr algn="ctr"/>
             <a:r>
-              <a:rPr sz="780" b="0">
-                <a:solidFill>
-                  <a:srgbClr val="D3E5F8"/>
+              <a:rPr sz="1019" b="0">
+                <a:solidFill>
+                  <a:srgbClr val="FFFFFF"/>
                 </a:solidFill>
                 <a:latin typeface="Pretendard"/>
                 <a:ea typeface="Pretendard"/>
@@ -4594,14 +4369,14 @@
       </p:sp>
       <p:sp>
         <p:nvSpPr>
-          <p:cNvPr id="46" name="글"/>
+          <p:cNvPr id="39" name="글"/>
           <p:cNvSpPr txBox="1"/>
           <p:nvPr/>
         </p:nvSpPr>
         <p:spPr>
           <a:xfrm>
-            <a:off x="7495794" y="1242060"/>
-            <a:ext cx="400812" cy="160020"/>
+            <a:off x="5895703" y="6164580"/>
+            <a:ext cx="798195" cy="190500"/>
           </a:xfrm>
           <a:prstGeom prst="rect">
             <a:avLst/>
@@ -4614,31 +4389,31 @@
           </a:bodyPr>
           <a:lstStyle/>
           <a:p>
-            <a:pPr algn="ctr"/>
-            <a:r>
-              <a:rPr sz="780" b="0">
-                <a:solidFill>
-                  <a:srgbClr val="D3E5F8"/>
+            <a:pPr algn="l"/>
+            <a:r>
+              <a:rPr sz="1019" b="1">
+                <a:solidFill>
+                  <a:srgbClr val="0B3D2E"/>
                 </a:solidFill>
                 <a:latin typeface="Pretendard"/>
                 <a:ea typeface="Pretendard"/>
                 <a:cs typeface="Pretendard"/>
               </a:rPr>
-              <a:t>11/9</a:t>
-            </a:r>
-          </a:p>
-        </p:txBody>
-      </p:sp>
-      <p:sp>
-        <p:nvSpPr>
-          <p:cNvPr id="47" name="글"/>
+              <a:t>오늘 10/9</a:t>
+            </a:r>
+          </a:p>
+        </p:txBody>
+      </p:sp>
+      <p:sp>
+        <p:nvSpPr>
+          <p:cNvPr id="40" name="글"/>
           <p:cNvSpPr txBox="1"/>
           <p:nvPr/>
         </p:nvSpPr>
         <p:spPr>
           <a:xfrm>
-            <a:off x="8101599" y="1242060"/>
-            <a:ext cx="455295" cy="160020"/>
+            <a:off x="533400" y="1516380"/>
+            <a:ext cx="1127760" cy="213360"/>
           </a:xfrm>
           <a:prstGeom prst="rect">
             <a:avLst/>
@@ -4651,270 +4426,11 @@
           </a:bodyPr>
           <a:lstStyle/>
           <a:p>
-            <a:pPr algn="ctr"/>
-            <a:r>
-              <a:rPr sz="780" b="0">
-                <a:solidFill>
-                  <a:srgbClr val="D3E5F8"/>
-                </a:solidFill>
-                <a:latin typeface="Pretendard"/>
-                <a:ea typeface="Pretendard"/>
-                <a:cs typeface="Pretendard"/>
-              </a:rPr>
-              <a:t>11/16</a:t>
-            </a:r>
-          </a:p>
-        </p:txBody>
-      </p:sp>
-      <p:sp>
-        <p:nvSpPr>
-          <p:cNvPr id="48" name="글"/>
-          <p:cNvSpPr txBox="1"/>
-          <p:nvPr/>
-        </p:nvSpPr>
-        <p:spPr>
-          <a:xfrm>
-            <a:off x="8734645" y="1242060"/>
-            <a:ext cx="455295" cy="160020"/>
-          </a:xfrm>
-          <a:prstGeom prst="rect">
-            <a:avLst/>
-          </a:prstGeom>
-          <a:noFill/>
-        </p:spPr>
-        <p:txBody>
-          <a:bodyPr wrap="square" lIns="0" tIns="0" rIns="0" bIns="0" anchor="ctr">
-            <a:noAutofit/>
-          </a:bodyPr>
-          <a:lstStyle/>
-          <a:p>
-            <a:pPr algn="ctr"/>
-            <a:r>
-              <a:rPr sz="780" b="0">
-                <a:solidFill>
-                  <a:srgbClr val="D3E5F8"/>
-                </a:solidFill>
-                <a:latin typeface="Pretendard"/>
-                <a:ea typeface="Pretendard"/>
-                <a:cs typeface="Pretendard"/>
-              </a:rPr>
-              <a:t>11/23</a:t>
-            </a:r>
-          </a:p>
-        </p:txBody>
-      </p:sp>
-      <p:sp>
-        <p:nvSpPr>
-          <p:cNvPr id="49" name="글"/>
-          <p:cNvSpPr txBox="1"/>
-          <p:nvPr/>
-        </p:nvSpPr>
-        <p:spPr>
-          <a:xfrm>
-            <a:off x="9367691" y="1242060"/>
-            <a:ext cx="455295" cy="160020"/>
-          </a:xfrm>
-          <a:prstGeom prst="rect">
-            <a:avLst/>
-          </a:prstGeom>
-          <a:noFill/>
-        </p:spPr>
-        <p:txBody>
-          <a:bodyPr wrap="square" lIns="0" tIns="0" rIns="0" bIns="0" anchor="ctr">
-            <a:noAutofit/>
-          </a:bodyPr>
-          <a:lstStyle/>
-          <a:p>
-            <a:pPr algn="ctr"/>
-            <a:r>
-              <a:rPr sz="780" b="0">
-                <a:solidFill>
-                  <a:srgbClr val="D3E5F8"/>
-                </a:solidFill>
-                <a:latin typeface="Pretendard"/>
-                <a:ea typeface="Pretendard"/>
-                <a:cs typeface="Pretendard"/>
-              </a:rPr>
-              <a:t>11/30</a:t>
-            </a:r>
-          </a:p>
-        </p:txBody>
-      </p:sp>
-      <p:sp>
-        <p:nvSpPr>
-          <p:cNvPr id="50" name="글"/>
-          <p:cNvSpPr txBox="1"/>
-          <p:nvPr/>
-        </p:nvSpPr>
-        <p:spPr>
-          <a:xfrm>
-            <a:off x="10027979" y="1242060"/>
-            <a:ext cx="400812" cy="160020"/>
-          </a:xfrm>
-          <a:prstGeom prst="rect">
-            <a:avLst/>
-          </a:prstGeom>
-          <a:noFill/>
-        </p:spPr>
-        <p:txBody>
-          <a:bodyPr wrap="square" lIns="0" tIns="0" rIns="0" bIns="0" anchor="ctr">
-            <a:noAutofit/>
-          </a:bodyPr>
-          <a:lstStyle/>
-          <a:p>
-            <a:pPr algn="ctr"/>
-            <a:r>
-              <a:rPr sz="780" b="0">
-                <a:solidFill>
-                  <a:srgbClr val="D3E5F8"/>
-                </a:solidFill>
-                <a:latin typeface="Pretendard"/>
-                <a:ea typeface="Pretendard"/>
-                <a:cs typeface="Pretendard"/>
-              </a:rPr>
-              <a:t>12/7</a:t>
-            </a:r>
-          </a:p>
-        </p:txBody>
-      </p:sp>
-      <p:sp>
-        <p:nvSpPr>
-          <p:cNvPr id="51" name="글"/>
-          <p:cNvSpPr txBox="1"/>
-          <p:nvPr/>
-        </p:nvSpPr>
-        <p:spPr>
-          <a:xfrm>
-            <a:off x="10633783" y="1242060"/>
-            <a:ext cx="455295" cy="160020"/>
-          </a:xfrm>
-          <a:prstGeom prst="rect">
-            <a:avLst/>
-          </a:prstGeom>
-          <a:noFill/>
-        </p:spPr>
-        <p:txBody>
-          <a:bodyPr wrap="square" lIns="0" tIns="0" rIns="0" bIns="0" anchor="ctr">
-            <a:noAutofit/>
-          </a:bodyPr>
-          <a:lstStyle/>
-          <a:p>
-            <a:pPr algn="ctr"/>
-            <a:r>
-              <a:rPr sz="780" b="0">
-                <a:solidFill>
-                  <a:srgbClr val="D3E5F8"/>
-                </a:solidFill>
-                <a:latin typeface="Pretendard"/>
-                <a:ea typeface="Pretendard"/>
-                <a:cs typeface="Pretendard"/>
-              </a:rPr>
-              <a:t>12/14</a:t>
-            </a:r>
-          </a:p>
-        </p:txBody>
-      </p:sp>
-      <p:sp>
-        <p:nvSpPr>
-          <p:cNvPr id="52" name="글"/>
-          <p:cNvSpPr txBox="1"/>
-          <p:nvPr/>
-        </p:nvSpPr>
-        <p:spPr>
-          <a:xfrm>
-            <a:off x="11266829" y="1242060"/>
-            <a:ext cx="455295" cy="160020"/>
-          </a:xfrm>
-          <a:prstGeom prst="rect">
-            <a:avLst/>
-          </a:prstGeom>
-          <a:noFill/>
-        </p:spPr>
-        <p:txBody>
-          <a:bodyPr wrap="square" lIns="0" tIns="0" rIns="0" bIns="0" anchor="ctr">
-            <a:noAutofit/>
-          </a:bodyPr>
-          <a:lstStyle/>
-          <a:p>
-            <a:pPr algn="ctr"/>
-            <a:r>
-              <a:rPr sz="780" b="0">
-                <a:solidFill>
-                  <a:srgbClr val="D3E5F8"/>
-                </a:solidFill>
-                <a:latin typeface="Pretendard"/>
-                <a:ea typeface="Pretendard"/>
-                <a:cs typeface="Pretendard"/>
-              </a:rPr>
-              <a:t>12/21</a:t>
-            </a:r>
-          </a:p>
-        </p:txBody>
-      </p:sp>
-      <p:sp>
-        <p:nvSpPr>
-          <p:cNvPr id="53" name="글"/>
-          <p:cNvSpPr txBox="1"/>
-          <p:nvPr/>
-        </p:nvSpPr>
-        <p:spPr>
-          <a:xfrm>
-            <a:off x="4005294" y="5882640"/>
-            <a:ext cx="689610" cy="167640"/>
-          </a:xfrm>
-          <a:prstGeom prst="rect">
-            <a:avLst/>
-          </a:prstGeom>
-          <a:noFill/>
-        </p:spPr>
-        <p:txBody>
-          <a:bodyPr wrap="square" lIns="0" tIns="0" rIns="0" bIns="0" anchor="ctr">
-            <a:noAutofit/>
-          </a:bodyPr>
-          <a:lstStyle/>
-          <a:p>
-            <a:pPr algn="ctr"/>
-            <a:r>
-              <a:rPr sz="840" b="1">
-                <a:solidFill>
-                  <a:srgbClr val="0A2342"/>
-                </a:solidFill>
-                <a:latin typeface="Pretendard"/>
-                <a:ea typeface="Pretendard"/>
-                <a:cs typeface="Pretendard"/>
-              </a:rPr>
-              <a:t>오늘 10/6</a:t>
-            </a:r>
-          </a:p>
-        </p:txBody>
-      </p:sp>
-      <p:sp>
-        <p:nvSpPr>
-          <p:cNvPr id="54" name="글"/>
-          <p:cNvSpPr txBox="1"/>
-          <p:nvPr/>
-        </p:nvSpPr>
-        <p:spPr>
-          <a:xfrm>
-            <a:off x="533400" y="1562100"/>
-            <a:ext cx="986028" cy="190500"/>
-          </a:xfrm>
-          <a:prstGeom prst="rect">
-            <a:avLst/>
-          </a:prstGeom>
-          <a:noFill/>
-        </p:spPr>
-        <p:txBody>
-          <a:bodyPr wrap="square" lIns="0" tIns="0" rIns="0" bIns="0" anchor="ctr">
-            <a:noAutofit/>
-          </a:bodyPr>
-          <a:lstStyle/>
-          <a:p>
             <a:pPr algn="l"/>
             <a:r>
-              <a:rPr sz="1019" b="1">
-                <a:solidFill>
-                  <a:srgbClr val="0A2342"/>
+              <a:rPr sz="1200" b="1">
+                <a:solidFill>
+                  <a:srgbClr val="0B3D2E"/>
                 </a:solidFill>
                 <a:latin typeface="Pretendard"/>
                 <a:ea typeface="Pretendard"/>
@@ -4927,14 +4443,14 @@
       </p:sp>
       <p:sp>
         <p:nvSpPr>
-          <p:cNvPr id="55" name="글"/>
+          <p:cNvPr id="41" name="글"/>
           <p:cNvSpPr txBox="1"/>
           <p:nvPr/>
         </p:nvSpPr>
         <p:spPr>
           <a:xfrm>
-            <a:off x="533400" y="1748790"/>
-            <a:ext cx="1900809" cy="163830"/>
+            <a:off x="533400" y="1729740"/>
+            <a:ext cx="2346198" cy="190500"/>
           </a:xfrm>
           <a:prstGeom prst="rect">
             <a:avLst/>
@@ -4949,7 +4465,7 @@
           <a:p>
             <a:pPr algn="l"/>
             <a:r>
-              <a:rPr sz="810" b="0">
+              <a:rPr sz="1019" b="0">
                 <a:solidFill>
                   <a:srgbClr val="3F4E61"/>
                 </a:solidFill>
@@ -4964,14 +4480,14 @@
       </p:sp>
       <p:sp>
         <p:nvSpPr>
-          <p:cNvPr id="56" name="글"/>
+          <p:cNvPr id="42" name="글"/>
           <p:cNvSpPr txBox="1"/>
           <p:nvPr/>
         </p:nvSpPr>
         <p:spPr>
           <a:xfrm>
-            <a:off x="4471516" y="1653540"/>
-            <a:ext cx="782193" cy="160020"/>
+            <a:off x="533400" y="2034540"/>
+            <a:ext cx="739140" cy="213360"/>
           </a:xfrm>
           <a:prstGeom prst="rect">
             <a:avLst/>
@@ -4986,46 +4502,9 @@
           <a:p>
             <a:pPr algn="l"/>
             <a:r>
-              <a:rPr sz="780" b="1">
-                <a:solidFill>
-                  <a:srgbClr val="0A2342"/>
-                </a:solidFill>
-                <a:latin typeface="Pretendard"/>
-                <a:ea typeface="Pretendard"/>
-                <a:cs typeface="Pretendard"/>
-              </a:rPr>
-              <a:t>10/1 ~ 10/6</a:t>
-            </a:r>
-          </a:p>
-        </p:txBody>
-      </p:sp>
-      <p:sp>
-        <p:nvSpPr>
-          <p:cNvPr id="57" name="글"/>
-          <p:cNvSpPr txBox="1"/>
-          <p:nvPr/>
-        </p:nvSpPr>
-        <p:spPr>
-          <a:xfrm>
-            <a:off x="533400" y="2034540"/>
-            <a:ext cx="655701" cy="190500"/>
-          </a:xfrm>
-          <a:prstGeom prst="rect">
-            <a:avLst/>
-          </a:prstGeom>
-          <a:noFill/>
-        </p:spPr>
-        <p:txBody>
-          <a:bodyPr wrap="square" lIns="0" tIns="0" rIns="0" bIns="0" anchor="ctr">
-            <a:noAutofit/>
-          </a:bodyPr>
-          <a:lstStyle/>
-          <a:p>
-            <a:pPr algn="l"/>
-            <a:r>
-              <a:rPr sz="1019" b="1">
-                <a:solidFill>
-                  <a:srgbClr val="0A2342"/>
+              <a:rPr sz="1200" b="1">
+                <a:solidFill>
+                  <a:srgbClr val="0B3D2E"/>
                 </a:solidFill>
                 <a:latin typeface="Pretendard"/>
                 <a:ea typeface="Pretendard"/>
@@ -5038,14 +4517,14 @@
       </p:sp>
       <p:sp>
         <p:nvSpPr>
-          <p:cNvPr id="58" name="글"/>
+          <p:cNvPr id="43" name="글"/>
           <p:cNvSpPr txBox="1"/>
           <p:nvPr/>
         </p:nvSpPr>
         <p:spPr>
           <a:xfrm>
-            <a:off x="533400" y="2221230"/>
-            <a:ext cx="1818513" cy="163830"/>
+            <a:off x="533400" y="2247900"/>
+            <a:ext cx="2242566" cy="190500"/>
           </a:xfrm>
           <a:prstGeom prst="rect">
             <a:avLst/>
@@ -5060,7 +4539,7 @@
           <a:p>
             <a:pPr algn="l"/>
             <a:r>
-              <a:rPr sz="810" b="0">
+              <a:rPr sz="1019" b="0">
                 <a:solidFill>
                   <a:srgbClr val="3F4E61"/>
                 </a:solidFill>
@@ -5075,14 +4554,14 @@
       </p:sp>
       <p:sp>
         <p:nvSpPr>
-          <p:cNvPr id="59" name="글"/>
+          <p:cNvPr id="44" name="글"/>
           <p:cNvSpPr txBox="1"/>
           <p:nvPr/>
         </p:nvSpPr>
         <p:spPr>
           <a:xfrm>
-            <a:off x="4471516" y="2125980"/>
-            <a:ext cx="782193" cy="160020"/>
+            <a:off x="5926183" y="2141220"/>
+            <a:ext cx="1251585" cy="190500"/>
           </a:xfrm>
           <a:prstGeom prst="rect">
             <a:avLst/>
@@ -5097,46 +4576,9 @@
           <a:p>
             <a:pPr algn="l"/>
             <a:r>
-              <a:rPr sz="780" b="1">
-                <a:solidFill>
-                  <a:srgbClr val="0A2342"/>
-                </a:solidFill>
-                <a:latin typeface="Pretendard"/>
-                <a:ea typeface="Pretendard"/>
-                <a:cs typeface="Pretendard"/>
-              </a:rPr>
-              <a:t>10/1 ~ 10/6</a:t>
-            </a:r>
-          </a:p>
-        </p:txBody>
-      </p:sp>
-      <p:sp>
-        <p:nvSpPr>
-          <p:cNvPr id="60" name="글"/>
-          <p:cNvSpPr txBox="1"/>
-          <p:nvPr/>
-        </p:nvSpPr>
-        <p:spPr>
-          <a:xfrm>
-            <a:off x="5177509" y="2122170"/>
-            <a:ext cx="1031558" cy="163830"/>
-          </a:xfrm>
-          <a:prstGeom prst="rect">
-            <a:avLst/>
-          </a:prstGeom>
-          <a:noFill/>
-        </p:spPr>
-        <p:txBody>
-          <a:bodyPr wrap="square" lIns="0" tIns="0" rIns="0" bIns="0" anchor="ctr">
-            <a:noAutofit/>
-          </a:bodyPr>
-          <a:lstStyle/>
-          <a:p>
-            <a:pPr algn="l"/>
-            <a:r>
-              <a:rPr sz="810" b="1">
-                <a:solidFill>
-                  <a:srgbClr val="164B8C"/>
+              <a:rPr sz="1019" b="1">
+                <a:solidFill>
+                  <a:srgbClr val="1E6B4F"/>
                 </a:solidFill>
                 <a:latin typeface="Pretendard"/>
                 <a:ea typeface="Pretendard"/>
@@ -5149,14 +4591,14 @@
       </p:sp>
       <p:sp>
         <p:nvSpPr>
-          <p:cNvPr id="61" name="글"/>
+          <p:cNvPr id="45" name="글"/>
           <p:cNvSpPr txBox="1"/>
           <p:nvPr/>
         </p:nvSpPr>
         <p:spPr>
           <a:xfrm>
-            <a:off x="533400" y="2506980"/>
-            <a:ext cx="1115568" cy="190500"/>
+            <a:off x="533400" y="2552700"/>
+            <a:ext cx="1280160" cy="213360"/>
           </a:xfrm>
           <a:prstGeom prst="rect">
             <a:avLst/>
@@ -5171,9 +4613,9 @@
           <a:p>
             <a:pPr algn="l"/>
             <a:r>
-              <a:rPr sz="1019" b="1">
-                <a:solidFill>
-                  <a:srgbClr val="0A2342"/>
+              <a:rPr sz="1200" b="1">
+                <a:solidFill>
+                  <a:srgbClr val="0B3D2E"/>
                 </a:solidFill>
                 <a:latin typeface="Pretendard"/>
                 <a:ea typeface="Pretendard"/>
@@ -5186,14 +4628,14 @@
       </p:sp>
       <p:sp>
         <p:nvSpPr>
-          <p:cNvPr id="62" name="글"/>
+          <p:cNvPr id="46" name="글"/>
           <p:cNvSpPr txBox="1"/>
           <p:nvPr/>
         </p:nvSpPr>
         <p:spPr>
           <a:xfrm>
-            <a:off x="533400" y="2693670"/>
-            <a:ext cx="1895666" cy="163830"/>
+            <a:off x="533400" y="2766060"/>
+            <a:ext cx="1782699" cy="190500"/>
           </a:xfrm>
           <a:prstGeom prst="rect">
             <a:avLst/>
@@ -5208,7 +4650,7 @@
           <a:p>
             <a:pPr algn="l"/>
             <a:r>
-              <a:rPr sz="810" b="0">
+              <a:rPr sz="1019" b="0">
                 <a:solidFill>
                   <a:srgbClr val="3F4E61"/>
                 </a:solidFill>
@@ -5216,21 +4658,21 @@
                 <a:ea typeface="Pretendard"/>
                 <a:cs typeface="Pretendard"/>
               </a:rPr>
-              <a:t>kdms plan · DDL (Mac 확인 대기)</a:t>
-            </a:r>
-          </a:p>
-        </p:txBody>
-      </p:sp>
-      <p:sp>
-        <p:nvSpPr>
-          <p:cNvPr id="63" name="글"/>
+              <a:t>kdms plan · 세 단계 DDL</a:t>
+            </a:r>
+          </a:p>
+        </p:txBody>
+      </p:sp>
+      <p:sp>
+        <p:nvSpPr>
+          <p:cNvPr id="47" name="글"/>
           <p:cNvSpPr txBox="1"/>
           <p:nvPr/>
         </p:nvSpPr>
         <p:spPr>
           <a:xfrm>
-            <a:off x="4742822" y="2594610"/>
-            <a:ext cx="352616" cy="163830"/>
+            <a:off x="5421086" y="2659380"/>
+            <a:ext cx="396621" cy="190500"/>
           </a:xfrm>
           <a:prstGeom prst="rect">
             <a:avLst/>
@@ -5245,9 +4687,9 @@
           <a:p>
             <a:pPr algn="l"/>
             <a:r>
-              <a:rPr sz="810" b="1">
-                <a:solidFill>
-                  <a:srgbClr val="164B8C"/>
+              <a:rPr sz="1019" b="1">
+                <a:solidFill>
+                  <a:srgbClr val="1E6B4F"/>
                 </a:solidFill>
                 <a:latin typeface="Pretendard"/>
                 <a:ea typeface="Pretendard"/>
@@ -5260,14 +4702,14 @@
       </p:sp>
       <p:sp>
         <p:nvSpPr>
-          <p:cNvPr id="64" name="글"/>
+          <p:cNvPr id="48" name="글"/>
           <p:cNvSpPr txBox="1"/>
           <p:nvPr/>
         </p:nvSpPr>
         <p:spPr>
           <a:xfrm>
-            <a:off x="533400" y="2979420"/>
-            <a:ext cx="1458849" cy="190500"/>
+            <a:off x="533400" y="3070860"/>
+            <a:ext cx="1684020" cy="213360"/>
           </a:xfrm>
           <a:prstGeom prst="rect">
             <a:avLst/>
@@ -5282,9 +4724,9 @@
           <a:p>
             <a:pPr algn="l"/>
             <a:r>
-              <a:rPr sz="1019" b="1">
-                <a:solidFill>
-                  <a:srgbClr val="0A2342"/>
+              <a:rPr sz="1200" b="1">
+                <a:solidFill>
+                  <a:srgbClr val="0B3D2E"/>
                 </a:solidFill>
                 <a:latin typeface="Pretendard"/>
                 <a:ea typeface="Pretendard"/>
@@ -5297,14 +4739,14 @@
       </p:sp>
       <p:sp>
         <p:nvSpPr>
-          <p:cNvPr id="65" name="글"/>
+          <p:cNvPr id="49" name="글"/>
           <p:cNvSpPr txBox="1"/>
           <p:nvPr/>
         </p:nvSpPr>
         <p:spPr>
           <a:xfrm>
-            <a:off x="533400" y="3166110"/>
-            <a:ext cx="1787652" cy="163830"/>
+            <a:off x="533400" y="3284220"/>
+            <a:ext cx="2203704" cy="190500"/>
           </a:xfrm>
           <a:prstGeom prst="rect">
             <a:avLst/>
@@ -5319,7 +4761,7 @@
           <a:p>
             <a:pPr algn="l"/>
             <a:r>
-              <a:rPr sz="810" b="0">
+              <a:rPr sz="1019" b="0">
                 <a:solidFill>
                   <a:srgbClr val="3F4E61"/>
                 </a:solidFill>
@@ -5334,14 +4776,14 @@
       </p:sp>
       <p:sp>
         <p:nvSpPr>
-          <p:cNvPr id="66" name="글"/>
+          <p:cNvPr id="50" name="글"/>
           <p:cNvSpPr txBox="1"/>
           <p:nvPr/>
         </p:nvSpPr>
         <p:spPr>
           <a:xfrm>
-            <a:off x="6008914" y="3067050"/>
-            <a:ext cx="578930" cy="163830"/>
+            <a:off x="5926183" y="3177540"/>
+            <a:ext cx="966597" cy="190500"/>
           </a:xfrm>
           <a:prstGeom prst="rect">
             <a:avLst/>
@@ -5356,9 +4798,46 @@
           <a:p>
             <a:pPr algn="l"/>
             <a:r>
-              <a:rPr sz="810" b="1">
-                <a:solidFill>
-                  <a:srgbClr val="164B8C"/>
+              <a:rPr sz="1019" b="1">
+                <a:solidFill>
+                  <a:srgbClr val="0B3D2E"/>
+                </a:solidFill>
+                <a:latin typeface="Pretendard"/>
+                <a:ea typeface="Pretendard"/>
+                <a:cs typeface="Pretendard"/>
+              </a:rPr>
+              <a:t>10/7 ~ 10/8</a:t>
+            </a:r>
+          </a:p>
+        </p:txBody>
+      </p:sp>
+      <p:sp>
+        <p:nvSpPr>
+          <p:cNvPr id="51" name="글"/>
+          <p:cNvSpPr txBox="1"/>
+          <p:nvPr/>
+        </p:nvSpPr>
+        <p:spPr>
+          <a:xfrm>
+            <a:off x="6816580" y="3177540"/>
+            <a:ext cx="681609" cy="190500"/>
+          </a:xfrm>
+          <a:prstGeom prst="rect">
+            <a:avLst/>
+          </a:prstGeom>
+          <a:noFill/>
+        </p:spPr>
+        <p:txBody>
+          <a:bodyPr wrap="square" lIns="0" tIns="0" rIns="0" bIns="0" anchor="ctr">
+            <a:noAutofit/>
+          </a:bodyPr>
+          <a:lstStyle/>
+          <a:p>
+            <a:pPr algn="l"/>
+            <a:r>
+              <a:rPr sz="1019" b="1">
+                <a:solidFill>
+                  <a:srgbClr val="1E6B4F"/>
                 </a:solidFill>
                 <a:latin typeface="Pretendard"/>
                 <a:ea typeface="Pretendard"/>
@@ -5371,14 +4850,14 @@
       </p:sp>
       <p:sp>
         <p:nvSpPr>
-          <p:cNvPr id="67" name="글"/>
+          <p:cNvPr id="52" name="글"/>
           <p:cNvSpPr txBox="1"/>
           <p:nvPr/>
         </p:nvSpPr>
         <p:spPr>
           <a:xfrm>
-            <a:off x="533400" y="3451860"/>
-            <a:ext cx="1271016" cy="190500"/>
+            <a:off x="533400" y="3589020"/>
+            <a:ext cx="1463040" cy="213360"/>
           </a:xfrm>
           <a:prstGeom prst="rect">
             <a:avLst/>
@@ -5393,9 +4872,9 @@
           <a:p>
             <a:pPr algn="l"/>
             <a:r>
-              <a:rPr sz="1019" b="1">
-                <a:solidFill>
-                  <a:srgbClr val="0A2342"/>
+              <a:rPr sz="1200" b="1">
+                <a:solidFill>
+                  <a:srgbClr val="0B3D2E"/>
                 </a:solidFill>
                 <a:latin typeface="Pretendard"/>
                 <a:ea typeface="Pretendard"/>
@@ -5408,14 +4887,14 @@
       </p:sp>
       <p:sp>
         <p:nvSpPr>
-          <p:cNvPr id="68" name="글"/>
+          <p:cNvPr id="53" name="글"/>
           <p:cNvSpPr txBox="1"/>
           <p:nvPr/>
         </p:nvSpPr>
         <p:spPr>
           <a:xfrm>
-            <a:off x="533400" y="3638550"/>
-            <a:ext cx="1849374" cy="163830"/>
+            <a:off x="533400" y="3802380"/>
+            <a:ext cx="2281428" cy="190500"/>
           </a:xfrm>
           <a:prstGeom prst="rect">
             <a:avLst/>
@@ -5430,7 +4909,7 @@
           <a:p>
             <a:pPr algn="l"/>
             <a:r>
-              <a:rPr sz="810" b="0">
+              <a:rPr sz="1019" b="0">
                 <a:solidFill>
                   <a:srgbClr val="3F4E61"/>
                 </a:solidFill>
@@ -5445,14 +4924,14 @@
       </p:sp>
       <p:sp>
         <p:nvSpPr>
-          <p:cNvPr id="69" name="글"/>
+          <p:cNvPr id="54" name="글"/>
           <p:cNvSpPr txBox="1"/>
           <p:nvPr/>
         </p:nvSpPr>
         <p:spPr>
           <a:xfrm>
-            <a:off x="7908053" y="3539490"/>
-            <a:ext cx="352616" cy="163830"/>
+            <a:off x="5926183" y="3695700"/>
+            <a:ext cx="467868" cy="190500"/>
           </a:xfrm>
           <a:prstGeom prst="rect">
             <a:avLst/>
@@ -5467,9 +4946,46 @@
           <a:p>
             <a:pPr algn="l"/>
             <a:r>
-              <a:rPr sz="810" b="1">
-                <a:solidFill>
-                  <a:srgbClr val="164B8C"/>
+              <a:rPr sz="1019" b="1">
+                <a:solidFill>
+                  <a:srgbClr val="0B3D2E"/>
+                </a:solidFill>
+                <a:latin typeface="Pretendard"/>
+                <a:ea typeface="Pretendard"/>
+                <a:cs typeface="Pretendard"/>
+              </a:rPr>
+              <a:t>10/8</a:t>
+            </a:r>
+          </a:p>
+        </p:txBody>
+      </p:sp>
+      <p:sp>
+        <p:nvSpPr>
+          <p:cNvPr id="55" name="글"/>
+          <p:cNvSpPr txBox="1"/>
+          <p:nvPr/>
+        </p:nvSpPr>
+        <p:spPr>
+          <a:xfrm>
+            <a:off x="6317851" y="3695700"/>
+            <a:ext cx="396621" cy="190500"/>
+          </a:xfrm>
+          <a:prstGeom prst="rect">
+            <a:avLst/>
+          </a:prstGeom>
+          <a:noFill/>
+        </p:spPr>
+        <p:txBody>
+          <a:bodyPr wrap="square" lIns="0" tIns="0" rIns="0" bIns="0" anchor="ctr">
+            <a:noAutofit/>
+          </a:bodyPr>
+          <a:lstStyle/>
+          <a:p>
+            <a:pPr algn="l"/>
+            <a:r>
+              <a:rPr sz="1019" b="1">
+                <a:solidFill>
+                  <a:srgbClr val="1E6B4F"/>
                 </a:solidFill>
                 <a:latin typeface="Pretendard"/>
                 <a:ea typeface="Pretendard"/>
@@ -5482,14 +4998,14 @@
       </p:sp>
       <p:sp>
         <p:nvSpPr>
-          <p:cNvPr id="70" name="글"/>
+          <p:cNvPr id="56" name="글"/>
           <p:cNvSpPr txBox="1"/>
           <p:nvPr/>
         </p:nvSpPr>
         <p:spPr>
           <a:xfrm>
-            <a:off x="533400" y="3924300"/>
-            <a:ext cx="1413510" cy="190500"/>
+            <a:off x="533400" y="4107180"/>
+            <a:ext cx="1630680" cy="213360"/>
           </a:xfrm>
           <a:prstGeom prst="rect">
             <a:avLst/>
@@ -5504,9 +5020,9 @@
           <a:p>
             <a:pPr algn="l"/>
             <a:r>
-              <a:rPr sz="1019" b="1">
-                <a:solidFill>
-                  <a:srgbClr val="0A2342"/>
+              <a:rPr sz="1200" b="1">
+                <a:solidFill>
+                  <a:srgbClr val="0B3D2E"/>
                 </a:solidFill>
                 <a:latin typeface="Pretendard"/>
                 <a:ea typeface="Pretendard"/>
@@ -5519,14 +5035,14 @@
       </p:sp>
       <p:sp>
         <p:nvSpPr>
-          <p:cNvPr id="71" name="글"/>
+          <p:cNvPr id="57" name="글"/>
           <p:cNvSpPr txBox="1"/>
           <p:nvPr/>
         </p:nvSpPr>
         <p:spPr>
           <a:xfrm>
-            <a:off x="533400" y="4110990"/>
-            <a:ext cx="1900809" cy="163830"/>
+            <a:off x="533400" y="4320540"/>
+            <a:ext cx="1886331" cy="190500"/>
           </a:xfrm>
           <a:prstGeom prst="rect">
             <a:avLst/>
@@ -5541,7 +5057,7 @@
           <a:p>
             <a:pPr algn="l"/>
             <a:r>
-              <a:rPr sz="810" b="0">
+              <a:rPr sz="1019" b="0">
                 <a:solidFill>
                   <a:srgbClr val="3F4E61"/>
                 </a:solidFill>
@@ -5549,21 +5065,21 @@
                 <a:ea typeface="Pretendard"/>
                 <a:cs typeface="Pretendard"/>
               </a:rPr>
-              <a:t>상태 기계 · setval · 화면 마무리</a:t>
-            </a:r>
-          </a:p>
-        </p:txBody>
-      </p:sp>
-      <p:sp>
-        <p:nvSpPr>
-          <p:cNvPr id="72" name="글"/>
+              <a:t>상태 기계 · setval · 화면</a:t>
+            </a:r>
+          </a:p>
+        </p:txBody>
+      </p:sp>
+      <p:sp>
+        <p:nvSpPr>
+          <p:cNvPr id="58" name="글"/>
           <p:cNvSpPr txBox="1"/>
           <p:nvPr/>
         </p:nvSpPr>
         <p:spPr>
           <a:xfrm>
-            <a:off x="9174145" y="4011930"/>
-            <a:ext cx="352616" cy="163830"/>
+            <a:off x="5926183" y="4213860"/>
+            <a:ext cx="467868" cy="190500"/>
           </a:xfrm>
           <a:prstGeom prst="rect">
             <a:avLst/>
@@ -5578,9 +5094,46 @@
           <a:p>
             <a:pPr algn="l"/>
             <a:r>
-              <a:rPr sz="810" b="1">
-                <a:solidFill>
-                  <a:srgbClr val="164B8C"/>
+              <a:rPr sz="1019" b="1">
+                <a:solidFill>
+                  <a:srgbClr val="0B3D2E"/>
+                </a:solidFill>
+                <a:latin typeface="Pretendard"/>
+                <a:ea typeface="Pretendard"/>
+                <a:cs typeface="Pretendard"/>
+              </a:rPr>
+              <a:t>10/8</a:t>
+            </a:r>
+          </a:p>
+        </p:txBody>
+      </p:sp>
+      <p:sp>
+        <p:nvSpPr>
+          <p:cNvPr id="59" name="글"/>
+          <p:cNvSpPr txBox="1"/>
+          <p:nvPr/>
+        </p:nvSpPr>
+        <p:spPr>
+          <a:xfrm>
+            <a:off x="6317851" y="4213860"/>
+            <a:ext cx="396621" cy="190500"/>
+          </a:xfrm>
+          <a:prstGeom prst="rect">
+            <a:avLst/>
+          </a:prstGeom>
+          <a:noFill/>
+        </p:spPr>
+        <p:txBody>
+          <a:bodyPr wrap="square" lIns="0" tIns="0" rIns="0" bIns="0" anchor="ctr">
+            <a:noAutofit/>
+          </a:bodyPr>
+          <a:lstStyle/>
+          <a:p>
+            <a:pPr algn="l"/>
+            <a:r>
+              <a:rPr sz="1019" b="1">
+                <a:solidFill>
+                  <a:srgbClr val="1E6B4F"/>
                 </a:solidFill>
                 <a:latin typeface="Pretendard"/>
                 <a:ea typeface="Pretendard"/>
@@ -5593,14 +5146,14 @@
       </p:sp>
       <p:sp>
         <p:nvSpPr>
-          <p:cNvPr id="73" name="글"/>
+          <p:cNvPr id="60" name="글"/>
           <p:cNvSpPr txBox="1"/>
           <p:nvPr/>
         </p:nvSpPr>
         <p:spPr>
           <a:xfrm>
-            <a:off x="533400" y="4396740"/>
-            <a:ext cx="1070229" cy="190500"/>
+            <a:off x="533400" y="4625340"/>
+            <a:ext cx="1226820" cy="213360"/>
           </a:xfrm>
           <a:prstGeom prst="rect">
             <a:avLst/>
@@ -5615,9 +5168,9 @@
           <a:p>
             <a:pPr algn="l"/>
             <a:r>
-              <a:rPr sz="1019" b="1">
-                <a:solidFill>
-                  <a:srgbClr val="0A2342"/>
+              <a:rPr sz="1200" b="1">
+                <a:solidFill>
+                  <a:srgbClr val="0B3D2E"/>
                 </a:solidFill>
                 <a:latin typeface="Pretendard"/>
                 <a:ea typeface="Pretendard"/>
@@ -5630,14 +5183,14 @@
       </p:sp>
       <p:sp>
         <p:nvSpPr>
-          <p:cNvPr id="74" name="글"/>
+          <p:cNvPr id="61" name="글"/>
           <p:cNvSpPr txBox="1"/>
           <p:nvPr/>
         </p:nvSpPr>
         <p:spPr>
           <a:xfrm>
-            <a:off x="533400" y="4583430"/>
-            <a:ext cx="1551051" cy="163830"/>
+            <a:off x="533400" y="4838700"/>
+            <a:ext cx="1905762" cy="190500"/>
           </a:xfrm>
           <a:prstGeom prst="rect">
             <a:avLst/>
@@ -5652,7 +5205,7 @@
           <a:p>
             <a:pPr algn="l"/>
             <a:r>
-              <a:rPr sz="810" b="0">
+              <a:rPr sz="1019" b="0">
                 <a:solidFill>
                   <a:srgbClr val="3F4E61"/>
                 </a:solidFill>
@@ -5667,14 +5220,14 @@
       </p:sp>
       <p:sp>
         <p:nvSpPr>
-          <p:cNvPr id="75" name="글"/>
+          <p:cNvPr id="62" name="글"/>
           <p:cNvSpPr txBox="1"/>
           <p:nvPr/>
         </p:nvSpPr>
         <p:spPr>
           <a:xfrm>
-            <a:off x="9807191" y="4488180"/>
-            <a:ext cx="836676" cy="160020"/>
+            <a:off x="7380514" y="4732020"/>
+            <a:ext cx="681609" cy="190500"/>
           </a:xfrm>
           <a:prstGeom prst="rect">
             <a:avLst/>
@@ -5689,46 +5242,9 @@
           <a:p>
             <a:pPr algn="l"/>
             <a:r>
-              <a:rPr sz="780" b="1">
-                <a:solidFill>
-                  <a:srgbClr val="0A2342"/>
-                </a:solidFill>
-                <a:latin typeface="Pretendard"/>
-                <a:ea typeface="Pretendard"/>
-                <a:cs typeface="Pretendard"/>
-              </a:rPr>
-              <a:t>11/30 ~ 12/4</a:t>
-            </a:r>
-          </a:p>
-        </p:txBody>
-      </p:sp>
-      <p:sp>
-        <p:nvSpPr>
-          <p:cNvPr id="76" name="글"/>
-          <p:cNvSpPr txBox="1"/>
-          <p:nvPr/>
-        </p:nvSpPr>
-        <p:spPr>
-          <a:xfrm>
-            <a:off x="10567667" y="4484370"/>
-            <a:ext cx="578930" cy="163830"/>
-          </a:xfrm>
-          <a:prstGeom prst="rect">
-            <a:avLst/>
-          </a:prstGeom>
-          <a:noFill/>
-        </p:spPr>
-        <p:txBody>
-          <a:bodyPr wrap="square" lIns="0" tIns="0" rIns="0" bIns="0" anchor="ctr">
-            <a:noAutofit/>
-          </a:bodyPr>
-          <a:lstStyle/>
-          <a:p>
-            <a:pPr algn="l"/>
-            <a:r>
-              <a:rPr sz="810" b="1">
-                <a:solidFill>
-                  <a:srgbClr val="164B8C"/>
+              <a:rPr sz="1019" b="1">
+                <a:solidFill>
+                  <a:srgbClr val="1E6B4F"/>
                 </a:solidFill>
                 <a:latin typeface="Pretendard"/>
                 <a:ea typeface="Pretendard"/>
@@ -5741,14 +5257,14 @@
       </p:sp>
       <p:sp>
         <p:nvSpPr>
-          <p:cNvPr id="77" name="글"/>
+          <p:cNvPr id="63" name="글"/>
           <p:cNvSpPr txBox="1"/>
           <p:nvPr/>
         </p:nvSpPr>
         <p:spPr>
           <a:xfrm>
-            <a:off x="533400" y="4869180"/>
-            <a:ext cx="785241" cy="190500"/>
+            <a:off x="533400" y="5143500"/>
+            <a:ext cx="891540" cy="213360"/>
           </a:xfrm>
           <a:prstGeom prst="rect">
             <a:avLst/>
@@ -5763,9 +5279,9 @@
           <a:p>
             <a:pPr algn="l"/>
             <a:r>
-              <a:rPr sz="1019" b="1">
-                <a:solidFill>
-                  <a:srgbClr val="0A2342"/>
+              <a:rPr sz="1200" b="1">
+                <a:solidFill>
+                  <a:srgbClr val="0B3D2E"/>
                 </a:solidFill>
                 <a:latin typeface="Pretendard"/>
                 <a:ea typeface="Pretendard"/>
@@ -5778,14 +5294,14 @@
       </p:sp>
       <p:sp>
         <p:nvSpPr>
-          <p:cNvPr id="78" name="글"/>
+          <p:cNvPr id="64" name="글"/>
           <p:cNvSpPr txBox="1"/>
           <p:nvPr/>
         </p:nvSpPr>
         <p:spPr>
           <a:xfrm>
-            <a:off x="533400" y="5055870"/>
-            <a:ext cx="1479042" cy="163830"/>
+            <a:off x="533400" y="5356860"/>
+            <a:ext cx="1815084" cy="190500"/>
           </a:xfrm>
           <a:prstGeom prst="rect">
             <a:avLst/>
@@ -5800,7 +5316,7 @@
           <a:p>
             <a:pPr algn="l"/>
             <a:r>
-              <a:rPr sz="810" b="0">
+              <a:rPr sz="1019" b="0">
                 <a:solidFill>
                   <a:srgbClr val="3F4E61"/>
                 </a:solidFill>
@@ -5815,14 +5331,14 @@
       </p:sp>
       <p:sp>
         <p:nvSpPr>
-          <p:cNvPr id="79" name="글"/>
+          <p:cNvPr id="65" name="글"/>
           <p:cNvSpPr txBox="1"/>
           <p:nvPr/>
         </p:nvSpPr>
         <p:spPr>
           <a:xfrm>
-            <a:off x="10440237" y="4960620"/>
-            <a:ext cx="836676" cy="160020"/>
+            <a:off x="8752114" y="5250180"/>
+            <a:ext cx="1109091" cy="190500"/>
           </a:xfrm>
           <a:prstGeom prst="rect">
             <a:avLst/>
@@ -5837,29 +5353,29 @@
           <a:p>
             <a:pPr algn="l"/>
             <a:r>
-              <a:rPr sz="780" b="1">
-                <a:solidFill>
-                  <a:srgbClr val="0A2342"/>
+              <a:rPr sz="1019" b="1">
+                <a:solidFill>
+                  <a:srgbClr val="0B3D2E"/>
                 </a:solidFill>
                 <a:latin typeface="Pretendard"/>
                 <a:ea typeface="Pretendard"/>
                 <a:cs typeface="Pretendard"/>
               </a:rPr>
-              <a:t>12/7 ~ 12/11</a:t>
-            </a:r>
-          </a:p>
-        </p:txBody>
-      </p:sp>
-      <p:sp>
-        <p:nvSpPr>
-          <p:cNvPr id="80" name="글"/>
+              <a:t>10/19 ~ 10/23</a:t>
+            </a:r>
+          </a:p>
+        </p:txBody>
+      </p:sp>
+      <p:sp>
+        <p:nvSpPr>
+          <p:cNvPr id="66" name="글"/>
           <p:cNvSpPr txBox="1"/>
           <p:nvPr/>
         </p:nvSpPr>
         <p:spPr>
           <a:xfrm>
-            <a:off x="533400" y="5341620"/>
-            <a:ext cx="655701" cy="190500"/>
+            <a:off x="533400" y="5661660"/>
+            <a:ext cx="739140" cy="213360"/>
           </a:xfrm>
           <a:prstGeom prst="rect">
             <a:avLst/>
@@ -5874,9 +5390,9 @@
           <a:p>
             <a:pPr algn="l"/>
             <a:r>
-              <a:rPr sz="1019" b="1">
-                <a:solidFill>
-                  <a:srgbClr val="0A2342"/>
+              <a:rPr sz="1200" b="1">
+                <a:solidFill>
+                  <a:srgbClr val="0B3D2E"/>
                 </a:solidFill>
                 <a:latin typeface="Pretendard"/>
                 <a:ea typeface="Pretendard"/>
@@ -5889,14 +5405,14 @@
       </p:sp>
       <p:sp>
         <p:nvSpPr>
-          <p:cNvPr id="81" name="글"/>
+          <p:cNvPr id="67" name="글"/>
           <p:cNvSpPr txBox="1"/>
           <p:nvPr/>
         </p:nvSpPr>
         <p:spPr>
           <a:xfrm>
-            <a:off x="533400" y="5528310"/>
-            <a:ext cx="1720787" cy="163830"/>
+            <a:off x="533400" y="5875020"/>
+            <a:ext cx="2119503" cy="190500"/>
           </a:xfrm>
           <a:prstGeom prst="rect">
             <a:avLst/>
@@ -5911,7 +5427,7 @@
           <a:p>
             <a:pPr algn="l"/>
             <a:r>
-              <a:rPr sz="810" b="0">
+              <a:rPr sz="1019" b="0">
                 <a:solidFill>
                   <a:srgbClr val="3F4E61"/>
                 </a:solidFill>
@@ -5926,14 +5442,14 @@
       </p:sp>
       <p:sp>
         <p:nvSpPr>
-          <p:cNvPr id="82" name="글"/>
+          <p:cNvPr id="68" name="글"/>
           <p:cNvSpPr txBox="1"/>
           <p:nvPr/>
         </p:nvSpPr>
         <p:spPr>
           <a:xfrm>
-            <a:off x="11073284" y="5433060"/>
-            <a:ext cx="891159" cy="160020"/>
+            <a:off x="10123714" y="5768340"/>
+            <a:ext cx="1109091" cy="190500"/>
           </a:xfrm>
           <a:prstGeom prst="rect">
             <a:avLst/>
@@ -5948,29 +5464,29 @@
           <a:p>
             <a:pPr algn="l"/>
             <a:r>
-              <a:rPr sz="780" b="1">
-                <a:solidFill>
-                  <a:srgbClr val="0A2342"/>
+              <a:rPr sz="1019" b="1">
+                <a:solidFill>
+                  <a:srgbClr val="0B3D2E"/>
                 </a:solidFill>
                 <a:latin typeface="Pretendard"/>
                 <a:ea typeface="Pretendard"/>
                 <a:cs typeface="Pretendard"/>
               </a:rPr>
-              <a:t>12/14 ~ 12/18</a:t>
-            </a:r>
-          </a:p>
-        </p:txBody>
-      </p:sp>
-      <p:sp>
-        <p:nvSpPr>
-          <p:cNvPr id="83" name="범례"/>
+              <a:t>10/26 ~ 10/30</a:t>
+            </a:r>
+          </a:p>
+        </p:txBody>
+      </p:sp>
+      <p:sp>
+        <p:nvSpPr>
+          <p:cNvPr id="69" name="범례"/>
           <p:cNvSpPr/>
           <p:nvPr/>
         </p:nvSpPr>
         <p:spPr>
           <a:xfrm>
             <a:off x="381000" y="6309360"/>
-            <a:ext cx="2783205" cy="396240"/>
+            <a:ext cx="2898267" cy="396240"/>
           </a:xfrm>
           <a:prstGeom prst="roundRect">
             <a:avLst>
@@ -5982,7 +5498,7 @@
           </a:solidFill>
           <a:ln w="10668">
             <a:solidFill>
-              <a:srgbClr val="A9C3E2"/>
+              <a:srgbClr val="9DD3B8"/>
             </a:solidFill>
           </a:ln>
         </p:spPr>
@@ -5996,7 +5512,7 @@
       </p:sp>
       <p:sp>
         <p:nvSpPr>
-          <p:cNvPr id="84" name="범례 제목"/>
+          <p:cNvPr id="70" name="범례 제목"/>
           <p:cNvSpPr txBox="1"/>
           <p:nvPr/>
         </p:nvSpPr>
@@ -6018,9 +5534,9 @@
           <a:p>
             <a:pPr algn="l"/>
             <a:r>
-              <a:rPr sz="900" b="1">
-                <a:solidFill>
-                  <a:srgbClr val="0A2342"/>
+              <a:rPr sz="1019" b="1">
+                <a:solidFill>
+                  <a:srgbClr val="0B3D2E"/>
                 </a:solidFill>
                 <a:latin typeface="Pretendard"/>
                 <a:ea typeface="Pretendard"/>
@@ -6033,7 +5549,7 @@
       </p:sp>
       <p:sp>
         <p:nvSpPr>
-          <p:cNvPr id="85" name="범례 완료"/>
+          <p:cNvPr id="71" name="범례 완료"/>
           <p:cNvSpPr/>
           <p:nvPr/>
         </p:nvSpPr>
@@ -6048,11 +5564,11 @@
             </a:avLst>
           </a:prstGeom>
           <a:solidFill>
-            <a:srgbClr val="164B8C"/>
+            <a:srgbClr val="1E6B4F"/>
           </a:solidFill>
           <a:ln w="7620">
             <a:solidFill>
-              <a:srgbClr val="6F9BD1"/>
+              <a:srgbClr val="9DD3B8"/>
             </a:solidFill>
           </a:ln>
         </p:spPr>
@@ -6066,14 +5582,14 @@
       </p:sp>
       <p:sp>
         <p:nvSpPr>
-          <p:cNvPr id="86" name="범례 글 완료"/>
+          <p:cNvPr id="72" name="범례 글 완료"/>
           <p:cNvSpPr txBox="1"/>
           <p:nvPr/>
         </p:nvSpPr>
         <p:spPr>
           <a:xfrm>
             <a:off x="1173480" y="6309360"/>
-            <a:ext cx="381000" cy="396240"/>
+            <a:ext cx="411480" cy="396240"/>
           </a:xfrm>
           <a:prstGeom prst="rect">
             <a:avLst/>
@@ -6088,7 +5604,7 @@
           <a:p>
             <a:pPr algn="l"/>
             <a:r>
-              <a:rPr sz="900" b="1">
+              <a:rPr sz="1019" b="1">
                 <a:solidFill>
                   <a:srgbClr val="16202C"/>
                 </a:solidFill>
@@ -6103,13 +5619,13 @@
       </p:sp>
       <p:sp>
         <p:nvSpPr>
-          <p:cNvPr id="87" name="범례 진행 중"/>
+          <p:cNvPr id="73" name="범례 진행 중"/>
           <p:cNvSpPr/>
           <p:nvPr/>
         </p:nvSpPr>
         <p:spPr>
           <a:xfrm>
-            <a:off x="1630680" y="6438900"/>
+            <a:off x="1661160" y="6438900"/>
             <a:ext cx="182880" cy="137160"/>
           </a:xfrm>
           <a:prstGeom prst="roundRect">
@@ -6118,11 +5634,11 @@
             </a:avLst>
           </a:prstGeom>
           <a:solidFill>
-            <a:srgbClr val="1F74C4"/>
+            <a:srgbClr val="2E9E6E"/>
           </a:solidFill>
           <a:ln w="7620">
             <a:solidFill>
-              <a:srgbClr val="6F9BD1"/>
+              <a:srgbClr val="9DD3B8"/>
             </a:solidFill>
           </a:ln>
         </p:spPr>
@@ -6136,14 +5652,14 @@
       </p:sp>
       <p:sp>
         <p:nvSpPr>
-          <p:cNvPr id="88" name="범례 글 진행 중"/>
+          <p:cNvPr id="74" name="범례 글 진행 중"/>
           <p:cNvSpPr txBox="1"/>
           <p:nvPr/>
         </p:nvSpPr>
         <p:spPr>
           <a:xfrm>
-            <a:off x="1889760" y="6309360"/>
-            <a:ext cx="558165" cy="396240"/>
+            <a:off x="1920240" y="6309360"/>
+            <a:ext cx="612267" cy="396240"/>
           </a:xfrm>
           <a:prstGeom prst="rect">
             <a:avLst/>
@@ -6158,7 +5674,7 @@
           <a:p>
             <a:pPr algn="l"/>
             <a:r>
-              <a:rPr sz="900" b="1">
+              <a:rPr sz="1019" b="1">
                 <a:solidFill>
                   <a:srgbClr val="16202C"/>
                 </a:solidFill>
@@ -6173,13 +5689,13 @@
       </p:sp>
       <p:sp>
         <p:nvSpPr>
-          <p:cNvPr id="89" name="범례 예정"/>
+          <p:cNvPr id="75" name="범례 예정"/>
           <p:cNvSpPr/>
           <p:nvPr/>
         </p:nvSpPr>
         <p:spPr>
           <a:xfrm>
-            <a:off x="2524125" y="6438900"/>
+            <a:off x="2608707" y="6438900"/>
             <a:ext cx="182880" cy="137160"/>
           </a:xfrm>
           <a:prstGeom prst="roundRect">
@@ -6188,11 +5704,11 @@
             </a:avLst>
           </a:prstGeom>
           <a:solidFill>
-            <a:srgbClr val="D3E5F8"/>
+            <a:srgbClr val="D5EFE2"/>
           </a:solidFill>
           <a:ln w="7620">
             <a:solidFill>
-              <a:srgbClr val="6F9BD1"/>
+              <a:srgbClr val="9DD3B8"/>
             </a:solidFill>
           </a:ln>
         </p:spPr>
@@ -6206,14 +5722,14 @@
       </p:sp>
       <p:sp>
         <p:nvSpPr>
-          <p:cNvPr id="90" name="범례 글 예정"/>
+          <p:cNvPr id="76" name="범례 글 예정"/>
           <p:cNvSpPr txBox="1"/>
           <p:nvPr/>
         </p:nvSpPr>
         <p:spPr>
           <a:xfrm>
-            <a:off x="2783205" y="6309360"/>
-            <a:ext cx="381000" cy="396240"/>
+            <a:off x="2867787" y="6309360"/>
+            <a:ext cx="411480" cy="396240"/>
           </a:xfrm>
           <a:prstGeom prst="rect">
             <a:avLst/>
@@ -6228,7 +5744,7 @@
           <a:p>
             <a:pPr algn="l"/>
             <a:r>
-              <a:rPr sz="900" b="1">
+              <a:rPr sz="1019" b="1">
                 <a:solidFill>
                   <a:srgbClr val="16202C"/>
                 </a:solidFill>
@@ -6243,14 +5759,14 @@
       </p:sp>
       <p:sp>
         <p:nvSpPr>
-          <p:cNvPr id="91" name="설명"/>
+          <p:cNvPr id="77" name="설명"/>
           <p:cNvSpPr txBox="1"/>
           <p:nvPr/>
         </p:nvSpPr>
         <p:spPr>
           <a:xfrm>
-            <a:off x="5510784" y="6385560"/>
-            <a:ext cx="6300216" cy="167640"/>
+            <a:off x="6395847" y="6347460"/>
+            <a:ext cx="5415153" cy="190500"/>
           </a:xfrm>
           <a:prstGeom prst="rect">
             <a:avLst/>
@@ -6265,7 +5781,7 @@
           <a:p>
             <a:pPr algn="r"/>
             <a:r>
-              <a:rPr sz="840" b="0">
+              <a:rPr sz="1019" b="0">
                 <a:solidFill>
                   <a:srgbClr val="3F4E61"/>
                 </a:solidFill>
@@ -6273,21 +5789,21 @@
                 <a:ea typeface="Pretendard"/>
                 <a:cs typeface="Pretendard"/>
               </a:rPr>
-              <a:t>막대 오른쪽 D 번호: 그 단계에서 함께 만드는 설계 문서 · 3단계 이후 날짜는 안(案)으로 단계가 끝날 때마다 고친다</a:t>
-            </a:r>
-          </a:p>
-        </p:txBody>
-      </p:sp>
-      <p:sp>
-        <p:nvSpPr>
-          <p:cNvPr id="92" name="설명"/>
+              <a:t>막대 오른쪽 D 번호: 그 단계에 맞춰 만드는 설계 문서 · 6단계부터 날짜는 안(案)</a:t>
+            </a:r>
+          </a:p>
+        </p:txBody>
+      </p:sp>
+      <p:sp>
+        <p:nvSpPr>
+          <p:cNvPr id="78" name="설명"/>
           <p:cNvSpPr txBox="1"/>
           <p:nvPr/>
         </p:nvSpPr>
         <p:spPr>
           <a:xfrm>
-            <a:off x="7729728" y="6553200"/>
-            <a:ext cx="4081272" cy="167640"/>
+            <a:off x="6564249" y="6537960"/>
+            <a:ext cx="5246751" cy="190500"/>
           </a:xfrm>
           <a:prstGeom prst="rect">
             <a:avLst/>
@@ -6302,7 +5818,7 @@
           <a:p>
             <a:pPr algn="r"/>
             <a:r>
-              <a:rPr sz="840" b="0">
+              <a:rPr sz="1019" b="0">
                 <a:solidFill>
                   <a:srgbClr val="3F4E61"/>
                 </a:solidFill>
@@ -6310,7 +5826,7 @@
                 <a:ea typeface="Pretendard"/>
                 <a:cs typeface="Pretendard"/>
               </a:rPr>
-              <a:t>단계마다 브랜치 하나 + draft PR 하나 · 머지는 사용자가 한다(plan §6)</a:t>
+              <a:t>단계마다 브랜치 하나 + draft PR 하나 · 머지는 사용자가 한다(CLAUDE.md §4)</a:t>
             </a:r>
           </a:p>
         </p:txBody>

--- a/docs/design/dist/d06-schedule.pptx
+++ b/docs/design/dist/d06-schedule.pptx
@@ -3196,7 +3196,7 @@
                 <a:ea typeface="Pretendard"/>
                 <a:cs typeface="Pretendard"/>
               </a:rPr>
-              <a:t>0 ~ 5단계는 실제(PR 머지일) · 6단계부터 안(案) · 오늘 2026-10-09</a:t>
+              <a:t>0 ~ 6단계는 실제(PR 머지일) · 7단계부터 안(案) · 오늘 2026-10-10</a:t>
             </a:r>
           </a:p>
         </p:txBody>
@@ -3233,7 +3233,7 @@
                 <a:ea typeface="Pretendard"/>
                 <a:cs typeface="Pretendard"/>
               </a:rPr>
-              <a:t>KDMS-D06 · v0.2 · 2026-10-09</a:t>
+              <a:t>KDMS-D06 · v0.3 · 2026-10-10</a:t>
             </a:r>
           </a:p>
         </p:txBody>
@@ -3618,7 +3618,7 @@
         </p:nvSpPr>
         <p:spPr>
           <a:xfrm>
-            <a:off x="5827123" y="1447800"/>
+            <a:off x="6023066" y="1447800"/>
             <a:ext cx="15240" cy="4861560"/>
           </a:xfrm>
           <a:prstGeom prst="roundRect">
@@ -3875,7 +3875,7 @@
         <p:spPr>
           <a:xfrm>
             <a:off x="5736771" y="4693920"/>
-            <a:ext cx="1567543" cy="274320"/>
+            <a:ext cx="391886" cy="274320"/>
           </a:xfrm>
           <a:prstGeom prst="roundRect">
             <a:avLst>
@@ -3883,30 +3883,17 @@
             </a:avLst>
           </a:prstGeom>
           <a:solidFill>
-            <a:srgbClr val="2E9E6E"/>
+            <a:srgbClr val="1E6B4F"/>
           </a:solidFill>
           <a:ln>
             <a:noFill/>
           </a:ln>
         </p:spPr>
         <p:txBody>
-          <a:bodyPr rtlCol="0" anchor="ctr" lIns="0" tIns="0" rIns="0" bIns="0" wrap="none">
-            <a:noAutofit/>
-          </a:bodyPr>
+          <a:bodyPr rtlCol="0" anchor="ctr"/>
           <a:lstStyle/>
           <a:p>
             <a:pPr algn="ctr"/>
-            <a:r>
-              <a:rPr sz="1019" b="1">
-                <a:solidFill>
-                  <a:srgbClr val="FFFFFF"/>
-                </a:solidFill>
-                <a:latin typeface="Pretendard"/>
-                <a:ea typeface="Pretendard"/>
-                <a:cs typeface="Pretendard"/>
-              </a:rPr>
-              <a:t>10/9 ~ 10/16</a:t>
-            </a:r>
           </a:p>
         </p:txBody>
       </p:sp>
@@ -4375,8 +4362,8 @@
         </p:nvSpPr>
         <p:spPr>
           <a:xfrm>
-            <a:off x="5895703" y="6164580"/>
-            <a:ext cx="798195" cy="190500"/>
+            <a:off x="6091646" y="6164580"/>
+            <a:ext cx="869442" cy="190500"/>
           </a:xfrm>
           <a:prstGeom prst="rect">
             <a:avLst/>
@@ -4399,7 +4386,7 @@
                 <a:ea typeface="Pretendard"/>
                 <a:cs typeface="Pretendard"/>
               </a:rPr>
-              <a:t>오늘 10/9</a:t>
+              <a:t>오늘 10/10</a:t>
             </a:r>
           </a:p>
         </p:txBody>
@@ -4560,7 +4547,7 @@
         </p:nvSpPr>
         <p:spPr>
           <a:xfrm>
-            <a:off x="5926183" y="2141220"/>
+            <a:off x="6122126" y="2141220"/>
             <a:ext cx="1251585" cy="190500"/>
           </a:xfrm>
           <a:prstGeom prst="rect">
@@ -4782,7 +4769,7 @@
         </p:nvSpPr>
         <p:spPr>
           <a:xfrm>
-            <a:off x="5926183" y="3177540"/>
+            <a:off x="6122126" y="3177540"/>
             <a:ext cx="966597" cy="190500"/>
           </a:xfrm>
           <a:prstGeom prst="rect">
@@ -4819,7 +4806,7 @@
         </p:nvSpPr>
         <p:spPr>
           <a:xfrm>
-            <a:off x="6816580" y="3177540"/>
+            <a:off x="7012523" y="3177540"/>
             <a:ext cx="681609" cy="190500"/>
           </a:xfrm>
           <a:prstGeom prst="rect">
@@ -4930,7 +4917,7 @@
         </p:nvSpPr>
         <p:spPr>
           <a:xfrm>
-            <a:off x="5926183" y="3695700"/>
+            <a:off x="6122126" y="3695700"/>
             <a:ext cx="467868" cy="190500"/>
           </a:xfrm>
           <a:prstGeom prst="rect">
@@ -4967,7 +4954,7 @@
         </p:nvSpPr>
         <p:spPr>
           <a:xfrm>
-            <a:off x="6317851" y="3695700"/>
+            <a:off x="6513794" y="3695700"/>
             <a:ext cx="396621" cy="190500"/>
           </a:xfrm>
           <a:prstGeom prst="rect">
@@ -5078,7 +5065,7 @@
         </p:nvSpPr>
         <p:spPr>
           <a:xfrm>
-            <a:off x="5926183" y="4213860"/>
+            <a:off x="6122126" y="4213860"/>
             <a:ext cx="467868" cy="190500"/>
           </a:xfrm>
           <a:prstGeom prst="rect">
@@ -5115,7 +5102,7 @@
         </p:nvSpPr>
         <p:spPr>
           <a:xfrm>
-            <a:off x="6317851" y="4213860"/>
+            <a:off x="6513794" y="4213860"/>
             <a:ext cx="396621" cy="190500"/>
           </a:xfrm>
           <a:prstGeom prst="rect">
@@ -5226,7 +5213,44 @@
         </p:nvSpPr>
         <p:spPr>
           <a:xfrm>
-            <a:off x="7380514" y="4732020"/>
+            <a:off x="6204857" y="4732020"/>
+            <a:ext cx="1037844" cy="190500"/>
+          </a:xfrm>
+          <a:prstGeom prst="rect">
+            <a:avLst/>
+          </a:prstGeom>
+          <a:noFill/>
+        </p:spPr>
+        <p:txBody>
+          <a:bodyPr wrap="square" lIns="0" tIns="0" rIns="0" bIns="0" anchor="ctr">
+            <a:noAutofit/>
+          </a:bodyPr>
+          <a:lstStyle/>
+          <a:p>
+            <a:pPr algn="l"/>
+            <a:r>
+              <a:rPr sz="1019" b="1">
+                <a:solidFill>
+                  <a:srgbClr val="0B3D2E"/>
+                </a:solidFill>
+                <a:latin typeface="Pretendard"/>
+                <a:ea typeface="Pretendard"/>
+                <a:cs typeface="Pretendard"/>
+              </a:rPr>
+              <a:t>10/9 ~ 10/10</a:t>
+            </a:r>
+          </a:p>
+        </p:txBody>
+      </p:sp>
+      <p:sp>
+        <p:nvSpPr>
+          <p:cNvPr id="63" name="글"/>
+          <p:cNvSpPr txBox="1"/>
+          <p:nvPr/>
+        </p:nvSpPr>
+        <p:spPr>
+          <a:xfrm>
+            <a:off x="7166501" y="4732020"/>
             <a:ext cx="681609" cy="190500"/>
           </a:xfrm>
           <a:prstGeom prst="rect">
@@ -5257,7 +5281,7 @@
       </p:sp>
       <p:sp>
         <p:nvSpPr>
-          <p:cNvPr id="63" name="글"/>
+          <p:cNvPr id="64" name="글"/>
           <p:cNvSpPr txBox="1"/>
           <p:nvPr/>
         </p:nvSpPr>
@@ -5294,7 +5318,7 @@
       </p:sp>
       <p:sp>
         <p:nvSpPr>
-          <p:cNvPr id="64" name="글"/>
+          <p:cNvPr id="65" name="글"/>
           <p:cNvSpPr txBox="1"/>
           <p:nvPr/>
         </p:nvSpPr>
@@ -5331,7 +5355,7 @@
       </p:sp>
       <p:sp>
         <p:nvSpPr>
-          <p:cNvPr id="65" name="글"/>
+          <p:cNvPr id="66" name="글"/>
           <p:cNvSpPr txBox="1"/>
           <p:nvPr/>
         </p:nvSpPr>
@@ -5368,7 +5392,7 @@
       </p:sp>
       <p:sp>
         <p:nvSpPr>
-          <p:cNvPr id="66" name="글"/>
+          <p:cNvPr id="67" name="글"/>
           <p:cNvSpPr txBox="1"/>
           <p:nvPr/>
         </p:nvSpPr>
@@ -5405,7 +5429,7 @@
       </p:sp>
       <p:sp>
         <p:nvSpPr>
-          <p:cNvPr id="67" name="글"/>
+          <p:cNvPr id="68" name="글"/>
           <p:cNvSpPr txBox="1"/>
           <p:nvPr/>
         </p:nvSpPr>
@@ -5442,7 +5466,7 @@
       </p:sp>
       <p:sp>
         <p:nvSpPr>
-          <p:cNvPr id="68" name="글"/>
+          <p:cNvPr id="69" name="글"/>
           <p:cNvSpPr txBox="1"/>
           <p:nvPr/>
         </p:nvSpPr>
@@ -5479,7 +5503,7 @@
       </p:sp>
       <p:sp>
         <p:nvSpPr>
-          <p:cNvPr id="69" name="범례"/>
+          <p:cNvPr id="70" name="범례"/>
           <p:cNvSpPr/>
           <p:nvPr/>
         </p:nvSpPr>
@@ -5512,7 +5536,7 @@
       </p:sp>
       <p:sp>
         <p:nvSpPr>
-          <p:cNvPr id="70" name="범례 제목"/>
+          <p:cNvPr id="71" name="범례 제목"/>
           <p:cNvSpPr txBox="1"/>
           <p:nvPr/>
         </p:nvSpPr>
@@ -5549,7 +5573,7 @@
       </p:sp>
       <p:sp>
         <p:nvSpPr>
-          <p:cNvPr id="71" name="범례 완료"/>
+          <p:cNvPr id="72" name="범례 완료"/>
           <p:cNvSpPr/>
           <p:nvPr/>
         </p:nvSpPr>
@@ -5582,7 +5606,7 @@
       </p:sp>
       <p:sp>
         <p:nvSpPr>
-          <p:cNvPr id="72" name="범례 글 완료"/>
+          <p:cNvPr id="73" name="범례 글 완료"/>
           <p:cNvSpPr txBox="1"/>
           <p:nvPr/>
         </p:nvSpPr>
@@ -5619,7 +5643,7 @@
       </p:sp>
       <p:sp>
         <p:nvSpPr>
-          <p:cNvPr id="73" name="범례 진행 중"/>
+          <p:cNvPr id="74" name="범례 진행 중"/>
           <p:cNvSpPr/>
           <p:nvPr/>
         </p:nvSpPr>
@@ -5652,7 +5676,7 @@
       </p:sp>
       <p:sp>
         <p:nvSpPr>
-          <p:cNvPr id="74" name="범례 글 진행 중"/>
+          <p:cNvPr id="75" name="범례 글 진행 중"/>
           <p:cNvSpPr txBox="1"/>
           <p:nvPr/>
         </p:nvSpPr>
@@ -5689,7 +5713,7 @@
       </p:sp>
       <p:sp>
         <p:nvSpPr>
-          <p:cNvPr id="75" name="범례 예정"/>
+          <p:cNvPr id="76" name="범례 예정"/>
           <p:cNvSpPr/>
           <p:nvPr/>
         </p:nvSpPr>
@@ -5722,7 +5746,7 @@
       </p:sp>
       <p:sp>
         <p:nvSpPr>
-          <p:cNvPr id="76" name="범례 글 예정"/>
+          <p:cNvPr id="77" name="범례 글 예정"/>
           <p:cNvSpPr txBox="1"/>
           <p:nvPr/>
         </p:nvSpPr>
@@ -5759,7 +5783,7 @@
       </p:sp>
       <p:sp>
         <p:nvSpPr>
-          <p:cNvPr id="77" name="설명"/>
+          <p:cNvPr id="78" name="설명"/>
           <p:cNvSpPr txBox="1"/>
           <p:nvPr/>
         </p:nvSpPr>
@@ -5789,14 +5813,14 @@
                 <a:ea typeface="Pretendard"/>
                 <a:cs typeface="Pretendard"/>
               </a:rPr>
-              <a:t>막대 오른쪽 D 번호: 그 단계에 맞춰 만드는 설계 문서 · 6단계부터 날짜는 안(案)</a:t>
-            </a:r>
-          </a:p>
-        </p:txBody>
-      </p:sp>
-      <p:sp>
-        <p:nvSpPr>
-          <p:cNvPr id="78" name="설명"/>
+              <a:t>막대 오른쪽 D 번호: 그 단계에 맞춰 만드는 설계 문서 · 7단계부터 날짜는 안(案)</a:t>
+            </a:r>
+          </a:p>
+        </p:txBody>
+      </p:sp>
+      <p:sp>
+        <p:nvSpPr>
+          <p:cNvPr id="79" name="설명"/>
           <p:cNvSpPr txBox="1"/>
           <p:nvPr/>
         </p:nvSpPr>
